--- a/PIAE2-Presentacion Tecnica.pptx
+++ b/PIAE2-Presentacion Tecnica.pptx
@@ -12,8 +12,8 @@
     <p:sldId id="257" r:id="rId3"/>
     <p:sldId id="290" r:id="rId4"/>
     <p:sldId id="291" r:id="rId5"/>
-    <p:sldId id="293" r:id="rId6"/>
-    <p:sldId id="292" r:id="rId7"/>
+    <p:sldId id="292" r:id="rId6"/>
+    <p:sldId id="293" r:id="rId7"/>
     <p:sldId id="258" r:id="rId8"/>
     <p:sldId id="259" r:id="rId9"/>
     <p:sldId id="265" r:id="rId10"/>
@@ -6320,7 +6320,7 @@
           <a:p>
             <a:fld id="{B723E7E9-0B4C-4599-8387-854B68DD1F3F}" type="datetimeFigureOut">
               <a:rPr lang="es-MX" smtClean="0"/>
-              <a:t>21/10/2025</a:t>
+              <a:t>26/10/2025</a:t>
             </a:fld>
             <a:endParaRPr lang="es-MX"/>
           </a:p>
@@ -9650,7 +9650,7 @@
           <a:p>
             <a:fld id="{ABDDA2F0-ADA3-4A09-A4A4-0854B4A15306}" type="datetimeFigureOut">
               <a:rPr lang="es-MX" smtClean="0"/>
-              <a:t>21/10/2025</a:t>
+              <a:t>26/10/2025</a:t>
             </a:fld>
             <a:endParaRPr lang="es-MX"/>
           </a:p>
@@ -9850,7 +9850,7 @@
           <a:p>
             <a:fld id="{ABDDA2F0-ADA3-4A09-A4A4-0854B4A15306}" type="datetimeFigureOut">
               <a:rPr lang="es-MX" smtClean="0"/>
-              <a:t>21/10/2025</a:t>
+              <a:t>26/10/2025</a:t>
             </a:fld>
             <a:endParaRPr lang="es-MX"/>
           </a:p>
@@ -10060,7 +10060,7 @@
           <a:p>
             <a:fld id="{ABDDA2F0-ADA3-4A09-A4A4-0854B4A15306}" type="datetimeFigureOut">
               <a:rPr lang="es-MX" smtClean="0"/>
-              <a:t>21/10/2025</a:t>
+              <a:t>26/10/2025</a:t>
             </a:fld>
             <a:endParaRPr lang="es-MX"/>
           </a:p>
@@ -10260,7 +10260,7 @@
           <a:p>
             <a:fld id="{ABDDA2F0-ADA3-4A09-A4A4-0854B4A15306}" type="datetimeFigureOut">
               <a:rPr lang="es-MX" smtClean="0"/>
-              <a:t>21/10/2025</a:t>
+              <a:t>26/10/2025</a:t>
             </a:fld>
             <a:endParaRPr lang="es-MX"/>
           </a:p>
@@ -10536,7 +10536,7 @@
           <a:p>
             <a:fld id="{ABDDA2F0-ADA3-4A09-A4A4-0854B4A15306}" type="datetimeFigureOut">
               <a:rPr lang="es-MX" smtClean="0"/>
-              <a:t>21/10/2025</a:t>
+              <a:t>26/10/2025</a:t>
             </a:fld>
             <a:endParaRPr lang="es-MX"/>
           </a:p>
@@ -10804,7 +10804,7 @@
           <a:p>
             <a:fld id="{ABDDA2F0-ADA3-4A09-A4A4-0854B4A15306}" type="datetimeFigureOut">
               <a:rPr lang="es-MX" smtClean="0"/>
-              <a:t>21/10/2025</a:t>
+              <a:t>26/10/2025</a:t>
             </a:fld>
             <a:endParaRPr lang="es-MX"/>
           </a:p>
@@ -11219,7 +11219,7 @@
           <a:p>
             <a:fld id="{ABDDA2F0-ADA3-4A09-A4A4-0854B4A15306}" type="datetimeFigureOut">
               <a:rPr lang="es-MX" smtClean="0"/>
-              <a:t>21/10/2025</a:t>
+              <a:t>26/10/2025</a:t>
             </a:fld>
             <a:endParaRPr lang="es-MX"/>
           </a:p>
@@ -11361,7 +11361,7 @@
           <a:p>
             <a:fld id="{ABDDA2F0-ADA3-4A09-A4A4-0854B4A15306}" type="datetimeFigureOut">
               <a:rPr lang="es-MX" smtClean="0"/>
-              <a:t>21/10/2025</a:t>
+              <a:t>26/10/2025</a:t>
             </a:fld>
             <a:endParaRPr lang="es-MX"/>
           </a:p>
@@ -11474,7 +11474,7 @@
           <a:p>
             <a:fld id="{ABDDA2F0-ADA3-4A09-A4A4-0854B4A15306}" type="datetimeFigureOut">
               <a:rPr lang="es-MX" smtClean="0"/>
-              <a:t>21/10/2025</a:t>
+              <a:t>26/10/2025</a:t>
             </a:fld>
             <a:endParaRPr lang="es-MX"/>
           </a:p>
@@ -11787,7 +11787,7 @@
           <a:p>
             <a:fld id="{ABDDA2F0-ADA3-4A09-A4A4-0854B4A15306}" type="datetimeFigureOut">
               <a:rPr lang="es-MX" smtClean="0"/>
-              <a:t>21/10/2025</a:t>
+              <a:t>26/10/2025</a:t>
             </a:fld>
             <a:endParaRPr lang="es-MX"/>
           </a:p>
@@ -12076,7 +12076,7 @@
           <a:p>
             <a:fld id="{ABDDA2F0-ADA3-4A09-A4A4-0854B4A15306}" type="datetimeFigureOut">
               <a:rPr lang="es-MX" smtClean="0"/>
-              <a:t>21/10/2025</a:t>
+              <a:t>26/10/2025</a:t>
             </a:fld>
             <a:endParaRPr lang="es-MX"/>
           </a:p>
@@ -12319,7 +12319,7 @@
           <a:p>
             <a:fld id="{ABDDA2F0-ADA3-4A09-A4A4-0854B4A15306}" type="datetimeFigureOut">
               <a:rPr lang="es-MX" smtClean="0"/>
-              <a:t>21/10/2025</a:t>
+              <a:t>26/10/2025</a:t>
             </a:fld>
             <a:endParaRPr lang="es-MX"/>
           </a:p>
@@ -13041,13 +13041,13 @@
         </p:nvSpPr>
         <p:spPr>
           <a:xfrm>
-            <a:off x="3674912" y="4288899"/>
-            <a:ext cx="4694371" cy="1075380"/>
+            <a:off x="6459181" y="4195217"/>
+            <a:ext cx="4694371" cy="1398472"/>
           </a:xfrm>
         </p:spPr>
         <p:txBody>
           <a:bodyPr>
-            <a:normAutofit fontScale="92500" lnSpcReduction="20000"/>
+            <a:normAutofit fontScale="92500" lnSpcReduction="10000"/>
           </a:bodyPr>
           <a:lstStyle/>
           <a:p>
@@ -13058,6 +13058,16 @@
                 <a:cs typeface="Times New Roman" panose="02020603050405020304" pitchFamily="18" charset="0"/>
               </a:rPr>
               <a:t>Alumno: J. Leonardo Valadez</a:t>
+            </a:r>
+          </a:p>
+          <a:p>
+            <a:pPr algn="l"/>
+            <a:r>
+              <a:rPr lang="es-MX" sz="1600" b="1" dirty="0">
+                <a:latin typeface="Times New Roman" panose="02020603050405020304" pitchFamily="18" charset="0"/>
+                <a:cs typeface="Times New Roman" panose="02020603050405020304" pitchFamily="18" charset="0"/>
+              </a:rPr>
+              <a:t>ID: 2079870</a:t>
             </a:r>
           </a:p>
           <a:p>
@@ -27140,7 +27150,7 @@
                 <a:latin typeface="Times New Roman" panose="02020603050405020304" pitchFamily="18" charset="0"/>
                 <a:cs typeface="Times New Roman" panose="02020603050405020304" pitchFamily="18" charset="0"/>
               </a:rPr>
-              <a:t>Problemática</a:t>
+              <a:t>Problemática </a:t>
             </a:r>
           </a:p>
           <a:p>
@@ -27153,7 +27163,7 @@
                 <a:latin typeface="Times New Roman" panose="02020603050405020304" pitchFamily="18" charset="0"/>
                 <a:cs typeface="Times New Roman" panose="02020603050405020304" pitchFamily="18" charset="0"/>
               </a:rPr>
-              <a:t>Objetivos de investigación</a:t>
+              <a:t>Objetivos de investigación </a:t>
             </a:r>
           </a:p>
           <a:p>
@@ -27166,7 +27176,7 @@
                 <a:latin typeface="Times New Roman" panose="02020603050405020304" pitchFamily="18" charset="0"/>
                 <a:cs typeface="Times New Roman" panose="02020603050405020304" pitchFamily="18" charset="0"/>
               </a:rPr>
-              <a:t>Marco teórico</a:t>
+              <a:t>Marco teórico </a:t>
             </a:r>
           </a:p>
           <a:p>
@@ -27205,7 +27215,7 @@
                 <a:latin typeface="Times New Roman" panose="02020603050405020304" pitchFamily="18" charset="0"/>
                 <a:cs typeface="Times New Roman" panose="02020603050405020304" pitchFamily="18" charset="0"/>
               </a:rPr>
-              <a:t>Conclusiones y recomendaciones </a:t>
+              <a:t>Recomendaciones y conclusiones</a:t>
             </a:r>
           </a:p>
           <a:p>
@@ -38161,6 +38171,108 @@
           <p:cNvPr id="2" name="Title 1">
             <a:extLst>
               <a:ext uri="{FF2B5EF4-FFF2-40B4-BE49-F238E27FC236}">
+                <a16:creationId xmlns:a16="http://schemas.microsoft.com/office/drawing/2014/main" id="{207EEC96-4058-9E35-DC4A-F9ACEEE72D62}"/>
+              </a:ext>
+            </a:extLst>
+          </p:cNvPr>
+          <p:cNvSpPr>
+            <a:spLocks noGrp="1"/>
+          </p:cNvSpPr>
+          <p:nvPr>
+            <p:ph type="title"/>
+          </p:nvPr>
+        </p:nvSpPr>
+        <p:spPr/>
+        <p:txBody>
+          <a:bodyPr/>
+          <a:lstStyle/>
+          <a:p>
+            <a:r>
+              <a:rPr lang="es-419" dirty="0"/>
+              <a:t>Contexto y objetivo</a:t>
+            </a:r>
+          </a:p>
+        </p:txBody>
+      </p:sp>
+      <p:sp>
+        <p:nvSpPr>
+          <p:cNvPr id="3" name="Content Placeholder 2">
+            <a:extLst>
+              <a:ext uri="{FF2B5EF4-FFF2-40B4-BE49-F238E27FC236}">
+                <a16:creationId xmlns:a16="http://schemas.microsoft.com/office/drawing/2014/main" id="{D31401BC-DA16-D8A5-B385-B6265F65DD43}"/>
+              </a:ext>
+            </a:extLst>
+          </p:cNvPr>
+          <p:cNvSpPr>
+            <a:spLocks noGrp="1"/>
+          </p:cNvSpPr>
+          <p:nvPr>
+            <p:ph idx="1"/>
+          </p:nvPr>
+        </p:nvSpPr>
+        <p:spPr/>
+        <p:txBody>
+          <a:bodyPr/>
+          <a:lstStyle/>
+          <a:p>
+            <a:r>
+              <a:rPr lang="es-419" dirty="0"/>
+              <a:t>Un motor cohete es utilizado como sistema propulsivo en múltiples vehículos lanzadores a orbita o de tipo militar. El enfoque de esta investigación, no es más que la adquisición de variables termodinámicas de un sistema propulsivo, para este caso uno de los más fáciles y </a:t>
+            </a:r>
+            <a:r>
+              <a:rPr lang="es-419" i="1" dirty="0"/>
+              <a:t>low-cost</a:t>
+            </a:r>
+            <a:r>
+              <a:rPr lang="es-419" dirty="0"/>
+              <a:t> de realizar debido a ciertas precariedades y desactualización de algunos equipos a los que se puede acceder. Este análisis tiene como objetivo además de brindar una fuerte base de conocimiento al publico interesado en este campo, la correcta medición y adquisición de parámetros de un sistema propulsivo evaluando la mejor metodología y dispositivos que den un </a:t>
+            </a:r>
+            <a:r>
+              <a:rPr lang="es-419" i="1" dirty="0"/>
+              <a:t>ratio</a:t>
+            </a:r>
+            <a:r>
+              <a:rPr lang="es-419" dirty="0"/>
+              <a:t> de calidad de datos contra costo</a:t>
+            </a:r>
+          </a:p>
+        </p:txBody>
+      </p:sp>
+    </p:spTree>
+    <p:extLst>
+      <p:ext uri="{BB962C8B-B14F-4D97-AF65-F5344CB8AC3E}">
+        <p14:creationId xmlns:p14="http://schemas.microsoft.com/office/powerpoint/2010/main" val="4136908093"/>
+      </p:ext>
+    </p:extLst>
+  </p:cSld>
+  <p:clrMapOvr>
+    <a:masterClrMapping/>
+  </p:clrMapOvr>
+</p:sld>
+</file>
+
+<file path=ppt/slides/slide6.xml><?xml version="1.0" encoding="utf-8"?>
+<p:sld xmlns:a="http://schemas.openxmlformats.org/drawingml/2006/main" xmlns:r="http://schemas.openxmlformats.org/officeDocument/2006/relationships" xmlns:p="http://schemas.openxmlformats.org/presentationml/2006/main">
+  <p:cSld>
+    <p:spTree>
+      <p:nvGrpSpPr>
+        <p:cNvPr id="1" name=""/>
+        <p:cNvGrpSpPr/>
+        <p:nvPr/>
+      </p:nvGrpSpPr>
+      <p:grpSpPr>
+        <a:xfrm>
+          <a:off x="0" y="0"/>
+          <a:ext cx="0" cy="0"/>
+          <a:chOff x="0" y="0"/>
+          <a:chExt cx="0" cy="0"/>
+        </a:xfrm>
+      </p:grpSpPr>
+      <p:sp>
+        <p:nvSpPr>
+          <p:cNvPr id="2" name="Title 1">
+            <a:extLst>
+              <a:ext uri="{FF2B5EF4-FFF2-40B4-BE49-F238E27FC236}">
                 <a16:creationId xmlns:a16="http://schemas.microsoft.com/office/drawing/2014/main" id="{6428637B-D9FD-C011-0B5C-5148F711F602}"/>
               </a:ext>
             </a:extLst>
@@ -38306,108 +38418,6 @@
     <p:extLst>
       <p:ext uri="{BB962C8B-B14F-4D97-AF65-F5344CB8AC3E}">
         <p14:creationId xmlns:p14="http://schemas.microsoft.com/office/powerpoint/2010/main" val="2778621097"/>
-      </p:ext>
-    </p:extLst>
-  </p:cSld>
-  <p:clrMapOvr>
-    <a:masterClrMapping/>
-  </p:clrMapOvr>
-</p:sld>
-</file>
-
-<file path=ppt/slides/slide6.xml><?xml version="1.0" encoding="utf-8"?>
-<p:sld xmlns:a="http://schemas.openxmlformats.org/drawingml/2006/main" xmlns:r="http://schemas.openxmlformats.org/officeDocument/2006/relationships" xmlns:p="http://schemas.openxmlformats.org/presentationml/2006/main">
-  <p:cSld>
-    <p:spTree>
-      <p:nvGrpSpPr>
-        <p:cNvPr id="1" name=""/>
-        <p:cNvGrpSpPr/>
-        <p:nvPr/>
-      </p:nvGrpSpPr>
-      <p:grpSpPr>
-        <a:xfrm>
-          <a:off x="0" y="0"/>
-          <a:ext cx="0" cy="0"/>
-          <a:chOff x="0" y="0"/>
-          <a:chExt cx="0" cy="0"/>
-        </a:xfrm>
-      </p:grpSpPr>
-      <p:sp>
-        <p:nvSpPr>
-          <p:cNvPr id="2" name="Title 1">
-            <a:extLst>
-              <a:ext uri="{FF2B5EF4-FFF2-40B4-BE49-F238E27FC236}">
-                <a16:creationId xmlns:a16="http://schemas.microsoft.com/office/drawing/2014/main" id="{207EEC96-4058-9E35-DC4A-F9ACEEE72D62}"/>
-              </a:ext>
-            </a:extLst>
-          </p:cNvPr>
-          <p:cNvSpPr>
-            <a:spLocks noGrp="1"/>
-          </p:cNvSpPr>
-          <p:nvPr>
-            <p:ph type="title"/>
-          </p:nvPr>
-        </p:nvSpPr>
-        <p:spPr/>
-        <p:txBody>
-          <a:bodyPr/>
-          <a:lstStyle/>
-          <a:p>
-            <a:r>
-              <a:rPr lang="es-419" dirty="0"/>
-              <a:t>Contexto y objetivo</a:t>
-            </a:r>
-          </a:p>
-        </p:txBody>
-      </p:sp>
-      <p:sp>
-        <p:nvSpPr>
-          <p:cNvPr id="3" name="Content Placeholder 2">
-            <a:extLst>
-              <a:ext uri="{FF2B5EF4-FFF2-40B4-BE49-F238E27FC236}">
-                <a16:creationId xmlns:a16="http://schemas.microsoft.com/office/drawing/2014/main" id="{D31401BC-DA16-D8A5-B385-B6265F65DD43}"/>
-              </a:ext>
-            </a:extLst>
-          </p:cNvPr>
-          <p:cNvSpPr>
-            <a:spLocks noGrp="1"/>
-          </p:cNvSpPr>
-          <p:nvPr>
-            <p:ph idx="1"/>
-          </p:nvPr>
-        </p:nvSpPr>
-        <p:spPr/>
-        <p:txBody>
-          <a:bodyPr/>
-          <a:lstStyle/>
-          <a:p>
-            <a:r>
-              <a:rPr lang="es-419" dirty="0"/>
-              <a:t>Un motor cohete es utilizado como sistema propulsivo en múltiples vehículos lanzadores a orbita o de tipo militar. El enfoque de esta investigación, no es más que la adquisición de variables termodinámicas de un sistema propulsivo, para este caso uno de los más fáciles y </a:t>
-            </a:r>
-            <a:r>
-              <a:rPr lang="es-419" i="1" dirty="0"/>
-              <a:t>low-cost</a:t>
-            </a:r>
-            <a:r>
-              <a:rPr lang="es-419" dirty="0"/>
-              <a:t> de realizar debido a ciertas precariedades y desactualización de algunos equipos a los que se puede acceder. Este análisis tiene como objetivo además de brindar una fuerte base de conocimiento al publico interesado en este campo, la correcta medición y adquisición de parámetros de un sistema propulsivo evaluando la mejor metodología y dispositivos que den un </a:t>
-            </a:r>
-            <a:r>
-              <a:rPr lang="es-419" i="1" dirty="0"/>
-              <a:t>ratio</a:t>
-            </a:r>
-            <a:r>
-              <a:rPr lang="es-419" dirty="0"/>
-              <a:t> de calidad de datos contra costo</a:t>
-            </a:r>
-          </a:p>
-        </p:txBody>
-      </p:sp>
-    </p:spTree>
-    <p:extLst>
-      <p:ext uri="{BB962C8B-B14F-4D97-AF65-F5344CB8AC3E}">
-        <p14:creationId xmlns:p14="http://schemas.microsoft.com/office/powerpoint/2010/main" val="4136908093"/>
       </p:ext>
     </p:extLst>
   </p:cSld>

--- a/PIAE2-Presentacion Tecnica.pptx
+++ b/PIAE2-Presentacion Tecnica.pptx
@@ -131,7 +131,7 @@
 </file>
 
 <file path=ppt/charts/chart1.xml><?xml version="1.0" encoding="utf-8"?>
-<c:chartSpace xmlns:c="http://schemas.openxmlformats.org/drawingml/2006/chart" xmlns:a="http://schemas.openxmlformats.org/drawingml/2006/main" xmlns:r="http://schemas.openxmlformats.org/officeDocument/2006/relationships">
+<c:chartSpace xmlns:c="http://schemas.openxmlformats.org/drawingml/2006/chart" xmlns:a="http://schemas.openxmlformats.org/drawingml/2006/main" xmlns:r="http://schemas.openxmlformats.org/officeDocument/2006/relationships" xmlns:c16r2="http://schemas.microsoft.com/office/drawing/2015/06/chart">
   <c:date1904 val="0"/>
   <c:lang val="en-US"/>
   <c:roundedCorners val="0"/>
@@ -5530,7 +5530,7 @@
             </c:numRef>
           </c:yVal>
           <c:smooth val="1"/>
-          <c:extLst xmlns:c16r2="http://schemas.microsoft.com/office/drawing/2015/06/chart">
+          <c:extLst>
             <c:ext xmlns:c16="http://schemas.microsoft.com/office/drawing/2014/chart" uri="{C3380CC4-5D6E-409C-BE32-E72D297353CC}">
               <c16:uniqueId val="{00000000-E9BF-40D2-8F73-06B3DA370149}"/>
             </c:ext>
@@ -5779,7 +5779,7 @@
 </file>
 
 <file path=ppt/charts/chart2.xml><?xml version="1.0" encoding="utf-8"?>
-<c:chartSpace xmlns:c="http://schemas.openxmlformats.org/drawingml/2006/chart" xmlns:a="http://schemas.openxmlformats.org/drawingml/2006/main" xmlns:r="http://schemas.openxmlformats.org/officeDocument/2006/relationships">
+<c:chartSpace xmlns:c="http://schemas.openxmlformats.org/drawingml/2006/chart" xmlns:a="http://schemas.openxmlformats.org/drawingml/2006/main" xmlns:r="http://schemas.openxmlformats.org/officeDocument/2006/relationships" xmlns:c16r2="http://schemas.microsoft.com/office/drawing/2015/06/chart">
   <c:date1904 val="0"/>
   <c:lang val="en-US"/>
   <c:roundedCorners val="0"/>
@@ -11178,7 +11178,7 @@
             </c:numRef>
           </c:yVal>
           <c:smooth val="1"/>
-          <c:extLst xmlns:c16r2="http://schemas.microsoft.com/office/drawing/2015/06/chart">
+          <c:extLst>
             <c:ext xmlns:c16="http://schemas.microsoft.com/office/drawing/2014/chart" uri="{C3380CC4-5D6E-409C-BE32-E72D297353CC}">
               <c16:uniqueId val="{00000000-E9BF-40D2-8F73-06B3DA370149}"/>
             </c:ext>
@@ -11427,7 +11427,7 @@
 </file>
 
 <file path=ppt/charts/chart3.xml><?xml version="1.0" encoding="utf-8"?>
-<c:chartSpace xmlns:c="http://schemas.openxmlformats.org/drawingml/2006/chart" xmlns:a="http://schemas.openxmlformats.org/drawingml/2006/main" xmlns:r="http://schemas.openxmlformats.org/officeDocument/2006/relationships">
+<c:chartSpace xmlns:c="http://schemas.openxmlformats.org/drawingml/2006/chart" xmlns:a="http://schemas.openxmlformats.org/drawingml/2006/main" xmlns:r="http://schemas.openxmlformats.org/officeDocument/2006/relationships" xmlns:c16r2="http://schemas.microsoft.com/office/drawing/2015/06/chart">
   <c:date1904 val="0"/>
   <c:lang val="en-US"/>
   <c:roundedCorners val="0"/>
@@ -11466,7 +11466,6 @@
           </a:p>
         </c:rich>
       </c:tx>
-      <c:layout/>
       <c:overlay val="0"/>
       <c:spPr>
         <a:noFill/>
@@ -16845,6 +16844,11 @@
             </c:numRef>
           </c:yVal>
           <c:smooth val="0"/>
+          <c:extLst>
+            <c:ext xmlns:c16="http://schemas.microsoft.com/office/drawing/2014/chart" uri="{C3380CC4-5D6E-409C-BE32-E72D297353CC}">
+              <c16:uniqueId val="{00000000-46CF-46E3-B1C3-FFE32FAD4461}"/>
+            </c:ext>
+          </c:extLst>
         </c:ser>
         <c:ser>
           <c:idx val="1"/>
@@ -22201,6 +22205,11 @@
             </c:numRef>
           </c:yVal>
           <c:smooth val="0"/>
+          <c:extLst>
+            <c:ext xmlns:c16="http://schemas.microsoft.com/office/drawing/2014/chart" uri="{C3380CC4-5D6E-409C-BE32-E72D297353CC}">
+              <c16:uniqueId val="{00000001-46CF-46E3-B1C3-FFE32FAD4461}"/>
+            </c:ext>
+          </c:extLst>
         </c:ser>
         <c:dLbls>
           <c:showLegendKey val="0"/>
@@ -22260,7 +22269,6 @@
               </a:p>
             </c:rich>
           </c:tx>
-          <c:layout/>
           <c:overlay val="0"/>
           <c:spPr>
             <a:noFill/>
@@ -22384,7 +22392,6 @@
               </a:p>
             </c:rich>
           </c:tx>
-          <c:layout/>
           <c:overlay val="0"/>
           <c:spPr>
             <a:noFill/>
@@ -22465,7 +22472,6 @@
     </c:plotArea>
     <c:legend>
       <c:legendPos val="b"/>
-      <c:layout/>
       <c:overlay val="0"/>
       <c:spPr>
         <a:noFill/>
@@ -22526,7 +22532,7 @@
 </file>
 
 <file path=ppt/charts/chart4.xml><?xml version="1.0" encoding="utf-8"?>
-<c:chartSpace xmlns:c="http://schemas.openxmlformats.org/drawingml/2006/chart" xmlns:a="http://schemas.openxmlformats.org/drawingml/2006/main" xmlns:r="http://schemas.openxmlformats.org/officeDocument/2006/relationships">
+<c:chartSpace xmlns:c="http://schemas.openxmlformats.org/drawingml/2006/chart" xmlns:a="http://schemas.openxmlformats.org/drawingml/2006/main" xmlns:r="http://schemas.openxmlformats.org/officeDocument/2006/relationships" xmlns:c16r2="http://schemas.microsoft.com/office/drawing/2015/06/chart">
   <c:date1904 val="0"/>
   <c:lang val="en-US"/>
   <c:roundedCorners val="0"/>
@@ -22551,7 +22557,6 @@
           </c:strCache>
         </c:strRef>
       </c:tx>
-      <c:layout/>
       <c:overlay val="0"/>
       <c:spPr>
         <a:noFill/>
@@ -22687,7 +22692,7 @@
             </c:numRef>
           </c:yVal>
           <c:smooth val="0"/>
-          <c:extLst xmlns:c16r2="http://schemas.microsoft.com/office/drawing/2015/06/chart">
+          <c:extLst>
             <c:ext xmlns:c16="http://schemas.microsoft.com/office/drawing/2014/chart" uri="{C3380CC4-5D6E-409C-BE32-E72D297353CC}">
               <c16:uniqueId val="{00000000-C623-4062-8C80-8E9598A8BEB5}"/>
             </c:ext>
@@ -22768,12 +22773,10 @@
               <c:showSerName val="0"/>
               <c:showPercent val="0"/>
               <c:showBubbleSize val="0"/>
-              <c:extLst xmlns:c16r2="http://schemas.microsoft.com/office/drawing/2015/06/chart">
+              <c:extLst>
+                <c:ext xmlns:c15="http://schemas.microsoft.com/office/drawing/2012/chart" uri="{CE6537A1-D6FC-4f65-9D91-7224C49458BB}"/>
                 <c:ext xmlns:c16="http://schemas.microsoft.com/office/drawing/2014/chart" uri="{C3380CC4-5D6E-409C-BE32-E72D297353CC}">
                   <c16:uniqueId val="{00000001-C623-4062-8C80-8E9598A8BEB5}"/>
-                </c:ext>
-                <c:ext xmlns:c15="http://schemas.microsoft.com/office/drawing/2012/chart" uri="{CE6537A1-D6FC-4f65-9D91-7224C49458BB}">
-                  <c15:layout/>
                 </c:ext>
               </c:extLst>
             </c:dLbl>
@@ -22790,7 +22793,7 @@
             <c:showSerName val="0"/>
             <c:showPercent val="0"/>
             <c:showBubbleSize val="0"/>
-            <c:extLst xmlns:c16r2="http://schemas.microsoft.com/office/drawing/2015/06/chart">
+            <c:extLst>
               <c:ext xmlns:c15="http://schemas.microsoft.com/office/drawing/2012/chart" uri="{CE6537A1-D6FC-4f65-9D91-7224C49458BB}">
                 <c15:showLeaderLines val="1"/>
               </c:ext>
@@ -22869,7 +22872,7 @@
             </c:numRef>
           </c:yVal>
           <c:smooth val="0"/>
-          <c:extLst xmlns:c16r2="http://schemas.microsoft.com/office/drawing/2015/06/chart">
+          <c:extLst>
             <c:ext xmlns:c16="http://schemas.microsoft.com/office/drawing/2014/chart" uri="{C3380CC4-5D6E-409C-BE32-E72D297353CC}">
               <c16:uniqueId val="{00000002-C623-4062-8C80-8E9598A8BEB5}"/>
             </c:ext>
@@ -22951,12 +22954,10 @@
               <c:showSerName val="0"/>
               <c:showPercent val="0"/>
               <c:showBubbleSize val="0"/>
-              <c:extLst xmlns:c16r2="http://schemas.microsoft.com/office/drawing/2015/06/chart">
+              <c:extLst>
+                <c:ext xmlns:c15="http://schemas.microsoft.com/office/drawing/2012/chart" uri="{CE6537A1-D6FC-4f65-9D91-7224C49458BB}"/>
                 <c:ext xmlns:c16="http://schemas.microsoft.com/office/drawing/2014/chart" uri="{C3380CC4-5D6E-409C-BE32-E72D297353CC}">
                   <c16:uniqueId val="{00000000-C719-4D8F-8803-0D6DC88860CF}"/>
-                </c:ext>
-                <c:ext xmlns:c15="http://schemas.microsoft.com/office/drawing/2012/chart" uri="{CE6537A1-D6FC-4f65-9D91-7224C49458BB}">
-                  <c15:layout/>
                 </c:ext>
               </c:extLst>
             </c:dLbl>
@@ -22973,7 +22974,7 @@
             <c:showSerName val="0"/>
             <c:showPercent val="0"/>
             <c:showBubbleSize val="0"/>
-            <c:extLst xmlns:c16r2="http://schemas.microsoft.com/office/drawing/2015/06/chart">
+            <c:extLst>
               <c:ext xmlns:c15="http://schemas.microsoft.com/office/drawing/2012/chart" uri="{CE6537A1-D6FC-4f65-9D91-7224C49458BB}">
                 <c15:showLeaderLines val="1"/>
               </c:ext>
@@ -23052,7 +23053,7 @@
             </c:numRef>
           </c:yVal>
           <c:smooth val="0"/>
-          <c:extLst xmlns:c16r2="http://schemas.microsoft.com/office/drawing/2015/06/chart">
+          <c:extLst>
             <c:ext xmlns:c16="http://schemas.microsoft.com/office/drawing/2014/chart" uri="{C3380CC4-5D6E-409C-BE32-E72D297353CC}">
               <c16:uniqueId val="{00000003-C623-4062-8C80-8E9598A8BEB5}"/>
             </c:ext>
@@ -23133,30 +23134,25 @@
               <c:showSerName val="0"/>
               <c:showPercent val="0"/>
               <c:showBubbleSize val="0"/>
-              <c:extLst xmlns:c16r2="http://schemas.microsoft.com/office/drawing/2015/06/chart">
+              <c:extLst>
+                <c:ext xmlns:c15="http://schemas.microsoft.com/office/drawing/2012/chart" uri="{CE6537A1-D6FC-4f65-9D91-7224C49458BB}"/>
                 <c:ext xmlns:c16="http://schemas.microsoft.com/office/drawing/2014/chart" uri="{C3380CC4-5D6E-409C-BE32-E72D297353CC}">
                   <c16:uniqueId val="{00000004-C623-4062-8C80-8E9598A8BEB5}"/>
-                </c:ext>
-                <c:ext xmlns:c15="http://schemas.microsoft.com/office/drawing/2012/chart" uri="{CE6537A1-D6FC-4f65-9D91-7224C49458BB}">
-                  <c15:layout/>
                 </c:ext>
               </c:extLst>
             </c:dLbl>
             <c:dLbl>
               <c:idx val="8"/>
-              <c:layout/>
               <c:showLegendKey val="0"/>
               <c:showVal val="1"/>
               <c:showCatName val="0"/>
               <c:showSerName val="0"/>
               <c:showPercent val="0"/>
               <c:showBubbleSize val="0"/>
-              <c:extLst xmlns:c16r2="http://schemas.microsoft.com/office/drawing/2015/06/chart">
+              <c:extLst>
+                <c:ext xmlns:c15="http://schemas.microsoft.com/office/drawing/2012/chart" uri="{CE6537A1-D6FC-4f65-9D91-7224C49458BB}"/>
                 <c:ext xmlns:c16="http://schemas.microsoft.com/office/drawing/2014/chart" uri="{C3380CC4-5D6E-409C-BE32-E72D297353CC}">
                   <c16:uniqueId val="{00000000-B2D8-4218-A9E5-39F3CA400B57}"/>
-                </c:ext>
-                <c:ext xmlns:c15="http://schemas.microsoft.com/office/drawing/2012/chart" uri="{CE6537A1-D6FC-4f65-9D91-7224C49458BB}">
-                  <c15:layout/>
                 </c:ext>
               </c:extLst>
             </c:dLbl>
@@ -23173,7 +23169,7 @@
             <c:showSerName val="0"/>
             <c:showPercent val="0"/>
             <c:showBubbleSize val="0"/>
-            <c:extLst xmlns:c16r2="http://schemas.microsoft.com/office/drawing/2015/06/chart">
+            <c:extLst>
               <c:ext xmlns:c15="http://schemas.microsoft.com/office/drawing/2012/chart" uri="{CE6537A1-D6FC-4f65-9D91-7224C49458BB}">
                 <c15:showLeaderLines val="1"/>
               </c:ext>
@@ -23252,7 +23248,7 @@
             </c:numRef>
           </c:yVal>
           <c:smooth val="0"/>
-          <c:extLst xmlns:c16r2="http://schemas.microsoft.com/office/drawing/2015/06/chart">
+          <c:extLst>
             <c:ext xmlns:c16="http://schemas.microsoft.com/office/drawing/2014/chart" uri="{C3380CC4-5D6E-409C-BE32-E72D297353CC}">
               <c16:uniqueId val="{00000005-C623-4062-8C80-8E9598A8BEB5}"/>
             </c:ext>
@@ -23320,7 +23316,6 @@
               </a:p>
             </c:rich>
           </c:tx>
-          <c:layout/>
           <c:overlay val="0"/>
           <c:spPr>
             <a:noFill/>
@@ -23397,7 +23392,6 @@
               </a:p>
             </c:rich>
           </c:tx>
-          <c:layout/>
           <c:overlay val="0"/>
           <c:spPr>
             <a:noFill/>
@@ -24436,7 +24430,7 @@
           <a:p>
             <a:fld id="{B723E7E9-0B4C-4599-8387-854B68DD1F3F}" type="datetimeFigureOut">
               <a:rPr lang="es-MX" smtClean="0"/>
-              <a:t>24/11/2025</a:t>
+              <a:t>26/11/2025</a:t>
             </a:fld>
             <a:endParaRPr lang="es-MX"/>
           </a:p>
@@ -24813,6 +24807,90 @@
     <p:extLst>
       <p:ext uri="{BB962C8B-B14F-4D97-AF65-F5344CB8AC3E}">
         <p14:creationId xmlns:p14="http://schemas.microsoft.com/office/powerpoint/2010/main" val="715625"/>
+      </p:ext>
+    </p:extLst>
+  </p:cSld>
+  <p:clrMapOvr>
+    <a:masterClrMapping/>
+  </p:clrMapOvr>
+</p:notes>
+</file>
+
+<file path=ppt/notesSlides/notesSlide10.xml><?xml version="1.0" encoding="utf-8"?>
+<p:notes xmlns:a="http://schemas.openxmlformats.org/drawingml/2006/main" xmlns:r="http://schemas.openxmlformats.org/officeDocument/2006/relationships" xmlns:p="http://schemas.openxmlformats.org/presentationml/2006/main">
+  <p:cSld>
+    <p:spTree>
+      <p:nvGrpSpPr>
+        <p:cNvPr id="1" name=""/>
+        <p:cNvGrpSpPr/>
+        <p:nvPr/>
+      </p:nvGrpSpPr>
+      <p:grpSpPr>
+        <a:xfrm>
+          <a:off x="0" y="0"/>
+          <a:ext cx="0" cy="0"/>
+          <a:chOff x="0" y="0"/>
+          <a:chExt cx="0" cy="0"/>
+        </a:xfrm>
+      </p:grpSpPr>
+      <p:sp>
+        <p:nvSpPr>
+          <p:cNvPr id="2" name="Slide Image Placeholder 1"/>
+          <p:cNvSpPr>
+            <a:spLocks noGrp="1" noRot="1" noChangeAspect="1"/>
+          </p:cNvSpPr>
+          <p:nvPr>
+            <p:ph type="sldImg"/>
+          </p:nvPr>
+        </p:nvSpPr>
+        <p:spPr/>
+      </p:sp>
+      <p:sp>
+        <p:nvSpPr>
+          <p:cNvPr id="3" name="Notes Placeholder 2"/>
+          <p:cNvSpPr>
+            <a:spLocks noGrp="1"/>
+          </p:cNvSpPr>
+          <p:nvPr>
+            <p:ph type="body" idx="1"/>
+          </p:nvPr>
+        </p:nvSpPr>
+        <p:spPr/>
+        <p:txBody>
+          <a:bodyPr/>
+          <a:lstStyle/>
+          <a:p>
+            <a:endParaRPr lang="es-419" dirty="0"/>
+          </a:p>
+        </p:txBody>
+      </p:sp>
+      <p:sp>
+        <p:nvSpPr>
+          <p:cNvPr id="4" name="Slide Number Placeholder 3"/>
+          <p:cNvSpPr>
+            <a:spLocks noGrp="1"/>
+          </p:cNvSpPr>
+          <p:nvPr>
+            <p:ph type="sldNum" sz="quarter" idx="5"/>
+          </p:nvPr>
+        </p:nvSpPr>
+        <p:spPr/>
+        <p:txBody>
+          <a:bodyPr/>
+          <a:lstStyle/>
+          <a:p>
+            <a:fld id="{DB28F327-BEE5-45AC-9CE6-84AF0ACB1493}" type="slidenum">
+              <a:rPr lang="es-MX" smtClean="0"/>
+              <a:t>16</a:t>
+            </a:fld>
+            <a:endParaRPr lang="es-MX"/>
+          </a:p>
+        </p:txBody>
+      </p:sp>
+    </p:spTree>
+    <p:extLst>
+      <p:ext uri="{BB962C8B-B14F-4D97-AF65-F5344CB8AC3E}">
+        <p14:creationId xmlns:p14="http://schemas.microsoft.com/office/powerpoint/2010/main" val="1226844278"/>
       </p:ext>
     </p:extLst>
   </p:cSld>
@@ -25786,10 +25864,6 @@
             </a:r>
           </a:p>
           <a:p>
-            <a:r>
-              <a:rPr lang="es-419" dirty="0"/>
-              <a:t/>
-            </a:r>
             <a:br>
               <a:rPr lang="es-419" dirty="0"/>
             </a:br>
@@ -25833,6 +25907,93 @@
 </p:notes>
 </file>
 
+<file path=ppt/notesSlides/notesSlide9.xml><?xml version="1.0" encoding="utf-8"?>
+<p:notes xmlns:a="http://schemas.openxmlformats.org/drawingml/2006/main" xmlns:r="http://schemas.openxmlformats.org/officeDocument/2006/relationships" xmlns:p="http://schemas.openxmlformats.org/presentationml/2006/main">
+  <p:cSld>
+    <p:spTree>
+      <p:nvGrpSpPr>
+        <p:cNvPr id="1" name=""/>
+        <p:cNvGrpSpPr/>
+        <p:nvPr/>
+      </p:nvGrpSpPr>
+      <p:grpSpPr>
+        <a:xfrm>
+          <a:off x="0" y="0"/>
+          <a:ext cx="0" cy="0"/>
+          <a:chOff x="0" y="0"/>
+          <a:chExt cx="0" cy="0"/>
+        </a:xfrm>
+      </p:grpSpPr>
+      <p:sp>
+        <p:nvSpPr>
+          <p:cNvPr id="2" name="Slide Image Placeholder 1"/>
+          <p:cNvSpPr>
+            <a:spLocks noGrp="1" noRot="1" noChangeAspect="1"/>
+          </p:cNvSpPr>
+          <p:nvPr>
+            <p:ph type="sldImg"/>
+          </p:nvPr>
+        </p:nvSpPr>
+        <p:spPr/>
+      </p:sp>
+      <p:sp>
+        <p:nvSpPr>
+          <p:cNvPr id="3" name="Notes Placeholder 2"/>
+          <p:cNvSpPr>
+            <a:spLocks noGrp="1"/>
+          </p:cNvSpPr>
+          <p:nvPr>
+            <p:ph type="body" idx="1"/>
+          </p:nvPr>
+        </p:nvSpPr>
+        <p:spPr/>
+        <p:txBody>
+          <a:bodyPr/>
+          <a:lstStyle/>
+          <a:p>
+            <a:r>
+              <a:rPr lang="es-419" dirty="0"/>
+              <a:t>Esos resultados son atípicos (en transferencia de calor, no aporta evidencia útil a lo que estamos analizando) </a:t>
+            </a:r>
+          </a:p>
+        </p:txBody>
+      </p:sp>
+      <p:sp>
+        <p:nvSpPr>
+          <p:cNvPr id="4" name="Slide Number Placeholder 3"/>
+          <p:cNvSpPr>
+            <a:spLocks noGrp="1"/>
+          </p:cNvSpPr>
+          <p:nvPr>
+            <p:ph type="sldNum" sz="quarter" idx="5"/>
+          </p:nvPr>
+        </p:nvSpPr>
+        <p:spPr/>
+        <p:txBody>
+          <a:bodyPr/>
+          <a:lstStyle/>
+          <a:p>
+            <a:fld id="{DB28F327-BEE5-45AC-9CE6-84AF0ACB1493}" type="slidenum">
+              <a:rPr lang="es-MX" smtClean="0"/>
+              <a:t>13</a:t>
+            </a:fld>
+            <a:endParaRPr lang="es-MX"/>
+          </a:p>
+        </p:txBody>
+      </p:sp>
+    </p:spTree>
+    <p:extLst>
+      <p:ext uri="{BB962C8B-B14F-4D97-AF65-F5344CB8AC3E}">
+        <p14:creationId xmlns:p14="http://schemas.microsoft.com/office/powerpoint/2010/main" val="569071465"/>
+      </p:ext>
+    </p:extLst>
+  </p:cSld>
+  <p:clrMapOvr>
+    <a:masterClrMapping/>
+  </p:clrMapOvr>
+</p:notes>
+</file>
+
 <file path=ppt/slideLayouts/slideLayout1.xml><?xml version="1.0" encoding="utf-8"?>
 <p:sldLayout xmlns:a="http://schemas.openxmlformats.org/drawingml/2006/main" xmlns:r="http://schemas.openxmlformats.org/officeDocument/2006/relationships" xmlns:p="http://schemas.openxmlformats.org/presentationml/2006/main" type="title" preserve="1">
   <p:cSld name="Diapositiva de título">
@@ -25855,7 +26016,7 @@
           <p:cNvPr id="2" name="Título 1">
             <a:extLst>
               <a:ext uri="{FF2B5EF4-FFF2-40B4-BE49-F238E27FC236}">
-                <a16:creationId xmlns:a16="http://schemas.microsoft.com/office/drawing/2014/main" xmlns="" id="{C68F5251-D223-BC64-D677-1BEF02B6E87F}"/>
+                <a16:creationId xmlns:a16="http://schemas.microsoft.com/office/drawing/2014/main" id="{C68F5251-D223-BC64-D677-1BEF02B6E87F}"/>
               </a:ext>
             </a:extLst>
           </p:cNvPr>
@@ -25893,7 +26054,7 @@
           <p:cNvPr id="3" name="Subtítulo 2">
             <a:extLst>
               <a:ext uri="{FF2B5EF4-FFF2-40B4-BE49-F238E27FC236}">
-                <a16:creationId xmlns:a16="http://schemas.microsoft.com/office/drawing/2014/main" xmlns="" id="{3F4A65FE-8D2A-DD67-B7B2-6214BCC7FFB3}"/>
+                <a16:creationId xmlns:a16="http://schemas.microsoft.com/office/drawing/2014/main" id="{3F4A65FE-8D2A-DD67-B7B2-6214BCC7FFB3}"/>
               </a:ext>
             </a:extLst>
           </p:cNvPr>
@@ -25964,7 +26125,7 @@
           <p:cNvPr id="4" name="Marcador de fecha 3">
             <a:extLst>
               <a:ext uri="{FF2B5EF4-FFF2-40B4-BE49-F238E27FC236}">
-                <a16:creationId xmlns:a16="http://schemas.microsoft.com/office/drawing/2014/main" xmlns="" id="{464258EB-91E8-2924-CBD4-96B87E7215B3}"/>
+                <a16:creationId xmlns:a16="http://schemas.microsoft.com/office/drawing/2014/main" id="{464258EB-91E8-2924-CBD4-96B87E7215B3}"/>
               </a:ext>
             </a:extLst>
           </p:cNvPr>
@@ -25982,7 +26143,7 @@
           <a:p>
             <a:fld id="{ABDDA2F0-ADA3-4A09-A4A4-0854B4A15306}" type="datetimeFigureOut">
               <a:rPr lang="es-MX" smtClean="0"/>
-              <a:t>24/11/2025</a:t>
+              <a:t>26/11/2025</a:t>
             </a:fld>
             <a:endParaRPr lang="es-MX"/>
           </a:p>
@@ -25993,7 +26154,7 @@
           <p:cNvPr id="5" name="Marcador de pie de página 4">
             <a:extLst>
               <a:ext uri="{FF2B5EF4-FFF2-40B4-BE49-F238E27FC236}">
-                <a16:creationId xmlns:a16="http://schemas.microsoft.com/office/drawing/2014/main" xmlns="" id="{DE84EB14-DDAA-D28A-7BDC-5CA4FD1477E1}"/>
+                <a16:creationId xmlns:a16="http://schemas.microsoft.com/office/drawing/2014/main" id="{DE84EB14-DDAA-D28A-7BDC-5CA4FD1477E1}"/>
               </a:ext>
             </a:extLst>
           </p:cNvPr>
@@ -26018,7 +26179,7 @@
           <p:cNvPr id="6" name="Marcador de número de diapositiva 5">
             <a:extLst>
               <a:ext uri="{FF2B5EF4-FFF2-40B4-BE49-F238E27FC236}">
-                <a16:creationId xmlns:a16="http://schemas.microsoft.com/office/drawing/2014/main" xmlns="" id="{020C777D-DB97-B69E-A018-FD1F6A2F2EA2}"/>
+                <a16:creationId xmlns:a16="http://schemas.microsoft.com/office/drawing/2014/main" id="{020C777D-DB97-B69E-A018-FD1F6A2F2EA2}"/>
               </a:ext>
             </a:extLst>
           </p:cNvPr>
@@ -26077,7 +26238,7 @@
           <p:cNvPr id="2" name="Título 1">
             <a:extLst>
               <a:ext uri="{FF2B5EF4-FFF2-40B4-BE49-F238E27FC236}">
-                <a16:creationId xmlns:a16="http://schemas.microsoft.com/office/drawing/2014/main" xmlns="" id="{885B19B8-5854-260F-CB96-1B6829523669}"/>
+                <a16:creationId xmlns:a16="http://schemas.microsoft.com/office/drawing/2014/main" id="{885B19B8-5854-260F-CB96-1B6829523669}"/>
               </a:ext>
             </a:extLst>
           </p:cNvPr>
@@ -26106,7 +26267,7 @@
           <p:cNvPr id="3" name="Marcador de texto vertical 2">
             <a:extLst>
               <a:ext uri="{FF2B5EF4-FFF2-40B4-BE49-F238E27FC236}">
-                <a16:creationId xmlns:a16="http://schemas.microsoft.com/office/drawing/2014/main" xmlns="" id="{EA8F2339-935A-BA50-6D17-C11D9A50303F}"/>
+                <a16:creationId xmlns:a16="http://schemas.microsoft.com/office/drawing/2014/main" id="{EA8F2339-935A-BA50-6D17-C11D9A50303F}"/>
               </a:ext>
             </a:extLst>
           </p:cNvPr>
@@ -26164,7 +26325,7 @@
           <p:cNvPr id="4" name="Marcador de fecha 3">
             <a:extLst>
               <a:ext uri="{FF2B5EF4-FFF2-40B4-BE49-F238E27FC236}">
-                <a16:creationId xmlns:a16="http://schemas.microsoft.com/office/drawing/2014/main" xmlns="" id="{C0D93516-4160-7AF2-1AD2-1717A1759DF3}"/>
+                <a16:creationId xmlns:a16="http://schemas.microsoft.com/office/drawing/2014/main" id="{C0D93516-4160-7AF2-1AD2-1717A1759DF3}"/>
               </a:ext>
             </a:extLst>
           </p:cNvPr>
@@ -26182,7 +26343,7 @@
           <a:p>
             <a:fld id="{ABDDA2F0-ADA3-4A09-A4A4-0854B4A15306}" type="datetimeFigureOut">
               <a:rPr lang="es-MX" smtClean="0"/>
-              <a:t>24/11/2025</a:t>
+              <a:t>26/11/2025</a:t>
             </a:fld>
             <a:endParaRPr lang="es-MX"/>
           </a:p>
@@ -26193,7 +26354,7 @@
           <p:cNvPr id="5" name="Marcador de pie de página 4">
             <a:extLst>
               <a:ext uri="{FF2B5EF4-FFF2-40B4-BE49-F238E27FC236}">
-                <a16:creationId xmlns:a16="http://schemas.microsoft.com/office/drawing/2014/main" xmlns="" id="{18C2BD7C-43C5-6A6A-2A56-049FECED01E8}"/>
+                <a16:creationId xmlns:a16="http://schemas.microsoft.com/office/drawing/2014/main" id="{18C2BD7C-43C5-6A6A-2A56-049FECED01E8}"/>
               </a:ext>
             </a:extLst>
           </p:cNvPr>
@@ -26218,7 +26379,7 @@
           <p:cNvPr id="6" name="Marcador de número de diapositiva 5">
             <a:extLst>
               <a:ext uri="{FF2B5EF4-FFF2-40B4-BE49-F238E27FC236}">
-                <a16:creationId xmlns:a16="http://schemas.microsoft.com/office/drawing/2014/main" xmlns="" id="{C702C113-1630-F4FE-6B7A-DE6028EAF0DC}"/>
+                <a16:creationId xmlns:a16="http://schemas.microsoft.com/office/drawing/2014/main" id="{C702C113-1630-F4FE-6B7A-DE6028EAF0DC}"/>
               </a:ext>
             </a:extLst>
           </p:cNvPr>
@@ -26277,7 +26438,7 @@
           <p:cNvPr id="2" name="Título vertical 1">
             <a:extLst>
               <a:ext uri="{FF2B5EF4-FFF2-40B4-BE49-F238E27FC236}">
-                <a16:creationId xmlns:a16="http://schemas.microsoft.com/office/drawing/2014/main" xmlns="" id="{35FD6614-0E5D-8F5D-E64C-B2F5267FAFB7}"/>
+                <a16:creationId xmlns:a16="http://schemas.microsoft.com/office/drawing/2014/main" id="{35FD6614-0E5D-8F5D-E64C-B2F5267FAFB7}"/>
               </a:ext>
             </a:extLst>
           </p:cNvPr>
@@ -26311,7 +26472,7 @@
           <p:cNvPr id="3" name="Marcador de texto vertical 2">
             <a:extLst>
               <a:ext uri="{FF2B5EF4-FFF2-40B4-BE49-F238E27FC236}">
-                <a16:creationId xmlns:a16="http://schemas.microsoft.com/office/drawing/2014/main" xmlns="" id="{CF0EED13-C02A-F3ED-C589-DF5EF8C49BD7}"/>
+                <a16:creationId xmlns:a16="http://schemas.microsoft.com/office/drawing/2014/main" id="{CF0EED13-C02A-F3ED-C589-DF5EF8C49BD7}"/>
               </a:ext>
             </a:extLst>
           </p:cNvPr>
@@ -26374,7 +26535,7 @@
           <p:cNvPr id="4" name="Marcador de fecha 3">
             <a:extLst>
               <a:ext uri="{FF2B5EF4-FFF2-40B4-BE49-F238E27FC236}">
-                <a16:creationId xmlns:a16="http://schemas.microsoft.com/office/drawing/2014/main" xmlns="" id="{EB7BDC0A-C2D7-3843-E6F7-DF6981CF3BDF}"/>
+                <a16:creationId xmlns:a16="http://schemas.microsoft.com/office/drawing/2014/main" id="{EB7BDC0A-C2D7-3843-E6F7-DF6981CF3BDF}"/>
               </a:ext>
             </a:extLst>
           </p:cNvPr>
@@ -26392,7 +26553,7 @@
           <a:p>
             <a:fld id="{ABDDA2F0-ADA3-4A09-A4A4-0854B4A15306}" type="datetimeFigureOut">
               <a:rPr lang="es-MX" smtClean="0"/>
-              <a:t>24/11/2025</a:t>
+              <a:t>26/11/2025</a:t>
             </a:fld>
             <a:endParaRPr lang="es-MX"/>
           </a:p>
@@ -26403,7 +26564,7 @@
           <p:cNvPr id="5" name="Marcador de pie de página 4">
             <a:extLst>
               <a:ext uri="{FF2B5EF4-FFF2-40B4-BE49-F238E27FC236}">
-                <a16:creationId xmlns:a16="http://schemas.microsoft.com/office/drawing/2014/main" xmlns="" id="{9F55993D-DADC-BB7C-FB1A-9828BFA237F6}"/>
+                <a16:creationId xmlns:a16="http://schemas.microsoft.com/office/drawing/2014/main" id="{9F55993D-DADC-BB7C-FB1A-9828BFA237F6}"/>
               </a:ext>
             </a:extLst>
           </p:cNvPr>
@@ -26428,7 +26589,7 @@
           <p:cNvPr id="6" name="Marcador de número de diapositiva 5">
             <a:extLst>
               <a:ext uri="{FF2B5EF4-FFF2-40B4-BE49-F238E27FC236}">
-                <a16:creationId xmlns:a16="http://schemas.microsoft.com/office/drawing/2014/main" xmlns="" id="{3BAFEC26-7124-8F71-80CD-4C6F3E3DC2A2}"/>
+                <a16:creationId xmlns:a16="http://schemas.microsoft.com/office/drawing/2014/main" id="{3BAFEC26-7124-8F71-80CD-4C6F3E3DC2A2}"/>
               </a:ext>
             </a:extLst>
           </p:cNvPr>
@@ -26487,7 +26648,7 @@
           <p:cNvPr id="2" name="Título 1">
             <a:extLst>
               <a:ext uri="{FF2B5EF4-FFF2-40B4-BE49-F238E27FC236}">
-                <a16:creationId xmlns:a16="http://schemas.microsoft.com/office/drawing/2014/main" xmlns="" id="{7D2E4EE2-F889-3074-9997-AF6C4F9D6A83}"/>
+                <a16:creationId xmlns:a16="http://schemas.microsoft.com/office/drawing/2014/main" id="{7D2E4EE2-F889-3074-9997-AF6C4F9D6A83}"/>
               </a:ext>
             </a:extLst>
           </p:cNvPr>
@@ -26516,7 +26677,7 @@
           <p:cNvPr id="3" name="Marcador de contenido 2">
             <a:extLst>
               <a:ext uri="{FF2B5EF4-FFF2-40B4-BE49-F238E27FC236}">
-                <a16:creationId xmlns:a16="http://schemas.microsoft.com/office/drawing/2014/main" xmlns="" id="{C236082A-49F3-8097-81BB-B8BDD75B747C}"/>
+                <a16:creationId xmlns:a16="http://schemas.microsoft.com/office/drawing/2014/main" id="{C236082A-49F3-8097-81BB-B8BDD75B747C}"/>
               </a:ext>
             </a:extLst>
           </p:cNvPr>
@@ -26574,7 +26735,7 @@
           <p:cNvPr id="4" name="Marcador de fecha 3">
             <a:extLst>
               <a:ext uri="{FF2B5EF4-FFF2-40B4-BE49-F238E27FC236}">
-                <a16:creationId xmlns:a16="http://schemas.microsoft.com/office/drawing/2014/main" xmlns="" id="{1FBF5EA1-958A-FE14-14ED-F5DDBBF4E116}"/>
+                <a16:creationId xmlns:a16="http://schemas.microsoft.com/office/drawing/2014/main" id="{1FBF5EA1-958A-FE14-14ED-F5DDBBF4E116}"/>
               </a:ext>
             </a:extLst>
           </p:cNvPr>
@@ -26592,7 +26753,7 @@
           <a:p>
             <a:fld id="{ABDDA2F0-ADA3-4A09-A4A4-0854B4A15306}" type="datetimeFigureOut">
               <a:rPr lang="es-MX" smtClean="0"/>
-              <a:t>24/11/2025</a:t>
+              <a:t>26/11/2025</a:t>
             </a:fld>
             <a:endParaRPr lang="es-MX"/>
           </a:p>
@@ -26603,7 +26764,7 @@
           <p:cNvPr id="5" name="Marcador de pie de página 4">
             <a:extLst>
               <a:ext uri="{FF2B5EF4-FFF2-40B4-BE49-F238E27FC236}">
-                <a16:creationId xmlns:a16="http://schemas.microsoft.com/office/drawing/2014/main" xmlns="" id="{DBB1B2F9-BA97-397C-0A95-CF66A84143A0}"/>
+                <a16:creationId xmlns:a16="http://schemas.microsoft.com/office/drawing/2014/main" id="{DBB1B2F9-BA97-397C-0A95-CF66A84143A0}"/>
               </a:ext>
             </a:extLst>
           </p:cNvPr>
@@ -26628,7 +26789,7 @@
           <p:cNvPr id="6" name="Marcador de número de diapositiva 5">
             <a:extLst>
               <a:ext uri="{FF2B5EF4-FFF2-40B4-BE49-F238E27FC236}">
-                <a16:creationId xmlns:a16="http://schemas.microsoft.com/office/drawing/2014/main" xmlns="" id="{DE2F542E-A793-5753-EA04-A2D047EE8D73}"/>
+                <a16:creationId xmlns:a16="http://schemas.microsoft.com/office/drawing/2014/main" id="{DE2F542E-A793-5753-EA04-A2D047EE8D73}"/>
               </a:ext>
             </a:extLst>
           </p:cNvPr>
@@ -26687,7 +26848,7 @@
           <p:cNvPr id="2" name="Título 1">
             <a:extLst>
               <a:ext uri="{FF2B5EF4-FFF2-40B4-BE49-F238E27FC236}">
-                <a16:creationId xmlns:a16="http://schemas.microsoft.com/office/drawing/2014/main" xmlns="" id="{C12F8EC0-6FE4-21EE-0999-41500DA69A5D}"/>
+                <a16:creationId xmlns:a16="http://schemas.microsoft.com/office/drawing/2014/main" id="{C12F8EC0-6FE4-21EE-0999-41500DA69A5D}"/>
               </a:ext>
             </a:extLst>
           </p:cNvPr>
@@ -26725,7 +26886,7 @@
           <p:cNvPr id="3" name="Marcador de texto 2">
             <a:extLst>
               <a:ext uri="{FF2B5EF4-FFF2-40B4-BE49-F238E27FC236}">
-                <a16:creationId xmlns:a16="http://schemas.microsoft.com/office/drawing/2014/main" xmlns="" id="{AAFEFE82-C496-46BF-24AD-3A2E4C024B34}"/>
+                <a16:creationId xmlns:a16="http://schemas.microsoft.com/office/drawing/2014/main" id="{AAFEFE82-C496-46BF-24AD-3A2E4C024B34}"/>
               </a:ext>
             </a:extLst>
           </p:cNvPr>
@@ -26850,7 +27011,7 @@
           <p:cNvPr id="4" name="Marcador de fecha 3">
             <a:extLst>
               <a:ext uri="{FF2B5EF4-FFF2-40B4-BE49-F238E27FC236}">
-                <a16:creationId xmlns:a16="http://schemas.microsoft.com/office/drawing/2014/main" xmlns="" id="{66983407-AB5D-BF9A-FBAB-084762521C54}"/>
+                <a16:creationId xmlns:a16="http://schemas.microsoft.com/office/drawing/2014/main" id="{66983407-AB5D-BF9A-FBAB-084762521C54}"/>
               </a:ext>
             </a:extLst>
           </p:cNvPr>
@@ -26868,7 +27029,7 @@
           <a:p>
             <a:fld id="{ABDDA2F0-ADA3-4A09-A4A4-0854B4A15306}" type="datetimeFigureOut">
               <a:rPr lang="es-MX" smtClean="0"/>
-              <a:t>24/11/2025</a:t>
+              <a:t>26/11/2025</a:t>
             </a:fld>
             <a:endParaRPr lang="es-MX"/>
           </a:p>
@@ -26879,7 +27040,7 @@
           <p:cNvPr id="5" name="Marcador de pie de página 4">
             <a:extLst>
               <a:ext uri="{FF2B5EF4-FFF2-40B4-BE49-F238E27FC236}">
-                <a16:creationId xmlns:a16="http://schemas.microsoft.com/office/drawing/2014/main" xmlns="" id="{A4091B16-700E-54A4-365B-884593DAECF3}"/>
+                <a16:creationId xmlns:a16="http://schemas.microsoft.com/office/drawing/2014/main" id="{A4091B16-700E-54A4-365B-884593DAECF3}"/>
               </a:ext>
             </a:extLst>
           </p:cNvPr>
@@ -26904,7 +27065,7 @@
           <p:cNvPr id="6" name="Marcador de número de diapositiva 5">
             <a:extLst>
               <a:ext uri="{FF2B5EF4-FFF2-40B4-BE49-F238E27FC236}">
-                <a16:creationId xmlns:a16="http://schemas.microsoft.com/office/drawing/2014/main" xmlns="" id="{617E1B6B-5F0B-DA12-3F53-D096E1224374}"/>
+                <a16:creationId xmlns:a16="http://schemas.microsoft.com/office/drawing/2014/main" id="{617E1B6B-5F0B-DA12-3F53-D096E1224374}"/>
               </a:ext>
             </a:extLst>
           </p:cNvPr>
@@ -26963,7 +27124,7 @@
           <p:cNvPr id="2" name="Título 1">
             <a:extLst>
               <a:ext uri="{FF2B5EF4-FFF2-40B4-BE49-F238E27FC236}">
-                <a16:creationId xmlns:a16="http://schemas.microsoft.com/office/drawing/2014/main" xmlns="" id="{917BE101-93AD-A4F6-2218-966EEAA06938}"/>
+                <a16:creationId xmlns:a16="http://schemas.microsoft.com/office/drawing/2014/main" id="{917BE101-93AD-A4F6-2218-966EEAA06938}"/>
               </a:ext>
             </a:extLst>
           </p:cNvPr>
@@ -26992,7 +27153,7 @@
           <p:cNvPr id="3" name="Marcador de contenido 2">
             <a:extLst>
               <a:ext uri="{FF2B5EF4-FFF2-40B4-BE49-F238E27FC236}">
-                <a16:creationId xmlns:a16="http://schemas.microsoft.com/office/drawing/2014/main" xmlns="" id="{D927AB96-2137-7115-C296-851F579A94C7}"/>
+                <a16:creationId xmlns:a16="http://schemas.microsoft.com/office/drawing/2014/main" id="{D927AB96-2137-7115-C296-851F579A94C7}"/>
               </a:ext>
             </a:extLst>
           </p:cNvPr>
@@ -27055,7 +27216,7 @@
           <p:cNvPr id="4" name="Marcador de contenido 3">
             <a:extLst>
               <a:ext uri="{FF2B5EF4-FFF2-40B4-BE49-F238E27FC236}">
-                <a16:creationId xmlns:a16="http://schemas.microsoft.com/office/drawing/2014/main" xmlns="" id="{85653190-5E9F-C666-A5CA-E5400CDB9916}"/>
+                <a16:creationId xmlns:a16="http://schemas.microsoft.com/office/drawing/2014/main" id="{85653190-5E9F-C666-A5CA-E5400CDB9916}"/>
               </a:ext>
             </a:extLst>
           </p:cNvPr>
@@ -27118,7 +27279,7 @@
           <p:cNvPr id="5" name="Marcador de fecha 4">
             <a:extLst>
               <a:ext uri="{FF2B5EF4-FFF2-40B4-BE49-F238E27FC236}">
-                <a16:creationId xmlns:a16="http://schemas.microsoft.com/office/drawing/2014/main" xmlns="" id="{2287A35D-19C4-6423-2182-6F7AEF7D868A}"/>
+                <a16:creationId xmlns:a16="http://schemas.microsoft.com/office/drawing/2014/main" id="{2287A35D-19C4-6423-2182-6F7AEF7D868A}"/>
               </a:ext>
             </a:extLst>
           </p:cNvPr>
@@ -27136,7 +27297,7 @@
           <a:p>
             <a:fld id="{ABDDA2F0-ADA3-4A09-A4A4-0854B4A15306}" type="datetimeFigureOut">
               <a:rPr lang="es-MX" smtClean="0"/>
-              <a:t>24/11/2025</a:t>
+              <a:t>26/11/2025</a:t>
             </a:fld>
             <a:endParaRPr lang="es-MX"/>
           </a:p>
@@ -27147,7 +27308,7 @@
           <p:cNvPr id="6" name="Marcador de pie de página 5">
             <a:extLst>
               <a:ext uri="{FF2B5EF4-FFF2-40B4-BE49-F238E27FC236}">
-                <a16:creationId xmlns:a16="http://schemas.microsoft.com/office/drawing/2014/main" xmlns="" id="{6A20EBBC-FFE4-BF34-584D-1103DDD1E59B}"/>
+                <a16:creationId xmlns:a16="http://schemas.microsoft.com/office/drawing/2014/main" id="{6A20EBBC-FFE4-BF34-584D-1103DDD1E59B}"/>
               </a:ext>
             </a:extLst>
           </p:cNvPr>
@@ -27172,7 +27333,7 @@
           <p:cNvPr id="7" name="Marcador de número de diapositiva 6">
             <a:extLst>
               <a:ext uri="{FF2B5EF4-FFF2-40B4-BE49-F238E27FC236}">
-                <a16:creationId xmlns:a16="http://schemas.microsoft.com/office/drawing/2014/main" xmlns="" id="{32069CD5-9784-24F5-FD3F-2CE7FEEEAFA5}"/>
+                <a16:creationId xmlns:a16="http://schemas.microsoft.com/office/drawing/2014/main" id="{32069CD5-9784-24F5-FD3F-2CE7FEEEAFA5}"/>
               </a:ext>
             </a:extLst>
           </p:cNvPr>
@@ -27231,7 +27392,7 @@
           <p:cNvPr id="2" name="Título 1">
             <a:extLst>
               <a:ext uri="{FF2B5EF4-FFF2-40B4-BE49-F238E27FC236}">
-                <a16:creationId xmlns:a16="http://schemas.microsoft.com/office/drawing/2014/main" xmlns="" id="{0AC6574D-AD08-47C4-E8FA-8F244F9BFAFD}"/>
+                <a16:creationId xmlns:a16="http://schemas.microsoft.com/office/drawing/2014/main" id="{0AC6574D-AD08-47C4-E8FA-8F244F9BFAFD}"/>
               </a:ext>
             </a:extLst>
           </p:cNvPr>
@@ -27265,7 +27426,7 @@
           <p:cNvPr id="3" name="Marcador de texto 2">
             <a:extLst>
               <a:ext uri="{FF2B5EF4-FFF2-40B4-BE49-F238E27FC236}">
-                <a16:creationId xmlns:a16="http://schemas.microsoft.com/office/drawing/2014/main" xmlns="" id="{20EF632E-3FF8-7DD5-F21D-8CB63B8FEDFA}"/>
+                <a16:creationId xmlns:a16="http://schemas.microsoft.com/office/drawing/2014/main" id="{20EF632E-3FF8-7DD5-F21D-8CB63B8FEDFA}"/>
               </a:ext>
             </a:extLst>
           </p:cNvPr>
@@ -27336,7 +27497,7 @@
           <p:cNvPr id="4" name="Marcador de contenido 3">
             <a:extLst>
               <a:ext uri="{FF2B5EF4-FFF2-40B4-BE49-F238E27FC236}">
-                <a16:creationId xmlns:a16="http://schemas.microsoft.com/office/drawing/2014/main" xmlns="" id="{AFA83C99-17BF-FB92-B9A6-6B9D02FA248F}"/>
+                <a16:creationId xmlns:a16="http://schemas.microsoft.com/office/drawing/2014/main" id="{AFA83C99-17BF-FB92-B9A6-6B9D02FA248F}"/>
               </a:ext>
             </a:extLst>
           </p:cNvPr>
@@ -27399,7 +27560,7 @@
           <p:cNvPr id="5" name="Marcador de texto 4">
             <a:extLst>
               <a:ext uri="{FF2B5EF4-FFF2-40B4-BE49-F238E27FC236}">
-                <a16:creationId xmlns:a16="http://schemas.microsoft.com/office/drawing/2014/main" xmlns="" id="{5FE508B0-6C5A-C9B0-FC6B-343EBA1D78DE}"/>
+                <a16:creationId xmlns:a16="http://schemas.microsoft.com/office/drawing/2014/main" id="{5FE508B0-6C5A-C9B0-FC6B-343EBA1D78DE}"/>
               </a:ext>
             </a:extLst>
           </p:cNvPr>
@@ -27470,7 +27631,7 @@
           <p:cNvPr id="6" name="Marcador de contenido 5">
             <a:extLst>
               <a:ext uri="{FF2B5EF4-FFF2-40B4-BE49-F238E27FC236}">
-                <a16:creationId xmlns:a16="http://schemas.microsoft.com/office/drawing/2014/main" xmlns="" id="{10B9C372-15AA-19D9-9B22-DB1573661A8F}"/>
+                <a16:creationId xmlns:a16="http://schemas.microsoft.com/office/drawing/2014/main" id="{10B9C372-15AA-19D9-9B22-DB1573661A8F}"/>
               </a:ext>
             </a:extLst>
           </p:cNvPr>
@@ -27533,7 +27694,7 @@
           <p:cNvPr id="7" name="Marcador de fecha 6">
             <a:extLst>
               <a:ext uri="{FF2B5EF4-FFF2-40B4-BE49-F238E27FC236}">
-                <a16:creationId xmlns:a16="http://schemas.microsoft.com/office/drawing/2014/main" xmlns="" id="{46408DFA-ED9B-85E0-43F4-D76EC22CA284}"/>
+                <a16:creationId xmlns:a16="http://schemas.microsoft.com/office/drawing/2014/main" id="{46408DFA-ED9B-85E0-43F4-D76EC22CA284}"/>
               </a:ext>
             </a:extLst>
           </p:cNvPr>
@@ -27551,7 +27712,7 @@
           <a:p>
             <a:fld id="{ABDDA2F0-ADA3-4A09-A4A4-0854B4A15306}" type="datetimeFigureOut">
               <a:rPr lang="es-MX" smtClean="0"/>
-              <a:t>24/11/2025</a:t>
+              <a:t>26/11/2025</a:t>
             </a:fld>
             <a:endParaRPr lang="es-MX"/>
           </a:p>
@@ -27562,7 +27723,7 @@
           <p:cNvPr id="8" name="Marcador de pie de página 7">
             <a:extLst>
               <a:ext uri="{FF2B5EF4-FFF2-40B4-BE49-F238E27FC236}">
-                <a16:creationId xmlns:a16="http://schemas.microsoft.com/office/drawing/2014/main" xmlns="" id="{B616F6DF-AA3E-072D-4717-93B1D48354DD}"/>
+                <a16:creationId xmlns:a16="http://schemas.microsoft.com/office/drawing/2014/main" id="{B616F6DF-AA3E-072D-4717-93B1D48354DD}"/>
               </a:ext>
             </a:extLst>
           </p:cNvPr>
@@ -27587,7 +27748,7 @@
           <p:cNvPr id="9" name="Marcador de número de diapositiva 8">
             <a:extLst>
               <a:ext uri="{FF2B5EF4-FFF2-40B4-BE49-F238E27FC236}">
-                <a16:creationId xmlns:a16="http://schemas.microsoft.com/office/drawing/2014/main" xmlns="" id="{09AB09DC-E5C6-7D7D-977D-8340C0737E4D}"/>
+                <a16:creationId xmlns:a16="http://schemas.microsoft.com/office/drawing/2014/main" id="{09AB09DC-E5C6-7D7D-977D-8340C0737E4D}"/>
               </a:ext>
             </a:extLst>
           </p:cNvPr>
@@ -27646,7 +27807,7 @@
           <p:cNvPr id="2" name="Título 1">
             <a:extLst>
               <a:ext uri="{FF2B5EF4-FFF2-40B4-BE49-F238E27FC236}">
-                <a16:creationId xmlns:a16="http://schemas.microsoft.com/office/drawing/2014/main" xmlns="" id="{08011C47-A5E1-52D3-713F-69DAB3CBE5A3}"/>
+                <a16:creationId xmlns:a16="http://schemas.microsoft.com/office/drawing/2014/main" id="{08011C47-A5E1-52D3-713F-69DAB3CBE5A3}"/>
               </a:ext>
             </a:extLst>
           </p:cNvPr>
@@ -27675,7 +27836,7 @@
           <p:cNvPr id="3" name="Marcador de fecha 2">
             <a:extLst>
               <a:ext uri="{FF2B5EF4-FFF2-40B4-BE49-F238E27FC236}">
-                <a16:creationId xmlns:a16="http://schemas.microsoft.com/office/drawing/2014/main" xmlns="" id="{1C518C19-B858-A8DC-36D3-86800D8685BC}"/>
+                <a16:creationId xmlns:a16="http://schemas.microsoft.com/office/drawing/2014/main" id="{1C518C19-B858-A8DC-36D3-86800D8685BC}"/>
               </a:ext>
             </a:extLst>
           </p:cNvPr>
@@ -27693,7 +27854,7 @@
           <a:p>
             <a:fld id="{ABDDA2F0-ADA3-4A09-A4A4-0854B4A15306}" type="datetimeFigureOut">
               <a:rPr lang="es-MX" smtClean="0"/>
-              <a:t>24/11/2025</a:t>
+              <a:t>26/11/2025</a:t>
             </a:fld>
             <a:endParaRPr lang="es-MX"/>
           </a:p>
@@ -27704,7 +27865,7 @@
           <p:cNvPr id="4" name="Marcador de pie de página 3">
             <a:extLst>
               <a:ext uri="{FF2B5EF4-FFF2-40B4-BE49-F238E27FC236}">
-                <a16:creationId xmlns:a16="http://schemas.microsoft.com/office/drawing/2014/main" xmlns="" id="{41F53B55-5D75-1FD8-7305-4050FDD68411}"/>
+                <a16:creationId xmlns:a16="http://schemas.microsoft.com/office/drawing/2014/main" id="{41F53B55-5D75-1FD8-7305-4050FDD68411}"/>
               </a:ext>
             </a:extLst>
           </p:cNvPr>
@@ -27729,7 +27890,7 @@
           <p:cNvPr id="5" name="Marcador de número de diapositiva 4">
             <a:extLst>
               <a:ext uri="{FF2B5EF4-FFF2-40B4-BE49-F238E27FC236}">
-                <a16:creationId xmlns:a16="http://schemas.microsoft.com/office/drawing/2014/main" xmlns="" id="{500FEE24-67A8-7C20-546D-BCEB3EEE2CC7}"/>
+                <a16:creationId xmlns:a16="http://schemas.microsoft.com/office/drawing/2014/main" id="{500FEE24-67A8-7C20-546D-BCEB3EEE2CC7}"/>
               </a:ext>
             </a:extLst>
           </p:cNvPr>
@@ -27788,7 +27949,7 @@
           <p:cNvPr id="2" name="Marcador de fecha 1">
             <a:extLst>
               <a:ext uri="{FF2B5EF4-FFF2-40B4-BE49-F238E27FC236}">
-                <a16:creationId xmlns:a16="http://schemas.microsoft.com/office/drawing/2014/main" xmlns="" id="{DE40A591-B9B4-C1D0-2520-DB39CAD388E6}"/>
+                <a16:creationId xmlns:a16="http://schemas.microsoft.com/office/drawing/2014/main" id="{DE40A591-B9B4-C1D0-2520-DB39CAD388E6}"/>
               </a:ext>
             </a:extLst>
           </p:cNvPr>
@@ -27806,7 +27967,7 @@
           <a:p>
             <a:fld id="{ABDDA2F0-ADA3-4A09-A4A4-0854B4A15306}" type="datetimeFigureOut">
               <a:rPr lang="es-MX" smtClean="0"/>
-              <a:t>24/11/2025</a:t>
+              <a:t>26/11/2025</a:t>
             </a:fld>
             <a:endParaRPr lang="es-MX"/>
           </a:p>
@@ -27817,7 +27978,7 @@
           <p:cNvPr id="3" name="Marcador de pie de página 2">
             <a:extLst>
               <a:ext uri="{FF2B5EF4-FFF2-40B4-BE49-F238E27FC236}">
-                <a16:creationId xmlns:a16="http://schemas.microsoft.com/office/drawing/2014/main" xmlns="" id="{59DB7BC8-513F-96E7-0F35-8CDD700E2FC2}"/>
+                <a16:creationId xmlns:a16="http://schemas.microsoft.com/office/drawing/2014/main" id="{59DB7BC8-513F-96E7-0F35-8CDD700E2FC2}"/>
               </a:ext>
             </a:extLst>
           </p:cNvPr>
@@ -27842,7 +28003,7 @@
           <p:cNvPr id="4" name="Marcador de número de diapositiva 3">
             <a:extLst>
               <a:ext uri="{FF2B5EF4-FFF2-40B4-BE49-F238E27FC236}">
-                <a16:creationId xmlns:a16="http://schemas.microsoft.com/office/drawing/2014/main" xmlns="" id="{7AE4AC45-E002-BEEB-8B8E-44514FE6BF11}"/>
+                <a16:creationId xmlns:a16="http://schemas.microsoft.com/office/drawing/2014/main" id="{7AE4AC45-E002-BEEB-8B8E-44514FE6BF11}"/>
               </a:ext>
             </a:extLst>
           </p:cNvPr>
@@ -27901,7 +28062,7 @@
           <p:cNvPr id="2" name="Título 1">
             <a:extLst>
               <a:ext uri="{FF2B5EF4-FFF2-40B4-BE49-F238E27FC236}">
-                <a16:creationId xmlns:a16="http://schemas.microsoft.com/office/drawing/2014/main" xmlns="" id="{A6FC0222-34BC-EBA6-7A21-952CD9074429}"/>
+                <a16:creationId xmlns:a16="http://schemas.microsoft.com/office/drawing/2014/main" id="{A6FC0222-34BC-EBA6-7A21-952CD9074429}"/>
               </a:ext>
             </a:extLst>
           </p:cNvPr>
@@ -27939,7 +28100,7 @@
           <p:cNvPr id="3" name="Marcador de contenido 2">
             <a:extLst>
               <a:ext uri="{FF2B5EF4-FFF2-40B4-BE49-F238E27FC236}">
-                <a16:creationId xmlns:a16="http://schemas.microsoft.com/office/drawing/2014/main" xmlns="" id="{1B2DED37-96F5-2838-76FF-E8FC4633590A}"/>
+                <a16:creationId xmlns:a16="http://schemas.microsoft.com/office/drawing/2014/main" id="{1B2DED37-96F5-2838-76FF-E8FC4633590A}"/>
               </a:ext>
             </a:extLst>
           </p:cNvPr>
@@ -28030,7 +28191,7 @@
           <p:cNvPr id="4" name="Marcador de texto 3">
             <a:extLst>
               <a:ext uri="{FF2B5EF4-FFF2-40B4-BE49-F238E27FC236}">
-                <a16:creationId xmlns:a16="http://schemas.microsoft.com/office/drawing/2014/main" xmlns="" id="{F7204234-1783-9477-4B7F-9E1C2285F215}"/>
+                <a16:creationId xmlns:a16="http://schemas.microsoft.com/office/drawing/2014/main" id="{F7204234-1783-9477-4B7F-9E1C2285F215}"/>
               </a:ext>
             </a:extLst>
           </p:cNvPr>
@@ -28101,7 +28262,7 @@
           <p:cNvPr id="5" name="Marcador de fecha 4">
             <a:extLst>
               <a:ext uri="{FF2B5EF4-FFF2-40B4-BE49-F238E27FC236}">
-                <a16:creationId xmlns:a16="http://schemas.microsoft.com/office/drawing/2014/main" xmlns="" id="{E4AB8F47-7E0B-AC5B-B99B-1397BBF4E1B0}"/>
+                <a16:creationId xmlns:a16="http://schemas.microsoft.com/office/drawing/2014/main" id="{E4AB8F47-7E0B-AC5B-B99B-1397BBF4E1B0}"/>
               </a:ext>
             </a:extLst>
           </p:cNvPr>
@@ -28119,7 +28280,7 @@
           <a:p>
             <a:fld id="{ABDDA2F0-ADA3-4A09-A4A4-0854B4A15306}" type="datetimeFigureOut">
               <a:rPr lang="es-MX" smtClean="0"/>
-              <a:t>24/11/2025</a:t>
+              <a:t>26/11/2025</a:t>
             </a:fld>
             <a:endParaRPr lang="es-MX"/>
           </a:p>
@@ -28130,7 +28291,7 @@
           <p:cNvPr id="6" name="Marcador de pie de página 5">
             <a:extLst>
               <a:ext uri="{FF2B5EF4-FFF2-40B4-BE49-F238E27FC236}">
-                <a16:creationId xmlns:a16="http://schemas.microsoft.com/office/drawing/2014/main" xmlns="" id="{27444E72-2B34-6E35-EB8C-540D1757191F}"/>
+                <a16:creationId xmlns:a16="http://schemas.microsoft.com/office/drawing/2014/main" id="{27444E72-2B34-6E35-EB8C-540D1757191F}"/>
               </a:ext>
             </a:extLst>
           </p:cNvPr>
@@ -28155,7 +28316,7 @@
           <p:cNvPr id="7" name="Marcador de número de diapositiva 6">
             <a:extLst>
               <a:ext uri="{FF2B5EF4-FFF2-40B4-BE49-F238E27FC236}">
-                <a16:creationId xmlns:a16="http://schemas.microsoft.com/office/drawing/2014/main" xmlns="" id="{BA0BA796-5219-8949-D532-E68CFCD5B791}"/>
+                <a16:creationId xmlns:a16="http://schemas.microsoft.com/office/drawing/2014/main" id="{BA0BA796-5219-8949-D532-E68CFCD5B791}"/>
               </a:ext>
             </a:extLst>
           </p:cNvPr>
@@ -28214,7 +28375,7 @@
           <p:cNvPr id="2" name="Título 1">
             <a:extLst>
               <a:ext uri="{FF2B5EF4-FFF2-40B4-BE49-F238E27FC236}">
-                <a16:creationId xmlns:a16="http://schemas.microsoft.com/office/drawing/2014/main" xmlns="" id="{DF931805-E0DF-1EF9-C110-CAC93E17C24B}"/>
+                <a16:creationId xmlns:a16="http://schemas.microsoft.com/office/drawing/2014/main" id="{DF931805-E0DF-1EF9-C110-CAC93E17C24B}"/>
               </a:ext>
             </a:extLst>
           </p:cNvPr>
@@ -28252,7 +28413,7 @@
           <p:cNvPr id="3" name="Marcador de posición de imagen 2">
             <a:extLst>
               <a:ext uri="{FF2B5EF4-FFF2-40B4-BE49-F238E27FC236}">
-                <a16:creationId xmlns:a16="http://schemas.microsoft.com/office/drawing/2014/main" xmlns="" id="{D13ACECD-8E37-357C-8FBF-04124CEBC472}"/>
+                <a16:creationId xmlns:a16="http://schemas.microsoft.com/office/drawing/2014/main" id="{D13ACECD-8E37-357C-8FBF-04124CEBC472}"/>
               </a:ext>
             </a:extLst>
           </p:cNvPr>
@@ -28319,7 +28480,7 @@
           <p:cNvPr id="4" name="Marcador de texto 3">
             <a:extLst>
               <a:ext uri="{FF2B5EF4-FFF2-40B4-BE49-F238E27FC236}">
-                <a16:creationId xmlns:a16="http://schemas.microsoft.com/office/drawing/2014/main" xmlns="" id="{A76933F9-CE62-7A51-2526-EF47F52B49CD}"/>
+                <a16:creationId xmlns:a16="http://schemas.microsoft.com/office/drawing/2014/main" id="{A76933F9-CE62-7A51-2526-EF47F52B49CD}"/>
               </a:ext>
             </a:extLst>
           </p:cNvPr>
@@ -28390,7 +28551,7 @@
           <p:cNvPr id="5" name="Marcador de fecha 4">
             <a:extLst>
               <a:ext uri="{FF2B5EF4-FFF2-40B4-BE49-F238E27FC236}">
-                <a16:creationId xmlns:a16="http://schemas.microsoft.com/office/drawing/2014/main" xmlns="" id="{61295AB3-0527-0650-4A5E-8E39C3FEBC5F}"/>
+                <a16:creationId xmlns:a16="http://schemas.microsoft.com/office/drawing/2014/main" id="{61295AB3-0527-0650-4A5E-8E39C3FEBC5F}"/>
               </a:ext>
             </a:extLst>
           </p:cNvPr>
@@ -28408,7 +28569,7 @@
           <a:p>
             <a:fld id="{ABDDA2F0-ADA3-4A09-A4A4-0854B4A15306}" type="datetimeFigureOut">
               <a:rPr lang="es-MX" smtClean="0"/>
-              <a:t>24/11/2025</a:t>
+              <a:t>26/11/2025</a:t>
             </a:fld>
             <a:endParaRPr lang="es-MX"/>
           </a:p>
@@ -28419,7 +28580,7 @@
           <p:cNvPr id="6" name="Marcador de pie de página 5">
             <a:extLst>
               <a:ext uri="{FF2B5EF4-FFF2-40B4-BE49-F238E27FC236}">
-                <a16:creationId xmlns:a16="http://schemas.microsoft.com/office/drawing/2014/main" xmlns="" id="{EC74B01D-04E3-41D7-9835-5139255EA9B1}"/>
+                <a16:creationId xmlns:a16="http://schemas.microsoft.com/office/drawing/2014/main" id="{EC74B01D-04E3-41D7-9835-5139255EA9B1}"/>
               </a:ext>
             </a:extLst>
           </p:cNvPr>
@@ -28444,7 +28605,7 @@
           <p:cNvPr id="7" name="Marcador de número de diapositiva 6">
             <a:extLst>
               <a:ext uri="{FF2B5EF4-FFF2-40B4-BE49-F238E27FC236}">
-                <a16:creationId xmlns:a16="http://schemas.microsoft.com/office/drawing/2014/main" xmlns="" id="{09D3E2DD-D6F1-4D4F-8C0B-D77DCA7B4F41}"/>
+                <a16:creationId xmlns:a16="http://schemas.microsoft.com/office/drawing/2014/main" id="{09D3E2DD-D6F1-4D4F-8C0B-D77DCA7B4F41}"/>
               </a:ext>
             </a:extLst>
           </p:cNvPr>
@@ -28508,7 +28669,7 @@
           <p:cNvPr id="2" name="Marcador de título 1">
             <a:extLst>
               <a:ext uri="{FF2B5EF4-FFF2-40B4-BE49-F238E27FC236}">
-                <a16:creationId xmlns:a16="http://schemas.microsoft.com/office/drawing/2014/main" xmlns="" id="{D700FFC7-6AF2-7718-31AD-61B3B9EAFA0E}"/>
+                <a16:creationId xmlns:a16="http://schemas.microsoft.com/office/drawing/2014/main" id="{D700FFC7-6AF2-7718-31AD-61B3B9EAFA0E}"/>
               </a:ext>
             </a:extLst>
           </p:cNvPr>
@@ -28547,7 +28708,7 @@
           <p:cNvPr id="3" name="Marcador de texto 2">
             <a:extLst>
               <a:ext uri="{FF2B5EF4-FFF2-40B4-BE49-F238E27FC236}">
-                <a16:creationId xmlns:a16="http://schemas.microsoft.com/office/drawing/2014/main" xmlns="" id="{D0845A47-E640-38C6-B77C-4374D64C3E73}"/>
+                <a16:creationId xmlns:a16="http://schemas.microsoft.com/office/drawing/2014/main" id="{D0845A47-E640-38C6-B77C-4374D64C3E73}"/>
               </a:ext>
             </a:extLst>
           </p:cNvPr>
@@ -28615,7 +28776,7 @@
           <p:cNvPr id="4" name="Marcador de fecha 3">
             <a:extLst>
               <a:ext uri="{FF2B5EF4-FFF2-40B4-BE49-F238E27FC236}">
-                <a16:creationId xmlns:a16="http://schemas.microsoft.com/office/drawing/2014/main" xmlns="" id="{BA621615-6EE4-8999-4974-FC8345B0F043}"/>
+                <a16:creationId xmlns:a16="http://schemas.microsoft.com/office/drawing/2014/main" id="{BA621615-6EE4-8999-4974-FC8345B0F043}"/>
               </a:ext>
             </a:extLst>
           </p:cNvPr>
@@ -28651,7 +28812,7 @@
           <a:p>
             <a:fld id="{ABDDA2F0-ADA3-4A09-A4A4-0854B4A15306}" type="datetimeFigureOut">
               <a:rPr lang="es-MX" smtClean="0"/>
-              <a:t>24/11/2025</a:t>
+              <a:t>26/11/2025</a:t>
             </a:fld>
             <a:endParaRPr lang="es-MX"/>
           </a:p>
@@ -28662,7 +28823,7 @@
           <p:cNvPr id="5" name="Marcador de pie de página 4">
             <a:extLst>
               <a:ext uri="{FF2B5EF4-FFF2-40B4-BE49-F238E27FC236}">
-                <a16:creationId xmlns:a16="http://schemas.microsoft.com/office/drawing/2014/main" xmlns="" id="{1453D141-D99F-08DF-89A5-CE133A10F331}"/>
+                <a16:creationId xmlns:a16="http://schemas.microsoft.com/office/drawing/2014/main" id="{1453D141-D99F-08DF-89A5-CE133A10F331}"/>
               </a:ext>
             </a:extLst>
           </p:cNvPr>
@@ -28705,7 +28866,7 @@
           <p:cNvPr id="6" name="Marcador de número de diapositiva 5">
             <a:extLst>
               <a:ext uri="{FF2B5EF4-FFF2-40B4-BE49-F238E27FC236}">
-                <a16:creationId xmlns:a16="http://schemas.microsoft.com/office/drawing/2014/main" xmlns="" id="{E4B33CF8-1115-CD03-F7AD-24C3565823E7}"/>
+                <a16:creationId xmlns:a16="http://schemas.microsoft.com/office/drawing/2014/main" id="{E4B33CF8-1115-CD03-F7AD-24C3565823E7}"/>
               </a:ext>
             </a:extLst>
           </p:cNvPr>
@@ -29073,7 +29234,7 @@
           <p:cNvPr id="8" name="Picture 7">
             <a:extLst>
               <a:ext uri="{FF2B5EF4-FFF2-40B4-BE49-F238E27FC236}">
-                <a16:creationId xmlns:a16="http://schemas.microsoft.com/office/drawing/2014/main" xmlns="" id="{130D5EE9-6E7E-80B8-FCFF-8881747CDF7D}"/>
+                <a16:creationId xmlns:a16="http://schemas.microsoft.com/office/drawing/2014/main" id="{130D5EE9-6E7E-80B8-FCFF-8881747CDF7D}"/>
               </a:ext>
             </a:extLst>
           </p:cNvPr>
@@ -29106,7 +29267,7 @@
           <p:cNvPr id="12" name="Subtítulo 2">
             <a:extLst>
               <a:ext uri="{FF2B5EF4-FFF2-40B4-BE49-F238E27FC236}">
-                <a16:creationId xmlns:a16="http://schemas.microsoft.com/office/drawing/2014/main" xmlns="" id="{ECC718EC-22DC-2FC1-E7BF-660F4465FB20}"/>
+                <a16:creationId xmlns:a16="http://schemas.microsoft.com/office/drawing/2014/main" id="{ECC718EC-22DC-2FC1-E7BF-660F4465FB20}"/>
               </a:ext>
             </a:extLst>
           </p:cNvPr>
@@ -29309,7 +29470,7 @@
           <p:cNvPr id="2" name="Título 1">
             <a:extLst>
               <a:ext uri="{FF2B5EF4-FFF2-40B4-BE49-F238E27FC236}">
-                <a16:creationId xmlns:a16="http://schemas.microsoft.com/office/drawing/2014/main" xmlns="" id="{5EF8233C-F3DA-2ABC-9288-4BCD7433344C}"/>
+                <a16:creationId xmlns:a16="http://schemas.microsoft.com/office/drawing/2014/main" id="{5EF8233C-F3DA-2ABC-9288-4BCD7433344C}"/>
               </a:ext>
             </a:extLst>
           </p:cNvPr>
@@ -29350,19 +29511,8 @@
                 <a:latin typeface="Times New Roman" panose="02020603050405020304" pitchFamily="18" charset="0"/>
                 <a:cs typeface="Times New Roman" panose="02020603050405020304" pitchFamily="18" charset="0"/>
               </a:rPr>
-              <a:t> Instrumentación y análisis experimental de parámetros termodinámicos de un sistema propulsivo tipo </a:t>
+              <a:t> Instrumentación y análisis experimental de parámetros termodinámicos de un sistema propulsivo tipo cohete.</a:t>
             </a:r>
-            <a:r>
-              <a:rPr lang="es-MX" sz="3200" dirty="0" smtClean="0">
-                <a:latin typeface="Times New Roman" panose="02020603050405020304" pitchFamily="18" charset="0"/>
-                <a:cs typeface="Times New Roman" panose="02020603050405020304" pitchFamily="18" charset="0"/>
-              </a:rPr>
-              <a:t>cohete.</a:t>
-            </a:r>
-            <a:endParaRPr lang="es-MX" sz="3200" dirty="0">
-              <a:latin typeface="Times New Roman" panose="02020603050405020304" pitchFamily="18" charset="0"/>
-              <a:cs typeface="Times New Roman" panose="02020603050405020304" pitchFamily="18" charset="0"/>
-            </a:endParaRPr>
           </a:p>
         </p:txBody>
       </p:sp>
@@ -29371,7 +29521,7 @@
           <p:cNvPr id="3" name="Subtítulo 2">
             <a:extLst>
               <a:ext uri="{FF2B5EF4-FFF2-40B4-BE49-F238E27FC236}">
-                <a16:creationId xmlns:a16="http://schemas.microsoft.com/office/drawing/2014/main" xmlns="" id="{EC6C3CBE-087A-6EFC-794A-BF6D55DB7543}"/>
+                <a16:creationId xmlns:a16="http://schemas.microsoft.com/office/drawing/2014/main" id="{EC6C3CBE-087A-6EFC-794A-BF6D55DB7543}"/>
               </a:ext>
             </a:extLst>
           </p:cNvPr>
@@ -29423,7 +29573,7 @@
               <a:t>Asesor: Dr. Aldo Enrique Mariño </a:t>
             </a:r>
             <a:r>
-              <a:rPr lang="es-MX" sz="1600" b="1" dirty="0" err="1" smtClean="0">
+              <a:rPr lang="es-MX" sz="1600" b="1" dirty="0" err="1">
                 <a:latin typeface="Times New Roman" panose="02020603050405020304" pitchFamily="18" charset="0"/>
                 <a:cs typeface="Times New Roman" panose="02020603050405020304" pitchFamily="18" charset="0"/>
               </a:rPr>
@@ -29462,7 +29612,7 @@
           <p:cNvPr id="11" name="Imagen 7">
             <a:extLst>
               <a:ext uri="{FF2B5EF4-FFF2-40B4-BE49-F238E27FC236}">
-                <a16:creationId xmlns:a16="http://schemas.microsoft.com/office/drawing/2014/main" xmlns="" id="{4CC068B8-32AF-4141-8E98-D04ED8527642}"/>
+                <a16:creationId xmlns:a16="http://schemas.microsoft.com/office/drawing/2014/main" id="{4CC068B8-32AF-4141-8E98-D04ED8527642}"/>
               </a:ext>
             </a:extLst>
           </p:cNvPr>
@@ -29498,7 +29648,7 @@
           <p:cNvPr id="13" name="Imagen 11">
             <a:extLst>
               <a:ext uri="{FF2B5EF4-FFF2-40B4-BE49-F238E27FC236}">
-                <a16:creationId xmlns:a16="http://schemas.microsoft.com/office/drawing/2014/main" xmlns="" id="{665C992D-FBD5-4ADC-8F03-DAF8D6B6983E}"/>
+                <a16:creationId xmlns:a16="http://schemas.microsoft.com/office/drawing/2014/main" id="{665C992D-FBD5-4ADC-8F03-DAF8D6B6983E}"/>
               </a:ext>
             </a:extLst>
           </p:cNvPr>
@@ -29534,7 +29684,7 @@
           <p:cNvPr id="15" name="Imagen 13">
             <a:extLst>
               <a:ext uri="{FF2B5EF4-FFF2-40B4-BE49-F238E27FC236}">
-                <a16:creationId xmlns:a16="http://schemas.microsoft.com/office/drawing/2014/main" xmlns="" id="{7F34528B-B375-4C96-B09A-45405942500E}"/>
+                <a16:creationId xmlns:a16="http://schemas.microsoft.com/office/drawing/2014/main" id="{7F34528B-B375-4C96-B09A-45405942500E}"/>
               </a:ext>
             </a:extLst>
           </p:cNvPr>
@@ -29570,7 +29720,7 @@
           <p:cNvPr id="4" name="Título 1">
             <a:extLst>
               <a:ext uri="{FF2B5EF4-FFF2-40B4-BE49-F238E27FC236}">
-                <a16:creationId xmlns:a16="http://schemas.microsoft.com/office/drawing/2014/main" xmlns="" id="{F9A20CC4-2ED5-4DFD-149A-BBCB75346B1E}"/>
+                <a16:creationId xmlns:a16="http://schemas.microsoft.com/office/drawing/2014/main" id="{F9A20CC4-2ED5-4DFD-149A-BBCB75346B1E}"/>
               </a:ext>
             </a:extLst>
           </p:cNvPr>
@@ -29652,7 +29802,7 @@
         <p:cNvPr id="1" name="">
           <a:extLst>
             <a:ext uri="{FF2B5EF4-FFF2-40B4-BE49-F238E27FC236}">
-              <a16:creationId xmlns:a16="http://schemas.microsoft.com/office/drawing/2014/main" xmlns="" id="{84C7E5AE-08D6-B96B-8301-045B2C6DFE3A}"/>
+              <a16:creationId xmlns:a16="http://schemas.microsoft.com/office/drawing/2014/main" id="{84C7E5AE-08D6-B96B-8301-045B2C6DFE3A}"/>
             </a:ext>
           </a:extLst>
         </p:cNvPr>
@@ -29672,7 +29822,7 @@
           <p:cNvPr id="2" name="Title 1">
             <a:extLst>
               <a:ext uri="{FF2B5EF4-FFF2-40B4-BE49-F238E27FC236}">
-                <a16:creationId xmlns:a16="http://schemas.microsoft.com/office/drawing/2014/main" xmlns="" id="{C5536BF4-4445-AE1F-8F74-9CFD0B4B62ED}"/>
+                <a16:creationId xmlns:a16="http://schemas.microsoft.com/office/drawing/2014/main" id="{C5536BF4-4445-AE1F-8F74-9CFD0B4B62ED}"/>
               </a:ext>
             </a:extLst>
           </p:cNvPr>
@@ -29708,7 +29858,7 @@
           <p:cNvPr id="3" name="Content Placeholder 2">
             <a:extLst>
               <a:ext uri="{FF2B5EF4-FFF2-40B4-BE49-F238E27FC236}">
-                <a16:creationId xmlns:a16="http://schemas.microsoft.com/office/drawing/2014/main" xmlns="" id="{1DC75133-9FF6-3CD8-279C-11F7EA1D0534}"/>
+                <a16:creationId xmlns:a16="http://schemas.microsoft.com/office/drawing/2014/main" id="{1DC75133-9FF6-3CD8-279C-11F7EA1D0534}"/>
               </a:ext>
             </a:extLst>
           </p:cNvPr>
@@ -29801,7 +29951,7 @@
               <a:buAutoNum type="arabicPeriod"/>
             </a:pPr>
             <a:r>
-              <a:rPr lang="es-419" dirty="0" smtClean="0">
+              <a:rPr lang="es-419" dirty="0">
                 <a:latin typeface="Times New Roman" panose="02020603050405020304" pitchFamily="18" charset="0"/>
                 <a:cs typeface="Times New Roman" panose="02020603050405020304" pitchFamily="18" charset="0"/>
               </a:rPr>
@@ -29814,7 +29964,7 @@
               <a:buAutoNum type="arabicPeriod"/>
             </a:pPr>
             <a:r>
-              <a:rPr lang="es-419" dirty="0" smtClean="0">
+              <a:rPr lang="es-419" dirty="0">
                 <a:latin typeface="Times New Roman" panose="02020603050405020304" pitchFamily="18" charset="0"/>
                 <a:cs typeface="Times New Roman" panose="02020603050405020304" pitchFamily="18" charset="0"/>
               </a:rPr>
@@ -29827,7 +29977,7 @@
               <a:buAutoNum type="arabicPeriod"/>
             </a:pPr>
             <a:r>
-              <a:rPr lang="es-419" dirty="0" smtClean="0">
+              <a:rPr lang="es-419" dirty="0">
                 <a:latin typeface="Times New Roman" panose="02020603050405020304" pitchFamily="18" charset="0"/>
                 <a:cs typeface="Times New Roman" panose="02020603050405020304" pitchFamily="18" charset="0"/>
               </a:rPr>
@@ -29840,16 +29990,12 @@
               <a:buAutoNum type="arabicPeriod"/>
             </a:pPr>
             <a:r>
-              <a:rPr lang="es-419" dirty="0" smtClean="0">
+              <a:rPr lang="es-419" dirty="0">
                 <a:latin typeface="Times New Roman" panose="02020603050405020304" pitchFamily="18" charset="0"/>
                 <a:cs typeface="Times New Roman" panose="02020603050405020304" pitchFamily="18" charset="0"/>
               </a:rPr>
               <a:t>Muestreo </a:t>
             </a:r>
-            <a:endParaRPr lang="es-419" dirty="0" smtClean="0">
-              <a:latin typeface="Times New Roman" panose="02020603050405020304" pitchFamily="18" charset="0"/>
-              <a:cs typeface="Times New Roman" panose="02020603050405020304" pitchFamily="18" charset="0"/>
-            </a:endParaRPr>
           </a:p>
           <a:p>
             <a:pPr marL="971550" lvl="1" indent="-514350">
@@ -29868,7 +30014,7 @@
           <p:cNvPr id="4" name="Rectangle 3">
             <a:extLst>
               <a:ext uri="{FF2B5EF4-FFF2-40B4-BE49-F238E27FC236}">
-                <a16:creationId xmlns:a16="http://schemas.microsoft.com/office/drawing/2014/main" xmlns="" id="{6E633BC8-6FE1-5A7A-34BD-06AB24D4E6C6}"/>
+                <a16:creationId xmlns:a16="http://schemas.microsoft.com/office/drawing/2014/main" id="{6E633BC8-6FE1-5A7A-34BD-06AB24D4E6C6}"/>
               </a:ext>
             </a:extLst>
           </p:cNvPr>
@@ -29920,7 +30066,7 @@
           <p:cNvPr id="5" name="Group 4">
             <a:extLst>
               <a:ext uri="{FF2B5EF4-FFF2-40B4-BE49-F238E27FC236}">
-                <a16:creationId xmlns:a16="http://schemas.microsoft.com/office/drawing/2014/main" xmlns="" id="{5F9D13D1-1C38-A72A-8529-669A1C270BB5}"/>
+                <a16:creationId xmlns:a16="http://schemas.microsoft.com/office/drawing/2014/main" id="{5F9D13D1-1C38-A72A-8529-669A1C270BB5}"/>
               </a:ext>
             </a:extLst>
           </p:cNvPr>
@@ -29940,7 +30086,7 @@
             <p:cNvPr id="6" name="Imagen 7">
               <a:extLst>
                 <a:ext uri="{FF2B5EF4-FFF2-40B4-BE49-F238E27FC236}">
-                  <a16:creationId xmlns:a16="http://schemas.microsoft.com/office/drawing/2014/main" xmlns="" id="{99B318A0-B87A-7179-42A5-AF2814918F77}"/>
+                  <a16:creationId xmlns:a16="http://schemas.microsoft.com/office/drawing/2014/main" id="{99B318A0-B87A-7179-42A5-AF2814918F77}"/>
                 </a:ext>
               </a:extLst>
             </p:cNvPr>
@@ -29976,7 +30122,7 @@
             <p:cNvPr id="7" name="Imagen 11">
               <a:extLst>
                 <a:ext uri="{FF2B5EF4-FFF2-40B4-BE49-F238E27FC236}">
-                  <a16:creationId xmlns:a16="http://schemas.microsoft.com/office/drawing/2014/main" xmlns="" id="{21767101-A64F-7AEC-C268-8BA9DE052938}"/>
+                  <a16:creationId xmlns:a16="http://schemas.microsoft.com/office/drawing/2014/main" id="{21767101-A64F-7AEC-C268-8BA9DE052938}"/>
                 </a:ext>
               </a:extLst>
             </p:cNvPr>
@@ -30012,7 +30158,7 @@
             <p:cNvPr id="8" name="Imagen 13">
               <a:extLst>
                 <a:ext uri="{FF2B5EF4-FFF2-40B4-BE49-F238E27FC236}">
-                  <a16:creationId xmlns:a16="http://schemas.microsoft.com/office/drawing/2014/main" xmlns="" id="{6B1B3E6B-2614-529D-6A7A-E5F0C28A3CB8}"/>
+                  <a16:creationId xmlns:a16="http://schemas.microsoft.com/office/drawing/2014/main" id="{6B1B3E6B-2614-529D-6A7A-E5F0C28A3CB8}"/>
                 </a:ext>
               </a:extLst>
             </p:cNvPr>
@@ -30049,7 +30195,7 @@
           <p:cNvPr id="9" name="Rectangle 8">
             <a:extLst>
               <a:ext uri="{FF2B5EF4-FFF2-40B4-BE49-F238E27FC236}">
-                <a16:creationId xmlns:a16="http://schemas.microsoft.com/office/drawing/2014/main" xmlns="" id="{C4C8CB2C-292F-EFD6-763A-54DC22464E52}"/>
+                <a16:creationId xmlns:a16="http://schemas.microsoft.com/office/drawing/2014/main" id="{C4C8CB2C-292F-EFD6-763A-54DC22464E52}"/>
               </a:ext>
             </a:extLst>
           </p:cNvPr>
@@ -30101,7 +30247,7 @@
           <p:cNvPr id="11" name="Rectangle 10">
             <a:extLst>
               <a:ext uri="{FF2B5EF4-FFF2-40B4-BE49-F238E27FC236}">
-                <a16:creationId xmlns:a16="http://schemas.microsoft.com/office/drawing/2014/main" xmlns="" id="{4756DF98-0092-CAA0-1E19-FAF07472F4FF}"/>
+                <a16:creationId xmlns:a16="http://schemas.microsoft.com/office/drawing/2014/main" id="{4756DF98-0092-CAA0-1E19-FAF07472F4FF}"/>
               </a:ext>
             </a:extLst>
           </p:cNvPr>
@@ -30166,7 +30312,7 @@
           <p:cNvPr id="15" name="Group 14">
             <a:extLst>
               <a:ext uri="{FF2B5EF4-FFF2-40B4-BE49-F238E27FC236}">
-                <a16:creationId xmlns:a16="http://schemas.microsoft.com/office/drawing/2014/main" xmlns="" id="{A4687F14-B0EB-D00D-83B6-02EB421959CB}"/>
+                <a16:creationId xmlns:a16="http://schemas.microsoft.com/office/drawing/2014/main" id="{A4687F14-B0EB-D00D-83B6-02EB421959CB}"/>
               </a:ext>
             </a:extLst>
           </p:cNvPr>
@@ -30186,7 +30332,7 @@
             <p:cNvPr id="10" name="Rectangle 9">
               <a:extLst>
                 <a:ext uri="{FF2B5EF4-FFF2-40B4-BE49-F238E27FC236}">
-                  <a16:creationId xmlns:a16="http://schemas.microsoft.com/office/drawing/2014/main" xmlns="" id="{32C3EFB7-B5CB-2BB2-CDE6-34743896A00F}"/>
+                  <a16:creationId xmlns:a16="http://schemas.microsoft.com/office/drawing/2014/main" id="{32C3EFB7-B5CB-2BB2-CDE6-34743896A00F}"/>
                 </a:ext>
               </a:extLst>
             </p:cNvPr>
@@ -30251,7 +30397,7 @@
             <p:cNvPr id="12" name="Rectangle 11">
               <a:extLst>
                 <a:ext uri="{FF2B5EF4-FFF2-40B4-BE49-F238E27FC236}">
-                  <a16:creationId xmlns:a16="http://schemas.microsoft.com/office/drawing/2014/main" xmlns="" id="{C539DCBD-B73A-24D8-0050-30A40B722292}"/>
+                  <a16:creationId xmlns:a16="http://schemas.microsoft.com/office/drawing/2014/main" id="{C539DCBD-B73A-24D8-0050-30A40B722292}"/>
                 </a:ext>
               </a:extLst>
             </p:cNvPr>
@@ -30313,7 +30459,7 @@
             <p:cNvPr id="13" name="Rectangle 12">
               <a:extLst>
                 <a:ext uri="{FF2B5EF4-FFF2-40B4-BE49-F238E27FC236}">
-                  <a16:creationId xmlns:a16="http://schemas.microsoft.com/office/drawing/2014/main" xmlns="" id="{C5E13218-3B62-CD68-287A-FF06D00BE3CF}"/>
+                  <a16:creationId xmlns:a16="http://schemas.microsoft.com/office/drawing/2014/main" id="{C5E13218-3B62-CD68-287A-FF06D00BE3CF}"/>
                 </a:ext>
               </a:extLst>
             </p:cNvPr>
@@ -30372,7 +30518,7 @@
             <p:cNvPr id="14" name="Rectangle 13">
               <a:extLst>
                 <a:ext uri="{FF2B5EF4-FFF2-40B4-BE49-F238E27FC236}">
-                  <a16:creationId xmlns:a16="http://schemas.microsoft.com/office/drawing/2014/main" xmlns="" id="{BBF1A13B-8BF8-7948-E3FD-FC5177E084EE}"/>
+                  <a16:creationId xmlns:a16="http://schemas.microsoft.com/office/drawing/2014/main" id="{BBF1A13B-8BF8-7948-E3FD-FC5177E084EE}"/>
                 </a:ext>
               </a:extLst>
             </p:cNvPr>
@@ -30435,7 +30581,7 @@
           <p:cNvPr id="17" name="Straight Connector 16">
             <a:extLst>
               <a:ext uri="{FF2B5EF4-FFF2-40B4-BE49-F238E27FC236}">
-                <a16:creationId xmlns:a16="http://schemas.microsoft.com/office/drawing/2014/main" xmlns="" id="{9CFCE19D-6E7D-2F09-F07F-67584C55EB9E}"/>
+                <a16:creationId xmlns:a16="http://schemas.microsoft.com/office/drawing/2014/main" id="{9CFCE19D-6E7D-2F09-F07F-67584C55EB9E}"/>
               </a:ext>
             </a:extLst>
           </p:cNvPr>
@@ -30474,7 +30620,7 @@
           <p:cNvPr id="19" name="Straight Connector 18">
             <a:extLst>
               <a:ext uri="{FF2B5EF4-FFF2-40B4-BE49-F238E27FC236}">
-                <a16:creationId xmlns:a16="http://schemas.microsoft.com/office/drawing/2014/main" xmlns="" id="{0D6950CD-3457-B6C2-8994-2A7BAF25E74E}"/>
+                <a16:creationId xmlns:a16="http://schemas.microsoft.com/office/drawing/2014/main" id="{0D6950CD-3457-B6C2-8994-2A7BAF25E74E}"/>
               </a:ext>
             </a:extLst>
           </p:cNvPr>
@@ -30513,7 +30659,7 @@
           <p:cNvPr id="21" name="Connector: Elbow 20">
             <a:extLst>
               <a:ext uri="{FF2B5EF4-FFF2-40B4-BE49-F238E27FC236}">
-                <a16:creationId xmlns:a16="http://schemas.microsoft.com/office/drawing/2014/main" xmlns="" id="{2B6755D1-E14A-C45A-6CE8-0339EDBE196D}"/>
+                <a16:creationId xmlns:a16="http://schemas.microsoft.com/office/drawing/2014/main" id="{2B6755D1-E14A-C45A-6CE8-0339EDBE196D}"/>
               </a:ext>
             </a:extLst>
           </p:cNvPr>
@@ -30552,7 +30698,7 @@
           <p:cNvPr id="23" name="Connector: Elbow 22">
             <a:extLst>
               <a:ext uri="{FF2B5EF4-FFF2-40B4-BE49-F238E27FC236}">
-                <a16:creationId xmlns:a16="http://schemas.microsoft.com/office/drawing/2014/main" xmlns="" id="{664BE055-53B4-98F8-7ACD-4E5D4AAC9A7C}"/>
+                <a16:creationId xmlns:a16="http://schemas.microsoft.com/office/drawing/2014/main" id="{664BE055-53B4-98F8-7ACD-4E5D4AAC9A7C}"/>
               </a:ext>
             </a:extLst>
           </p:cNvPr>
@@ -30591,7 +30737,7 @@
           <p:cNvPr id="25" name="Connector: Elbow 24">
             <a:extLst>
               <a:ext uri="{FF2B5EF4-FFF2-40B4-BE49-F238E27FC236}">
-                <a16:creationId xmlns:a16="http://schemas.microsoft.com/office/drawing/2014/main" xmlns="" id="{A80AF53D-28D6-4494-F59A-6A53AEF467D3}"/>
+                <a16:creationId xmlns:a16="http://schemas.microsoft.com/office/drawing/2014/main" id="{A80AF53D-28D6-4494-F59A-6A53AEF467D3}"/>
               </a:ext>
             </a:extLst>
           </p:cNvPr>
@@ -30630,7 +30776,7 @@
           <p:cNvPr id="27" name="Connector: Elbow 26">
             <a:extLst>
               <a:ext uri="{FF2B5EF4-FFF2-40B4-BE49-F238E27FC236}">
-                <a16:creationId xmlns:a16="http://schemas.microsoft.com/office/drawing/2014/main" xmlns="" id="{12F83CC4-8ADE-D37B-8AF1-57C00908BBBA}"/>
+                <a16:creationId xmlns:a16="http://schemas.microsoft.com/office/drawing/2014/main" id="{12F83CC4-8ADE-D37B-8AF1-57C00908BBBA}"/>
               </a:ext>
             </a:extLst>
           </p:cNvPr>
@@ -30664,6 +30810,52 @@
           </a:fontRef>
         </p:style>
       </p:cxnSp>
+      <p:sp>
+        <p:nvSpPr>
+          <p:cNvPr id="16" name="TextBox 15">
+            <a:extLst>
+              <a:ext uri="{FF2B5EF4-FFF2-40B4-BE49-F238E27FC236}">
+                <a16:creationId xmlns:a16="http://schemas.microsoft.com/office/drawing/2014/main" id="{972D04FD-845B-C0B9-AAE1-7CADC8AEC1ED}"/>
+              </a:ext>
+            </a:extLst>
+          </p:cNvPr>
+          <p:cNvSpPr txBox="1"/>
+          <p:nvPr/>
+        </p:nvSpPr>
+        <p:spPr>
+          <a:xfrm>
+            <a:off x="6284164" y="4994741"/>
+            <a:ext cx="3774558" cy="646331"/>
+          </a:xfrm>
+          <a:prstGeom prst="rect">
+            <a:avLst/>
+          </a:prstGeom>
+          <a:noFill/>
+        </p:spPr>
+        <p:txBody>
+          <a:bodyPr wrap="square" rtlCol="0">
+            <a:spAutoFit/>
+          </a:bodyPr>
+          <a:lstStyle/>
+          <a:p>
+            <a:pPr algn="ctr"/>
+            <a:r>
+              <a:rPr lang="es-419" dirty="0" err="1">
+                <a:latin typeface="Times New Roman" panose="02020603050405020304" pitchFamily="18" charset="0"/>
+                <a:cs typeface="Times New Roman" panose="02020603050405020304" pitchFamily="18" charset="0"/>
+              </a:rPr>
+              <a:t>Fig</a:t>
+            </a:r>
+            <a:r>
+              <a:rPr lang="es-419" dirty="0">
+                <a:latin typeface="Times New Roman" panose="02020603050405020304" pitchFamily="18" charset="0"/>
+                <a:cs typeface="Times New Roman" panose="02020603050405020304" pitchFamily="18" charset="0"/>
+              </a:rPr>
+              <a:t> 4. Diagrama esquemático de instrumentación.</a:t>
+            </a:r>
+          </a:p>
+        </p:txBody>
+      </p:sp>
     </p:spTree>
     <p:extLst>
       <p:ext uri="{BB962C8B-B14F-4D97-AF65-F5344CB8AC3E}">
@@ -30685,7 +30877,7 @@
         <p:cNvPr id="1" name="">
           <a:extLst>
             <a:ext uri="{FF2B5EF4-FFF2-40B4-BE49-F238E27FC236}">
-              <a16:creationId xmlns:a16="http://schemas.microsoft.com/office/drawing/2014/main" xmlns="" id="{C302207A-2695-A13B-9076-23B0150F2882}"/>
+              <a16:creationId xmlns:a16="http://schemas.microsoft.com/office/drawing/2014/main" id="{C302207A-2695-A13B-9076-23B0150F2882}"/>
             </a:ext>
           </a:extLst>
         </p:cNvPr>
@@ -30705,7 +30897,7 @@
           <p:cNvPr id="2" name="Title 1">
             <a:extLst>
               <a:ext uri="{FF2B5EF4-FFF2-40B4-BE49-F238E27FC236}">
-                <a16:creationId xmlns:a16="http://schemas.microsoft.com/office/drawing/2014/main" xmlns="" id="{A3CD7458-75C7-4F16-DC52-31D9B301C40D}"/>
+                <a16:creationId xmlns:a16="http://schemas.microsoft.com/office/drawing/2014/main" id="{A3CD7458-75C7-4F16-DC52-31D9B301C40D}"/>
               </a:ext>
             </a:extLst>
           </p:cNvPr>
@@ -30738,7 +30930,7 @@
           <p:cNvPr id="4" name="Content Placeholder 3">
             <a:extLst>
               <a:ext uri="{FF2B5EF4-FFF2-40B4-BE49-F238E27FC236}">
-                <a16:creationId xmlns:a16="http://schemas.microsoft.com/office/drawing/2014/main" xmlns="" id="{84A73CFC-F3D9-E942-2DC3-ED4B69DAB33B}"/>
+                <a16:creationId xmlns:a16="http://schemas.microsoft.com/office/drawing/2014/main" id="{84A73CFC-F3D9-E942-2DC3-ED4B69DAB33B}"/>
               </a:ext>
             </a:extLst>
           </p:cNvPr>
@@ -30768,21 +30960,21 @@
                 <a:gridCol w="2371060">
                   <a:extLst>
                     <a:ext uri="{9D8B030D-6E8A-4147-A177-3AD203B41FA5}">
-                      <a16:colId xmlns:a16="http://schemas.microsoft.com/office/drawing/2014/main" xmlns="" val="837159627"/>
+                      <a16:colId xmlns:a16="http://schemas.microsoft.com/office/drawing/2014/main" val="837159627"/>
                     </a:ext>
                   </a:extLst>
                 </a:gridCol>
                 <a:gridCol w="3174732">
                   <a:extLst>
                     <a:ext uri="{9D8B030D-6E8A-4147-A177-3AD203B41FA5}">
-                      <a16:colId xmlns:a16="http://schemas.microsoft.com/office/drawing/2014/main" xmlns="" val="3010335750"/>
+                      <a16:colId xmlns:a16="http://schemas.microsoft.com/office/drawing/2014/main" val="3010335750"/>
                     </a:ext>
                   </a:extLst>
                 </a:gridCol>
                 <a:gridCol w="1312208">
                   <a:extLst>
                     <a:ext uri="{9D8B030D-6E8A-4147-A177-3AD203B41FA5}">
-                      <a16:colId xmlns:a16="http://schemas.microsoft.com/office/drawing/2014/main" xmlns="" val="1953839567"/>
+                      <a16:colId xmlns:a16="http://schemas.microsoft.com/office/drawing/2014/main" val="1953839567"/>
                     </a:ext>
                   </a:extLst>
                 </a:gridCol>
@@ -30841,7 +31033,7 @@
                 </a:tc>
                 <a:extLst>
                   <a:ext uri="{0D108BD9-81ED-4DB2-BD59-A6C34878D82A}">
-                    <a16:rowId xmlns:a16="http://schemas.microsoft.com/office/drawing/2014/main" xmlns="" val="327459817"/>
+                    <a16:rowId xmlns:a16="http://schemas.microsoft.com/office/drawing/2014/main" val="327459817"/>
                   </a:ext>
                 </a:extLst>
               </a:tr>
@@ -30910,7 +31102,7 @@
                 </a:tc>
                 <a:extLst>
                   <a:ext uri="{0D108BD9-81ED-4DB2-BD59-A6C34878D82A}">
-                    <a16:rowId xmlns:a16="http://schemas.microsoft.com/office/drawing/2014/main" xmlns="" val="3185297035"/>
+                    <a16:rowId xmlns:a16="http://schemas.microsoft.com/office/drawing/2014/main" val="3185297035"/>
                   </a:ext>
                 </a:extLst>
               </a:tr>
@@ -30968,7 +31160,7 @@
                 </a:tc>
                 <a:extLst>
                   <a:ext uri="{0D108BD9-81ED-4DB2-BD59-A6C34878D82A}">
-                    <a16:rowId xmlns:a16="http://schemas.microsoft.com/office/drawing/2014/main" xmlns="" val="2988493203"/>
+                    <a16:rowId xmlns:a16="http://schemas.microsoft.com/office/drawing/2014/main" val="2988493203"/>
                   </a:ext>
                 </a:extLst>
               </a:tr>
@@ -31026,7 +31218,7 @@
                 </a:tc>
                 <a:extLst>
                   <a:ext uri="{0D108BD9-81ED-4DB2-BD59-A6C34878D82A}">
-                    <a16:rowId xmlns:a16="http://schemas.microsoft.com/office/drawing/2014/main" xmlns="" val="2561973613"/>
+                    <a16:rowId xmlns:a16="http://schemas.microsoft.com/office/drawing/2014/main" val="2561973613"/>
                   </a:ext>
                 </a:extLst>
               </a:tr>
@@ -31095,7 +31287,7 @@
                 </a:tc>
                 <a:extLst>
                   <a:ext uri="{0D108BD9-81ED-4DB2-BD59-A6C34878D82A}">
-                    <a16:rowId xmlns:a16="http://schemas.microsoft.com/office/drawing/2014/main" xmlns="" val="2494032119"/>
+                    <a16:rowId xmlns:a16="http://schemas.microsoft.com/office/drawing/2014/main" val="2494032119"/>
                   </a:ext>
                 </a:extLst>
               </a:tr>
@@ -31177,7 +31369,7 @@
                 </a:tc>
                 <a:extLst>
                   <a:ext uri="{0D108BD9-81ED-4DB2-BD59-A6C34878D82A}">
-                    <a16:rowId xmlns:a16="http://schemas.microsoft.com/office/drawing/2014/main" xmlns="" val="778126609"/>
+                    <a16:rowId xmlns:a16="http://schemas.microsoft.com/office/drawing/2014/main" val="778126609"/>
                   </a:ext>
                 </a:extLst>
               </a:tr>
@@ -31190,7 +31382,7 @@
           <p:cNvPr id="5" name="Picture 4">
             <a:extLst>
               <a:ext uri="{FF2B5EF4-FFF2-40B4-BE49-F238E27FC236}">
-                <a16:creationId xmlns:a16="http://schemas.microsoft.com/office/drawing/2014/main" xmlns="" id="{6075610E-3E54-0A20-8735-12D58928B3E7}"/>
+                <a16:creationId xmlns:a16="http://schemas.microsoft.com/office/drawing/2014/main" id="{6075610E-3E54-0A20-8735-12D58928B3E7}"/>
               </a:ext>
             </a:extLst>
           </p:cNvPr>
@@ -31223,7 +31415,7 @@
           <p:cNvPr id="6" name="TextBox 5">
             <a:extLst>
               <a:ext uri="{FF2B5EF4-FFF2-40B4-BE49-F238E27FC236}">
-                <a16:creationId xmlns:a16="http://schemas.microsoft.com/office/drawing/2014/main" xmlns="" id="{FE5C3EB1-77A9-DFC8-8E66-095ECAD6E1CB}"/>
+                <a16:creationId xmlns:a16="http://schemas.microsoft.com/office/drawing/2014/main" id="{FE5C3EB1-77A9-DFC8-8E66-095ECAD6E1CB}"/>
               </a:ext>
             </a:extLst>
           </p:cNvPr>
@@ -31252,7 +31444,7 @@
                 <a:latin typeface="Times New Roman" panose="02020603050405020304" pitchFamily="18" charset="0"/>
                 <a:cs typeface="Times New Roman" panose="02020603050405020304" pitchFamily="18" charset="0"/>
               </a:rPr>
-              <a:t>Fig. # Sistema propulsivo </a:t>
+              <a:t>Fig. 5. Sistema propulsivo </a:t>
             </a:r>
           </a:p>
           <a:p>
@@ -31286,7 +31478,7 @@
           <p:cNvPr id="3" name="Group 2">
             <a:extLst>
               <a:ext uri="{FF2B5EF4-FFF2-40B4-BE49-F238E27FC236}">
-                <a16:creationId xmlns:a16="http://schemas.microsoft.com/office/drawing/2014/main" xmlns="" id="{E3A4791B-D7AE-27D3-FB3C-6EC32DB69463}"/>
+                <a16:creationId xmlns:a16="http://schemas.microsoft.com/office/drawing/2014/main" id="{E3A4791B-D7AE-27D3-FB3C-6EC32DB69463}"/>
               </a:ext>
             </a:extLst>
           </p:cNvPr>
@@ -31306,7 +31498,7 @@
             <p:cNvPr id="7" name="Imagen 7">
               <a:extLst>
                 <a:ext uri="{FF2B5EF4-FFF2-40B4-BE49-F238E27FC236}">
-                  <a16:creationId xmlns:a16="http://schemas.microsoft.com/office/drawing/2014/main" xmlns="" id="{5293C7CF-E6EA-05E3-9F22-522D15C731BB}"/>
+                  <a16:creationId xmlns:a16="http://schemas.microsoft.com/office/drawing/2014/main" id="{5293C7CF-E6EA-05E3-9F22-522D15C731BB}"/>
                 </a:ext>
               </a:extLst>
             </p:cNvPr>
@@ -31342,7 +31534,7 @@
             <p:cNvPr id="8" name="Imagen 11">
               <a:extLst>
                 <a:ext uri="{FF2B5EF4-FFF2-40B4-BE49-F238E27FC236}">
-                  <a16:creationId xmlns:a16="http://schemas.microsoft.com/office/drawing/2014/main" xmlns="" id="{935703FC-E844-7A44-40AE-A6EA6A043ACF}"/>
+                  <a16:creationId xmlns:a16="http://schemas.microsoft.com/office/drawing/2014/main" id="{935703FC-E844-7A44-40AE-A6EA6A043ACF}"/>
                 </a:ext>
               </a:extLst>
             </p:cNvPr>
@@ -31378,7 +31570,7 @@
             <p:cNvPr id="9" name="Imagen 13">
               <a:extLst>
                 <a:ext uri="{FF2B5EF4-FFF2-40B4-BE49-F238E27FC236}">
-                  <a16:creationId xmlns:a16="http://schemas.microsoft.com/office/drawing/2014/main" xmlns="" id="{D344F437-97C4-9656-8F7C-298F22D86A3D}"/>
+                  <a16:creationId xmlns:a16="http://schemas.microsoft.com/office/drawing/2014/main" id="{D344F437-97C4-9656-8F7C-298F22D86A3D}"/>
                 </a:ext>
               </a:extLst>
             </p:cNvPr>
@@ -31431,7 +31623,7 @@
         <p:cNvPr id="1" name="">
           <a:extLst>
             <a:ext uri="{FF2B5EF4-FFF2-40B4-BE49-F238E27FC236}">
-              <a16:creationId xmlns:a16="http://schemas.microsoft.com/office/drawing/2014/main" xmlns="" id="{D902F10F-D41C-776E-0AA8-A73826EEEB38}"/>
+              <a16:creationId xmlns:a16="http://schemas.microsoft.com/office/drawing/2014/main" id="{D902F10F-D41C-776E-0AA8-A73826EEEB38}"/>
             </a:ext>
           </a:extLst>
         </p:cNvPr>
@@ -31451,7 +31643,7 @@
           <p:cNvPr id="2" name="Title 1">
             <a:extLst>
               <a:ext uri="{FF2B5EF4-FFF2-40B4-BE49-F238E27FC236}">
-                <a16:creationId xmlns:a16="http://schemas.microsoft.com/office/drawing/2014/main" xmlns="" id="{F9244B50-026A-B568-D07E-111734CF1A71}"/>
+                <a16:creationId xmlns:a16="http://schemas.microsoft.com/office/drawing/2014/main" id="{F9244B50-026A-B568-D07E-111734CF1A71}"/>
               </a:ext>
             </a:extLst>
           </p:cNvPr>
@@ -31484,7 +31676,7 @@
           <p:cNvPr id="6" name="TextBox 5">
             <a:extLst>
               <a:ext uri="{FF2B5EF4-FFF2-40B4-BE49-F238E27FC236}">
-                <a16:creationId xmlns:a16="http://schemas.microsoft.com/office/drawing/2014/main" xmlns="" id="{216D7E37-4876-3DB2-1C12-5A1487A75D5D}"/>
+                <a16:creationId xmlns:a16="http://schemas.microsoft.com/office/drawing/2014/main" id="{216D7E37-4876-3DB2-1C12-5A1487A75D5D}"/>
               </a:ext>
             </a:extLst>
           </p:cNvPr>
@@ -31513,7 +31705,7 @@
                 <a:latin typeface="Times New Roman" panose="02020603050405020304" pitchFamily="18" charset="0"/>
                 <a:cs typeface="Times New Roman" panose="02020603050405020304" pitchFamily="18" charset="0"/>
               </a:rPr>
-              <a:t>Fig. # Sistema estructural </a:t>
+              <a:t>Fig. 6. Sistema estructural </a:t>
             </a:r>
           </a:p>
           <a:p>
@@ -31526,18 +31718,11 @@
               <a:t>“</a:t>
             </a:r>
             <a:r>
-              <a:rPr lang="es-419" i="1" dirty="0" err="1">
-                <a:latin typeface="Times New Roman" panose="02020603050405020304" pitchFamily="18" charset="0"/>
-                <a:cs typeface="Times New Roman" panose="02020603050405020304" pitchFamily="18" charset="0"/>
-              </a:rPr>
-              <a:t>Maria</a:t>
-            </a:r>
-            <a:r>
               <a:rPr lang="es-419" i="1" dirty="0">
                 <a:latin typeface="Times New Roman" panose="02020603050405020304" pitchFamily="18" charset="0"/>
                 <a:cs typeface="Times New Roman" panose="02020603050405020304" pitchFamily="18" charset="0"/>
               </a:rPr>
-              <a:t>” </a:t>
+              <a:t>María” </a:t>
             </a:r>
             <a:r>
               <a:rPr lang="es-419" dirty="0">
@@ -31564,7 +31749,7 @@
           <p:cNvPr id="3" name="Group 2">
             <a:extLst>
               <a:ext uri="{FF2B5EF4-FFF2-40B4-BE49-F238E27FC236}">
-                <a16:creationId xmlns:a16="http://schemas.microsoft.com/office/drawing/2014/main" xmlns="" id="{D21AA2B8-5C10-472B-3185-24ECD354AA90}"/>
+                <a16:creationId xmlns:a16="http://schemas.microsoft.com/office/drawing/2014/main" id="{D21AA2B8-5C10-472B-3185-24ECD354AA90}"/>
               </a:ext>
             </a:extLst>
           </p:cNvPr>
@@ -31584,7 +31769,7 @@
             <p:cNvPr id="7" name="Imagen 7">
               <a:extLst>
                 <a:ext uri="{FF2B5EF4-FFF2-40B4-BE49-F238E27FC236}">
-                  <a16:creationId xmlns:a16="http://schemas.microsoft.com/office/drawing/2014/main" xmlns="" id="{1BAC52E4-BD72-B2F9-3050-4018C3025C28}"/>
+                  <a16:creationId xmlns:a16="http://schemas.microsoft.com/office/drawing/2014/main" id="{1BAC52E4-BD72-B2F9-3050-4018C3025C28}"/>
                 </a:ext>
               </a:extLst>
             </p:cNvPr>
@@ -31620,7 +31805,7 @@
             <p:cNvPr id="8" name="Imagen 11">
               <a:extLst>
                 <a:ext uri="{FF2B5EF4-FFF2-40B4-BE49-F238E27FC236}">
-                  <a16:creationId xmlns:a16="http://schemas.microsoft.com/office/drawing/2014/main" xmlns="" id="{D6C15DB5-5DE7-826C-F27D-6E391DE83298}"/>
+                  <a16:creationId xmlns:a16="http://schemas.microsoft.com/office/drawing/2014/main" id="{D6C15DB5-5DE7-826C-F27D-6E391DE83298}"/>
                 </a:ext>
               </a:extLst>
             </p:cNvPr>
@@ -31656,7 +31841,7 @@
             <p:cNvPr id="9" name="Imagen 13">
               <a:extLst>
                 <a:ext uri="{FF2B5EF4-FFF2-40B4-BE49-F238E27FC236}">
-                  <a16:creationId xmlns:a16="http://schemas.microsoft.com/office/drawing/2014/main" xmlns="" id="{E1D0A859-2C1F-0578-7722-3D637B10D90A}"/>
+                  <a16:creationId xmlns:a16="http://schemas.microsoft.com/office/drawing/2014/main" id="{E1D0A859-2C1F-0578-7722-3D637B10D90A}"/>
                 </a:ext>
               </a:extLst>
             </p:cNvPr>
@@ -31693,7 +31878,7 @@
           <p:cNvPr id="5" name="Picture 4">
             <a:extLst>
               <a:ext uri="{FF2B5EF4-FFF2-40B4-BE49-F238E27FC236}">
-                <a16:creationId xmlns:a16="http://schemas.microsoft.com/office/drawing/2014/main" xmlns="" id="{D5147649-D4B8-0FED-6258-A3C37FB6D967}"/>
+                <a16:creationId xmlns:a16="http://schemas.microsoft.com/office/drawing/2014/main" id="{D5147649-D4B8-0FED-6258-A3C37FB6D967}"/>
               </a:ext>
             </a:extLst>
           </p:cNvPr>
@@ -31724,7 +31909,7 @@
           <p:cNvPr id="10" name="Content Placeholder 3">
             <a:extLst>
               <a:ext uri="{FF2B5EF4-FFF2-40B4-BE49-F238E27FC236}">
-                <a16:creationId xmlns:a16="http://schemas.microsoft.com/office/drawing/2014/main" xmlns="" id="{610DC067-FB22-AD1E-E954-19CF5A4849FA}"/>
+                <a16:creationId xmlns:a16="http://schemas.microsoft.com/office/drawing/2014/main" id="{610DC067-FB22-AD1E-E954-19CF5A4849FA}"/>
               </a:ext>
             </a:extLst>
           </p:cNvPr>
@@ -31754,21 +31939,21 @@
                 <a:gridCol w="2371060">
                   <a:extLst>
                     <a:ext uri="{9D8B030D-6E8A-4147-A177-3AD203B41FA5}">
-                      <a16:colId xmlns:a16="http://schemas.microsoft.com/office/drawing/2014/main" xmlns="" val="837159627"/>
+                      <a16:colId xmlns:a16="http://schemas.microsoft.com/office/drawing/2014/main" val="837159627"/>
                     </a:ext>
                   </a:extLst>
                 </a:gridCol>
                 <a:gridCol w="3174732">
                   <a:extLst>
                     <a:ext uri="{9D8B030D-6E8A-4147-A177-3AD203B41FA5}">
-                      <a16:colId xmlns:a16="http://schemas.microsoft.com/office/drawing/2014/main" xmlns="" val="3010335750"/>
+                      <a16:colId xmlns:a16="http://schemas.microsoft.com/office/drawing/2014/main" val="3010335750"/>
                     </a:ext>
                   </a:extLst>
                 </a:gridCol>
                 <a:gridCol w="1312208">
                   <a:extLst>
                     <a:ext uri="{9D8B030D-6E8A-4147-A177-3AD203B41FA5}">
-                      <a16:colId xmlns:a16="http://schemas.microsoft.com/office/drawing/2014/main" xmlns="" val="1953839567"/>
+                      <a16:colId xmlns:a16="http://schemas.microsoft.com/office/drawing/2014/main" val="1953839567"/>
                     </a:ext>
                   </a:extLst>
                 </a:gridCol>
@@ -31827,7 +32012,7 @@
                 </a:tc>
                 <a:extLst>
                   <a:ext uri="{0D108BD9-81ED-4DB2-BD59-A6C34878D82A}">
-                    <a16:rowId xmlns:a16="http://schemas.microsoft.com/office/drawing/2014/main" xmlns="" val="327459817"/>
+                    <a16:rowId xmlns:a16="http://schemas.microsoft.com/office/drawing/2014/main" val="327459817"/>
                   </a:ext>
                 </a:extLst>
               </a:tr>
@@ -31839,16 +32024,12 @@
                     <a:p>
                       <a:pPr algn="ctr"/>
                       <a:r>
-                        <a:rPr lang="es-419" dirty="0" smtClean="0">
+                        <a:rPr lang="es-419" dirty="0">
                           <a:latin typeface="Times New Roman" panose="02020603050405020304" pitchFamily="18" charset="0"/>
                           <a:cs typeface="Times New Roman" panose="02020603050405020304" pitchFamily="18" charset="0"/>
                         </a:rPr>
                         <a:t>Empuje máximo a diseño</a:t>
                       </a:r>
-                      <a:endParaRPr lang="es-419" dirty="0">
-                        <a:latin typeface="Times New Roman" panose="02020603050405020304" pitchFamily="18" charset="0"/>
-                        <a:cs typeface="Times New Roman" panose="02020603050405020304" pitchFamily="18" charset="0"/>
-                      </a:endParaRPr>
                     </a:p>
                   </a:txBody>
                   <a:tcPr anchor="ctr"/>
@@ -31860,14 +32041,14 @@
                     <a:p>
                       <a:pPr algn="ctr"/>
                       <a:r>
-                        <a:rPr lang="es-419" dirty="0" smtClean="0">
+                        <a:rPr lang="es-419" dirty="0">
                           <a:latin typeface="Times New Roman" panose="02020603050405020304" pitchFamily="18" charset="0"/>
                           <a:cs typeface="Times New Roman" panose="02020603050405020304" pitchFamily="18" charset="0"/>
                         </a:rPr>
                         <a:t>Operatividad</a:t>
                       </a:r>
                       <a:r>
-                        <a:rPr lang="es-419" baseline="0" dirty="0" smtClean="0">
+                        <a:rPr lang="es-419" baseline="0" dirty="0">
                           <a:latin typeface="Times New Roman" panose="02020603050405020304" pitchFamily="18" charset="0"/>
                           <a:cs typeface="Times New Roman" panose="02020603050405020304" pitchFamily="18" charset="0"/>
                         </a:rPr>
@@ -31888,21 +32069,21 @@
                     <a:p>
                       <a:pPr algn="ctr"/>
                       <a:r>
-                        <a:rPr lang="es-419" dirty="0" smtClean="0">
+                        <a:rPr lang="es-419" dirty="0">
                           <a:latin typeface="Times New Roman" panose="02020603050405020304" pitchFamily="18" charset="0"/>
                           <a:cs typeface="Times New Roman" panose="02020603050405020304" pitchFamily="18" charset="0"/>
                         </a:rPr>
                         <a:t>400</a:t>
                       </a:r>
                       <a:r>
-                        <a:rPr lang="es-419" baseline="0" dirty="0" smtClean="0">
+                        <a:rPr lang="es-419" baseline="0" dirty="0">
                           <a:latin typeface="Times New Roman" panose="02020603050405020304" pitchFamily="18" charset="0"/>
                           <a:cs typeface="Times New Roman" panose="02020603050405020304" pitchFamily="18" charset="0"/>
                         </a:rPr>
                         <a:t> </a:t>
                       </a:r>
                       <a:r>
-                        <a:rPr lang="es-419" baseline="0" dirty="0" err="1" smtClean="0">
+                        <a:rPr lang="es-419" baseline="0" dirty="0" err="1">
                           <a:latin typeface="Times New Roman" panose="02020603050405020304" pitchFamily="18" charset="0"/>
                           <a:cs typeface="Times New Roman" panose="02020603050405020304" pitchFamily="18" charset="0"/>
                         </a:rPr>
@@ -31918,7 +32099,7 @@
                 </a:tc>
                 <a:extLst>
                   <a:ext uri="{0D108BD9-81ED-4DB2-BD59-A6C34878D82A}">
-                    <a16:rowId xmlns:a16="http://schemas.microsoft.com/office/drawing/2014/main" xmlns="" val="3185297035"/>
+                    <a16:rowId xmlns:a16="http://schemas.microsoft.com/office/drawing/2014/main" val="3185297035"/>
                   </a:ext>
                 </a:extLst>
               </a:tr>
@@ -31930,16 +32111,12 @@
                     <a:p>
                       <a:pPr algn="ctr"/>
                       <a:r>
-                        <a:rPr lang="es-419" dirty="0" smtClean="0">
+                        <a:rPr lang="es-419" dirty="0">
                           <a:latin typeface="Times New Roman" panose="02020603050405020304" pitchFamily="18" charset="0"/>
                           <a:cs typeface="Times New Roman" panose="02020603050405020304" pitchFamily="18" charset="0"/>
                         </a:rPr>
                         <a:t>Factor de seguridad</a:t>
                       </a:r>
-                      <a:endParaRPr lang="es-419" dirty="0">
-                        <a:latin typeface="Times New Roman" panose="02020603050405020304" pitchFamily="18" charset="0"/>
-                        <a:cs typeface="Times New Roman" panose="02020603050405020304" pitchFamily="18" charset="0"/>
-                      </a:endParaRPr>
                     </a:p>
                   </a:txBody>
                   <a:tcPr anchor="ctr"/>
@@ -31951,16 +32128,12 @@
                     <a:p>
                       <a:pPr algn="ctr"/>
                       <a:r>
-                        <a:rPr lang="es-419" dirty="0" smtClean="0">
+                        <a:rPr lang="es-419" dirty="0">
                           <a:latin typeface="Times New Roman" panose="02020603050405020304" pitchFamily="18" charset="0"/>
                           <a:cs typeface="Times New Roman" panose="02020603050405020304" pitchFamily="18" charset="0"/>
                         </a:rPr>
                         <a:t>Relevante por seguridad</a:t>
                       </a:r>
-                      <a:endParaRPr lang="es-419" dirty="0">
-                        <a:latin typeface="Times New Roman" panose="02020603050405020304" pitchFamily="18" charset="0"/>
-                        <a:cs typeface="Times New Roman" panose="02020603050405020304" pitchFamily="18" charset="0"/>
-                      </a:endParaRPr>
                     </a:p>
                   </a:txBody>
                   <a:tcPr anchor="ctr"/>
@@ -31972,23 +32145,19 @@
                     <a:p>
                       <a:pPr algn="ctr"/>
                       <a:r>
-                        <a:rPr lang="es-419" dirty="0" smtClean="0">
+                        <a:rPr lang="es-419" dirty="0">
                           <a:latin typeface="Times New Roman" panose="02020603050405020304" pitchFamily="18" charset="0"/>
                           <a:cs typeface="Times New Roman" panose="02020603050405020304" pitchFamily="18" charset="0"/>
                         </a:rPr>
                         <a:t>8</a:t>
                       </a:r>
-                      <a:endParaRPr lang="es-419" dirty="0">
-                        <a:latin typeface="Times New Roman" panose="02020603050405020304" pitchFamily="18" charset="0"/>
-                        <a:cs typeface="Times New Roman" panose="02020603050405020304" pitchFamily="18" charset="0"/>
-                      </a:endParaRPr>
                     </a:p>
                   </a:txBody>
                   <a:tcPr anchor="ctr"/>
                 </a:tc>
                 <a:extLst>
                   <a:ext uri="{0D108BD9-81ED-4DB2-BD59-A6C34878D82A}">
-                    <a16:rowId xmlns:a16="http://schemas.microsoft.com/office/drawing/2014/main" xmlns="" val="2988493203"/>
+                    <a16:rowId xmlns:a16="http://schemas.microsoft.com/office/drawing/2014/main" val="2988493203"/>
                   </a:ext>
                 </a:extLst>
               </a:tr>
@@ -32000,16 +32169,12 @@
                     <a:p>
                       <a:pPr algn="ctr"/>
                       <a:r>
-                        <a:rPr lang="es-419" dirty="0" smtClean="0">
+                        <a:rPr lang="es-419" dirty="0">
                           <a:latin typeface="Times New Roman" panose="02020603050405020304" pitchFamily="18" charset="0"/>
                           <a:cs typeface="Times New Roman" panose="02020603050405020304" pitchFamily="18" charset="0"/>
                         </a:rPr>
                         <a:t>Material</a:t>
                       </a:r>
-                      <a:endParaRPr lang="es-419" dirty="0">
-                        <a:latin typeface="Times New Roman" panose="02020603050405020304" pitchFamily="18" charset="0"/>
-                        <a:cs typeface="Times New Roman" panose="02020603050405020304" pitchFamily="18" charset="0"/>
-                      </a:endParaRPr>
                     </a:p>
                   </a:txBody>
                   <a:tcPr anchor="ctr"/>
@@ -32021,14 +32186,14 @@
                     <a:p>
                       <a:pPr algn="ctr"/>
                       <a:r>
-                        <a:rPr lang="es-419" dirty="0" smtClean="0">
+                        <a:rPr lang="es-419" dirty="0">
                           <a:latin typeface="Times New Roman" panose="02020603050405020304" pitchFamily="18" charset="0"/>
                           <a:cs typeface="Times New Roman" panose="02020603050405020304" pitchFamily="18" charset="0"/>
                         </a:rPr>
                         <a:t>Disponibilidad</a:t>
                       </a:r>
                       <a:r>
-                        <a:rPr lang="es-419" baseline="0" dirty="0" smtClean="0">
+                        <a:rPr lang="es-419" baseline="0" dirty="0">
                           <a:latin typeface="Times New Roman" panose="02020603050405020304" pitchFamily="18" charset="0"/>
                           <a:cs typeface="Times New Roman" panose="02020603050405020304" pitchFamily="18" charset="0"/>
                         </a:rPr>
@@ -32049,23 +32214,19 @@
                     <a:p>
                       <a:pPr algn="ctr"/>
                       <a:r>
-                        <a:rPr lang="es-419" dirty="0" smtClean="0">
+                        <a:rPr lang="es-419" dirty="0">
                           <a:latin typeface="Times New Roman" panose="02020603050405020304" pitchFamily="18" charset="0"/>
                           <a:cs typeface="Times New Roman" panose="02020603050405020304" pitchFamily="18" charset="0"/>
                         </a:rPr>
                         <a:t>Acero A36</a:t>
                       </a:r>
-                      <a:endParaRPr lang="es-419" dirty="0">
-                        <a:latin typeface="Times New Roman" panose="02020603050405020304" pitchFamily="18" charset="0"/>
-                        <a:cs typeface="Times New Roman" panose="02020603050405020304" pitchFamily="18" charset="0"/>
-                      </a:endParaRPr>
                     </a:p>
                   </a:txBody>
                   <a:tcPr anchor="ctr"/>
                 </a:tc>
                 <a:extLst>
                   <a:ext uri="{0D108BD9-81ED-4DB2-BD59-A6C34878D82A}">
-                    <a16:rowId xmlns:a16="http://schemas.microsoft.com/office/drawing/2014/main" xmlns="" val="2561973613"/>
+                    <a16:rowId xmlns:a16="http://schemas.microsoft.com/office/drawing/2014/main" val="2561973613"/>
                   </a:ext>
                 </a:extLst>
               </a:tr>
@@ -32077,16 +32238,12 @@
                     <a:p>
                       <a:pPr algn="ctr"/>
                       <a:r>
-                        <a:rPr lang="es-419" dirty="0" smtClean="0">
+                        <a:rPr lang="es-419" dirty="0">
                           <a:latin typeface="Times New Roman" panose="02020603050405020304" pitchFamily="18" charset="0"/>
                           <a:cs typeface="Times New Roman" panose="02020603050405020304" pitchFamily="18" charset="0"/>
                         </a:rPr>
                         <a:t>Anclaje</a:t>
                       </a:r>
-                      <a:endParaRPr lang="es-419" dirty="0">
-                        <a:latin typeface="Times New Roman" panose="02020603050405020304" pitchFamily="18" charset="0"/>
-                        <a:cs typeface="Times New Roman" panose="02020603050405020304" pitchFamily="18" charset="0"/>
-                      </a:endParaRPr>
                     </a:p>
                   </a:txBody>
                   <a:tcPr anchor="ctr"/>
@@ -32098,14 +32255,14 @@
                     <a:p>
                       <a:pPr algn="ctr"/>
                       <a:r>
-                        <a:rPr lang="es-419" i="0" dirty="0" smtClean="0">
+                        <a:rPr lang="es-419" i="0" dirty="0">
                           <a:latin typeface="Times New Roman" panose="02020603050405020304" pitchFamily="18" charset="0"/>
                           <a:cs typeface="Times New Roman" panose="02020603050405020304" pitchFamily="18" charset="0"/>
                         </a:rPr>
                         <a:t>Tipo</a:t>
                       </a:r>
                       <a:r>
-                        <a:rPr lang="es-419" i="0" baseline="0" dirty="0" smtClean="0">
+                        <a:rPr lang="es-419" i="0" baseline="0" dirty="0">
                           <a:latin typeface="Times New Roman" panose="02020603050405020304" pitchFamily="18" charset="0"/>
                           <a:cs typeface="Times New Roman" panose="02020603050405020304" pitchFamily="18" charset="0"/>
                         </a:rPr>
@@ -32126,23 +32283,19 @@
                     <a:p>
                       <a:pPr algn="ctr"/>
                       <a:r>
-                        <a:rPr lang="es-419" dirty="0" smtClean="0">
+                        <a:rPr lang="es-419" dirty="0">
                           <a:latin typeface="Times New Roman" panose="02020603050405020304" pitchFamily="18" charset="0"/>
                           <a:cs typeface="Times New Roman" panose="02020603050405020304" pitchFamily="18" charset="0"/>
                         </a:rPr>
                         <a:t>Enterrado</a:t>
                       </a:r>
-                      <a:endParaRPr lang="es-419" dirty="0">
-                        <a:latin typeface="Times New Roman" panose="02020603050405020304" pitchFamily="18" charset="0"/>
-                        <a:cs typeface="Times New Roman" panose="02020603050405020304" pitchFamily="18" charset="0"/>
-                      </a:endParaRPr>
                     </a:p>
                   </a:txBody>
                   <a:tcPr anchor="ctr"/>
                 </a:tc>
                 <a:extLst>
                   <a:ext uri="{0D108BD9-81ED-4DB2-BD59-A6C34878D82A}">
-                    <a16:rowId xmlns:a16="http://schemas.microsoft.com/office/drawing/2014/main" xmlns="" val="2494032119"/>
+                    <a16:rowId xmlns:a16="http://schemas.microsoft.com/office/drawing/2014/main" val="2494032119"/>
                   </a:ext>
                 </a:extLst>
               </a:tr>
@@ -32171,7 +32324,7 @@
         <p:cNvPr id="1" name="">
           <a:extLst>
             <a:ext uri="{FF2B5EF4-FFF2-40B4-BE49-F238E27FC236}">
-              <a16:creationId xmlns:a16="http://schemas.microsoft.com/office/drawing/2014/main" xmlns="" id="{39316446-EDBC-A2B5-70E1-6C34952F5586}"/>
+              <a16:creationId xmlns:a16="http://schemas.microsoft.com/office/drawing/2014/main" id="{39316446-EDBC-A2B5-70E1-6C34952F5586}"/>
             </a:ext>
           </a:extLst>
         </p:cNvPr>
@@ -32191,7 +32344,7 @@
           <p:cNvPr id="2" name="Title 1">
             <a:extLst>
               <a:ext uri="{FF2B5EF4-FFF2-40B4-BE49-F238E27FC236}">
-                <a16:creationId xmlns:a16="http://schemas.microsoft.com/office/drawing/2014/main" xmlns="" id="{0FF153D4-7F68-DF84-81B9-E7E29130733E}"/>
+                <a16:creationId xmlns:a16="http://schemas.microsoft.com/office/drawing/2014/main" id="{0FF153D4-7F68-DF84-81B9-E7E29130733E}"/>
               </a:ext>
             </a:extLst>
           </p:cNvPr>
@@ -32202,7 +32355,12 @@
             <p:ph type="title"/>
           </p:nvPr>
         </p:nvSpPr>
-        <p:spPr/>
+        <p:spPr>
+          <a:xfrm>
+            <a:off x="838200" y="173157"/>
+            <a:ext cx="10515600" cy="1325563"/>
+          </a:xfrm>
+        </p:spPr>
         <p:txBody>
           <a:bodyPr/>
           <a:lstStyle/>
@@ -32226,18 +32384,18 @@
           <p:nvPr>
             <p:extLst>
               <p:ext uri="{D42A27DB-BD31-4B8C-83A1-F6EECF244321}">
-                <p14:modId xmlns:p14="http://schemas.microsoft.com/office/powerpoint/2010/main" val="2099596557"/>
+                <p14:modId xmlns:p14="http://schemas.microsoft.com/office/powerpoint/2010/main" val="2712246930"/>
               </p:ext>
             </p:extLst>
           </p:nvPr>
         </p:nvGraphicFramePr>
         <p:xfrm>
-          <a:off x="838200" y="1690688"/>
+          <a:off x="838200" y="1323623"/>
           <a:ext cx="5562600" cy="4437738"/>
         </p:xfrm>
         <a:graphic>
           <a:graphicData uri="http://schemas.openxmlformats.org/drawingml/2006/chart">
-            <c:chart xmlns:c="http://schemas.openxmlformats.org/drawingml/2006/chart" xmlns:r="http://schemas.openxmlformats.org/officeDocument/2006/relationships" r:id="rId2"/>
+            <c:chart xmlns:c="http://schemas.openxmlformats.org/drawingml/2006/chart" xmlns:r="http://schemas.openxmlformats.org/officeDocument/2006/relationships" r:id="rId3"/>
           </a:graphicData>
         </a:graphic>
       </p:graphicFrame>
@@ -32246,7 +32404,7 @@
           <p:cNvPr id="8" name="Chart 7">
             <a:extLst>
               <a:ext uri="{FF2B5EF4-FFF2-40B4-BE49-F238E27FC236}">
-                <a16:creationId xmlns="" xmlns:xdr="http://schemas.openxmlformats.org/drawingml/2006/spreadsheetDrawing" xmlns:a16="http://schemas.microsoft.com/office/drawing/2014/main" xmlns:lc="http://schemas.openxmlformats.org/drawingml/2006/lockedCanvas" id="{00000000-0008-0000-0300-0000BA806600}"/>
+                <a16:creationId xmlns:a16="http://schemas.microsoft.com/office/drawing/2014/main" id="{00000000-0008-0000-0300-0000BA806600}"/>
               </a:ext>
             </a:extLst>
           </p:cNvPr>
@@ -32256,18 +32414,18 @@
           <p:nvPr>
             <p:extLst>
               <p:ext uri="{D42A27DB-BD31-4B8C-83A1-F6EECF244321}">
-                <p14:modId xmlns:p14="http://schemas.microsoft.com/office/powerpoint/2010/main" val="953493043"/>
+                <p14:modId xmlns:p14="http://schemas.microsoft.com/office/powerpoint/2010/main" val="1833208920"/>
               </p:ext>
             </p:extLst>
           </p:nvPr>
         </p:nvGraphicFramePr>
         <p:xfrm>
-          <a:off x="6547252" y="1690687"/>
+          <a:off x="6547252" y="1323623"/>
           <a:ext cx="4806548" cy="4262641"/>
         </p:xfrm>
         <a:graphic>
           <a:graphicData uri="http://schemas.openxmlformats.org/drawingml/2006/chart">
-            <c:chart xmlns:c="http://schemas.openxmlformats.org/drawingml/2006/chart" xmlns:r="http://schemas.openxmlformats.org/officeDocument/2006/relationships" r:id="rId3"/>
+            <c:chart xmlns:c="http://schemas.openxmlformats.org/drawingml/2006/chart" xmlns:r="http://schemas.openxmlformats.org/officeDocument/2006/relationships" r:id="rId4"/>
           </a:graphicData>
         </a:graphic>
       </p:graphicFrame>
@@ -32276,7 +32434,7 @@
           <p:cNvPr id="9" name="Group 8">
             <a:extLst>
               <a:ext uri="{FF2B5EF4-FFF2-40B4-BE49-F238E27FC236}">
-                <a16:creationId xmlns:a16="http://schemas.microsoft.com/office/drawing/2014/main" xmlns="" id="{5F9D13D1-1C38-A72A-8529-669A1C270BB5}"/>
+                <a16:creationId xmlns:a16="http://schemas.microsoft.com/office/drawing/2014/main" id="{5F9D13D1-1C38-A72A-8529-669A1C270BB5}"/>
               </a:ext>
             </a:extLst>
           </p:cNvPr>
@@ -32296,7 +32454,7 @@
             <p:cNvPr id="10" name="Imagen 7">
               <a:extLst>
                 <a:ext uri="{FF2B5EF4-FFF2-40B4-BE49-F238E27FC236}">
-                  <a16:creationId xmlns:a16="http://schemas.microsoft.com/office/drawing/2014/main" xmlns="" id="{99B318A0-B87A-7179-42A5-AF2814918F77}"/>
+                  <a16:creationId xmlns:a16="http://schemas.microsoft.com/office/drawing/2014/main" id="{99B318A0-B87A-7179-42A5-AF2814918F77}"/>
                 </a:ext>
               </a:extLst>
             </p:cNvPr>
@@ -32306,7 +32464,7 @@
             <p:nvPr/>
           </p:nvPicPr>
           <p:blipFill>
-            <a:blip r:embed="rId4">
+            <a:blip r:embed="rId5">
               <a:extLst>
                 <a:ext uri="{28A0092B-C50C-407E-A947-70E740481C1C}">
                   <a14:useLocalDpi xmlns:a14="http://schemas.microsoft.com/office/drawing/2010/main" val="0"/>
@@ -32332,7 +32490,7 @@
             <p:cNvPr id="11" name="Imagen 11">
               <a:extLst>
                 <a:ext uri="{FF2B5EF4-FFF2-40B4-BE49-F238E27FC236}">
-                  <a16:creationId xmlns:a16="http://schemas.microsoft.com/office/drawing/2014/main" xmlns="" id="{21767101-A64F-7AEC-C268-8BA9DE052938}"/>
+                  <a16:creationId xmlns:a16="http://schemas.microsoft.com/office/drawing/2014/main" id="{21767101-A64F-7AEC-C268-8BA9DE052938}"/>
                 </a:ext>
               </a:extLst>
             </p:cNvPr>
@@ -32342,7 +32500,7 @@
             <p:nvPr/>
           </p:nvPicPr>
           <p:blipFill>
-            <a:blip r:embed="rId5" cstate="print">
+            <a:blip r:embed="rId6" cstate="print">
               <a:extLst>
                 <a:ext uri="{28A0092B-C50C-407E-A947-70E740481C1C}">
                   <a14:useLocalDpi xmlns:a14="http://schemas.microsoft.com/office/drawing/2010/main" val="0"/>
@@ -32368,7 +32526,7 @@
             <p:cNvPr id="12" name="Imagen 13">
               <a:extLst>
                 <a:ext uri="{FF2B5EF4-FFF2-40B4-BE49-F238E27FC236}">
-                  <a16:creationId xmlns:a16="http://schemas.microsoft.com/office/drawing/2014/main" xmlns="" id="{6B1B3E6B-2614-529D-6A7A-E5F0C28A3CB8}"/>
+                  <a16:creationId xmlns:a16="http://schemas.microsoft.com/office/drawing/2014/main" id="{6B1B3E6B-2614-529D-6A7A-E5F0C28A3CB8}"/>
                 </a:ext>
               </a:extLst>
             </p:cNvPr>
@@ -32378,7 +32536,7 @@
             <p:nvPr/>
           </p:nvPicPr>
           <p:blipFill>
-            <a:blip r:embed="rId6" cstate="print">
+            <a:blip r:embed="rId7" cstate="print">
               <a:extLst>
                 <a:ext uri="{28A0092B-C50C-407E-A947-70E740481C1C}">
                   <a14:useLocalDpi xmlns:a14="http://schemas.microsoft.com/office/drawing/2010/main" val="0"/>
@@ -32400,6 +32558,84 @@
           </p:spPr>
         </p:pic>
       </p:grpSp>
+      <p:sp>
+        <p:nvSpPr>
+          <p:cNvPr id="3" name="TextBox 2">
+            <a:extLst>
+              <a:ext uri="{FF2B5EF4-FFF2-40B4-BE49-F238E27FC236}">
+                <a16:creationId xmlns:a16="http://schemas.microsoft.com/office/drawing/2014/main" id="{C5E74252-CB9E-55EE-84F6-52E8216E2BD7}"/>
+              </a:ext>
+            </a:extLst>
+          </p:cNvPr>
+          <p:cNvSpPr txBox="1"/>
+          <p:nvPr/>
+        </p:nvSpPr>
+        <p:spPr>
+          <a:xfrm>
+            <a:off x="1140432" y="5641519"/>
+            <a:ext cx="5170548" cy="369332"/>
+          </a:xfrm>
+          <a:prstGeom prst="rect">
+            <a:avLst/>
+          </a:prstGeom>
+          <a:noFill/>
+        </p:spPr>
+        <p:txBody>
+          <a:bodyPr wrap="square" rtlCol="0">
+            <a:spAutoFit/>
+          </a:bodyPr>
+          <a:lstStyle/>
+          <a:p>
+            <a:pPr algn="ctr"/>
+            <a:r>
+              <a:rPr lang="es-419" dirty="0">
+                <a:latin typeface="Times New Roman" panose="02020603050405020304" pitchFamily="18" charset="0"/>
+                <a:cs typeface="Times New Roman" panose="02020603050405020304" pitchFamily="18" charset="0"/>
+              </a:rPr>
+              <a:t>Fig. 6. Resultados de empuje teórico vs experimental.</a:t>
+            </a:r>
+          </a:p>
+        </p:txBody>
+      </p:sp>
+      <p:sp>
+        <p:nvSpPr>
+          <p:cNvPr id="4" name="TextBox 3">
+            <a:extLst>
+              <a:ext uri="{FF2B5EF4-FFF2-40B4-BE49-F238E27FC236}">
+                <a16:creationId xmlns:a16="http://schemas.microsoft.com/office/drawing/2014/main" id="{4FB84F13-16AF-A9DC-4F02-4D1F6C6CA751}"/>
+              </a:ext>
+            </a:extLst>
+          </p:cNvPr>
+          <p:cNvSpPr txBox="1"/>
+          <p:nvPr/>
+        </p:nvSpPr>
+        <p:spPr>
+          <a:xfrm>
+            <a:off x="6784465" y="5641519"/>
+            <a:ext cx="4332122" cy="646331"/>
+          </a:xfrm>
+          <a:prstGeom prst="rect">
+            <a:avLst/>
+          </a:prstGeom>
+          <a:noFill/>
+        </p:spPr>
+        <p:txBody>
+          <a:bodyPr wrap="square" rtlCol="0">
+            <a:spAutoFit/>
+          </a:bodyPr>
+          <a:lstStyle/>
+          <a:p>
+            <a:pPr algn="ctr"/>
+            <a:r>
+              <a:rPr lang="es-419" dirty="0">
+                <a:latin typeface="Times New Roman" panose="02020603050405020304" pitchFamily="18" charset="0"/>
+                <a:cs typeface="Times New Roman" panose="02020603050405020304" pitchFamily="18" charset="0"/>
+              </a:rPr>
+              <a:t>Fig. 6. Resultados de transferencia de calor teóricos.</a:t>
+            </a:r>
+          </a:p>
+        </p:txBody>
+      </p:sp>
     </p:spTree>
     <p:extLst>
       <p:ext uri="{BB962C8B-B14F-4D97-AF65-F5344CB8AC3E}">
@@ -32421,7 +32657,7 @@
         <p:cNvPr id="1" name="">
           <a:extLst>
             <a:ext uri="{FF2B5EF4-FFF2-40B4-BE49-F238E27FC236}">
-              <a16:creationId xmlns:a16="http://schemas.microsoft.com/office/drawing/2014/main" xmlns="" id="{39316446-EDBC-A2B5-70E1-6C34952F5586}"/>
+              <a16:creationId xmlns:a16="http://schemas.microsoft.com/office/drawing/2014/main" id="{39316446-EDBC-A2B5-70E1-6C34952F5586}"/>
             </a:ext>
           </a:extLst>
         </p:cNvPr>
@@ -32441,7 +32677,7 @@
           <p:cNvPr id="2" name="Title 1">
             <a:extLst>
               <a:ext uri="{FF2B5EF4-FFF2-40B4-BE49-F238E27FC236}">
-                <a16:creationId xmlns:a16="http://schemas.microsoft.com/office/drawing/2014/main" xmlns="" id="{0FF153D4-7F68-DF84-81B9-E7E29130733E}"/>
+                <a16:creationId xmlns:a16="http://schemas.microsoft.com/office/drawing/2014/main" id="{0FF153D4-7F68-DF84-81B9-E7E29130733E}"/>
               </a:ext>
             </a:extLst>
           </p:cNvPr>
@@ -32505,7 +32741,7 @@
           <p:cNvPr id="9" name="Group 8">
             <a:extLst>
               <a:ext uri="{FF2B5EF4-FFF2-40B4-BE49-F238E27FC236}">
-                <a16:creationId xmlns:a16="http://schemas.microsoft.com/office/drawing/2014/main" xmlns="" id="{5F9D13D1-1C38-A72A-8529-669A1C270BB5}"/>
+                <a16:creationId xmlns:a16="http://schemas.microsoft.com/office/drawing/2014/main" id="{5F9D13D1-1C38-A72A-8529-669A1C270BB5}"/>
               </a:ext>
             </a:extLst>
           </p:cNvPr>
@@ -32525,7 +32761,7 @@
             <p:cNvPr id="10" name="Imagen 7">
               <a:extLst>
                 <a:ext uri="{FF2B5EF4-FFF2-40B4-BE49-F238E27FC236}">
-                  <a16:creationId xmlns:a16="http://schemas.microsoft.com/office/drawing/2014/main" xmlns="" id="{99B318A0-B87A-7179-42A5-AF2814918F77}"/>
+                  <a16:creationId xmlns:a16="http://schemas.microsoft.com/office/drawing/2014/main" id="{99B318A0-B87A-7179-42A5-AF2814918F77}"/>
                 </a:ext>
               </a:extLst>
             </p:cNvPr>
@@ -32561,7 +32797,7 @@
             <p:cNvPr id="11" name="Imagen 11">
               <a:extLst>
                 <a:ext uri="{FF2B5EF4-FFF2-40B4-BE49-F238E27FC236}">
-                  <a16:creationId xmlns:a16="http://schemas.microsoft.com/office/drawing/2014/main" xmlns="" id="{21767101-A64F-7AEC-C268-8BA9DE052938}"/>
+                  <a16:creationId xmlns:a16="http://schemas.microsoft.com/office/drawing/2014/main" id="{21767101-A64F-7AEC-C268-8BA9DE052938}"/>
                 </a:ext>
               </a:extLst>
             </p:cNvPr>
@@ -32597,7 +32833,7 @@
             <p:cNvPr id="12" name="Imagen 13">
               <a:extLst>
                 <a:ext uri="{FF2B5EF4-FFF2-40B4-BE49-F238E27FC236}">
-                  <a16:creationId xmlns:a16="http://schemas.microsoft.com/office/drawing/2014/main" xmlns="" id="{6B1B3E6B-2614-529D-6A7A-E5F0C28A3CB8}"/>
+                  <a16:creationId xmlns:a16="http://schemas.microsoft.com/office/drawing/2014/main" id="{6B1B3E6B-2614-529D-6A7A-E5F0C28A3CB8}"/>
                 </a:ext>
               </a:extLst>
             </p:cNvPr>
@@ -32730,7 +32966,7 @@
         <p:cNvPr id="1" name="">
           <a:extLst>
             <a:ext uri="{FF2B5EF4-FFF2-40B4-BE49-F238E27FC236}">
-              <a16:creationId xmlns:a16="http://schemas.microsoft.com/office/drawing/2014/main" xmlns="" id="{6A0D715E-D98F-AD91-1E44-3A85EDC8A4AE}"/>
+              <a16:creationId xmlns:a16="http://schemas.microsoft.com/office/drawing/2014/main" id="{6A0D715E-D98F-AD91-1E44-3A85EDC8A4AE}"/>
             </a:ext>
           </a:extLst>
         </p:cNvPr>
@@ -32750,7 +32986,7 @@
           <p:cNvPr id="2" name="Title 1">
             <a:extLst>
               <a:ext uri="{FF2B5EF4-FFF2-40B4-BE49-F238E27FC236}">
-                <a16:creationId xmlns:a16="http://schemas.microsoft.com/office/drawing/2014/main" xmlns="" id="{015AD0F5-D257-DF49-4B5E-E3BD65D5CCB1}"/>
+                <a16:creationId xmlns:a16="http://schemas.microsoft.com/office/drawing/2014/main" id="{015AD0F5-D257-DF49-4B5E-E3BD65D5CCB1}"/>
               </a:ext>
             </a:extLst>
           </p:cNvPr>
@@ -32771,21 +33007,7 @@
                 <a:latin typeface="Times New Roman" panose="02020603050405020304" pitchFamily="18" charset="0"/>
                 <a:cs typeface="Times New Roman" panose="02020603050405020304" pitchFamily="18" charset="0"/>
               </a:rPr>
-              <a:t>Resultados – </a:t>
-            </a:r>
-            <a:r>
-              <a:rPr lang="es-419" dirty="0" smtClean="0">
-                <a:latin typeface="Times New Roman" panose="02020603050405020304" pitchFamily="18" charset="0"/>
-                <a:cs typeface="Times New Roman" panose="02020603050405020304" pitchFamily="18" charset="0"/>
-              </a:rPr>
-              <a:t>Fuentes </a:t>
-            </a:r>
-            <a:r>
-              <a:rPr lang="es-419" dirty="0">
-                <a:latin typeface="Times New Roman" panose="02020603050405020304" pitchFamily="18" charset="0"/>
-                <a:cs typeface="Times New Roman" panose="02020603050405020304" pitchFamily="18" charset="0"/>
-              </a:rPr>
-              <a:t>de error y mitigación</a:t>
+              <a:t>Resultados – Fuentes de error y mitigación</a:t>
             </a:r>
           </a:p>
         </p:txBody>
@@ -32795,7 +33017,7 @@
           <p:cNvPr id="4" name="Group 3">
             <a:extLst>
               <a:ext uri="{FF2B5EF4-FFF2-40B4-BE49-F238E27FC236}">
-                <a16:creationId xmlns:a16="http://schemas.microsoft.com/office/drawing/2014/main" xmlns="" id="{5F9D13D1-1C38-A72A-8529-669A1C270BB5}"/>
+                <a16:creationId xmlns:a16="http://schemas.microsoft.com/office/drawing/2014/main" id="{5F9D13D1-1C38-A72A-8529-669A1C270BB5}"/>
               </a:ext>
             </a:extLst>
           </p:cNvPr>
@@ -32815,7 +33037,7 @@
             <p:cNvPr id="5" name="Imagen 7">
               <a:extLst>
                 <a:ext uri="{FF2B5EF4-FFF2-40B4-BE49-F238E27FC236}">
-                  <a16:creationId xmlns:a16="http://schemas.microsoft.com/office/drawing/2014/main" xmlns="" id="{99B318A0-B87A-7179-42A5-AF2814918F77}"/>
+                  <a16:creationId xmlns:a16="http://schemas.microsoft.com/office/drawing/2014/main" id="{99B318A0-B87A-7179-42A5-AF2814918F77}"/>
                 </a:ext>
               </a:extLst>
             </p:cNvPr>
@@ -32851,7 +33073,7 @@
             <p:cNvPr id="6" name="Imagen 11">
               <a:extLst>
                 <a:ext uri="{FF2B5EF4-FFF2-40B4-BE49-F238E27FC236}">
-                  <a16:creationId xmlns:a16="http://schemas.microsoft.com/office/drawing/2014/main" xmlns="" id="{21767101-A64F-7AEC-C268-8BA9DE052938}"/>
+                  <a16:creationId xmlns:a16="http://schemas.microsoft.com/office/drawing/2014/main" id="{21767101-A64F-7AEC-C268-8BA9DE052938}"/>
                 </a:ext>
               </a:extLst>
             </p:cNvPr>
@@ -32887,7 +33109,7 @@
             <p:cNvPr id="7" name="Imagen 13">
               <a:extLst>
                 <a:ext uri="{FF2B5EF4-FFF2-40B4-BE49-F238E27FC236}">
-                  <a16:creationId xmlns:a16="http://schemas.microsoft.com/office/drawing/2014/main" xmlns="" id="{6B1B3E6B-2614-529D-6A7A-E5F0C28A3CB8}"/>
+                  <a16:creationId xmlns:a16="http://schemas.microsoft.com/office/drawing/2014/main" id="{6B1B3E6B-2614-529D-6A7A-E5F0C28A3CB8}"/>
                 </a:ext>
               </a:extLst>
             </p:cNvPr>
@@ -32999,13 +33221,6 @@
   <p:clrMapOvr>
     <a:masterClrMapping/>
   </p:clrMapOvr>
-  <p:timing>
-    <p:tnLst>
-      <p:par>
-        <p:cTn id="1" dur="indefinite" restart="never" nodeType="tmRoot"/>
-      </p:par>
-    </p:tnLst>
-  </p:timing>
 </p:sld>
 </file>
 
@@ -33017,7 +33232,7 @@
         <p:cNvPr id="1" name="">
           <a:extLst>
             <a:ext uri="{FF2B5EF4-FFF2-40B4-BE49-F238E27FC236}">
-              <a16:creationId xmlns:a16="http://schemas.microsoft.com/office/drawing/2014/main" xmlns="" id="{AB1B6383-CEFC-081F-84A9-1AFB3A666377}"/>
+              <a16:creationId xmlns:a16="http://schemas.microsoft.com/office/drawing/2014/main" id="{AB1B6383-CEFC-081F-84A9-1AFB3A666377}"/>
             </a:ext>
           </a:extLst>
         </p:cNvPr>
@@ -33037,7 +33252,7 @@
           <p:cNvPr id="2" name="Title 1">
             <a:extLst>
               <a:ext uri="{FF2B5EF4-FFF2-40B4-BE49-F238E27FC236}">
-                <a16:creationId xmlns:a16="http://schemas.microsoft.com/office/drawing/2014/main" xmlns="" id="{08D79A52-08C0-D544-64CE-2109F946A733}"/>
+                <a16:creationId xmlns:a16="http://schemas.microsoft.com/office/drawing/2014/main" id="{08D79A52-08C0-D544-64CE-2109F946A733}"/>
               </a:ext>
             </a:extLst>
           </p:cNvPr>
@@ -33068,7 +33283,7 @@
           <p:cNvPr id="3" name="Content Placeholder 2">
             <a:extLst>
               <a:ext uri="{FF2B5EF4-FFF2-40B4-BE49-F238E27FC236}">
-                <a16:creationId xmlns:a16="http://schemas.microsoft.com/office/drawing/2014/main" xmlns="" id="{6C5A51FC-C472-45E1-5F14-BE97258E59E6}"/>
+                <a16:creationId xmlns:a16="http://schemas.microsoft.com/office/drawing/2014/main" id="{6C5A51FC-C472-45E1-5F14-BE97258E59E6}"/>
               </a:ext>
             </a:extLst>
           </p:cNvPr>
@@ -33100,32 +33315,8 @@
                 <a:latin typeface="Times New Roman" panose="02020603050405020304" pitchFamily="18" charset="0"/>
                 <a:cs typeface="Times New Roman" panose="02020603050405020304" pitchFamily="18" charset="0"/>
               </a:rPr>
-              <a:t>La medición de la presión es mas complicado de lo que se </a:t>
+              <a:t>La medición de la presión es mas complicado de lo que se espero</a:t>
             </a:r>
-            <a:r>
-              <a:rPr lang="es-419" dirty="0" smtClean="0">
-                <a:latin typeface="Times New Roman" panose="02020603050405020304" pitchFamily="18" charset="0"/>
-                <a:cs typeface="Times New Roman" panose="02020603050405020304" pitchFamily="18" charset="0"/>
-              </a:rPr>
-              <a:t>espero</a:t>
-            </a:r>
-          </a:p>
-          <a:p>
-            <a:pPr marL="514350" indent="-514350">
-              <a:buFont typeface="+mj-lt"/>
-              <a:buAutoNum type="arabicPeriod"/>
-            </a:pPr>
-            <a:r>
-              <a:rPr lang="es-419" dirty="0" smtClean="0">
-                <a:latin typeface="Times New Roman" panose="02020603050405020304" pitchFamily="18" charset="0"/>
-                <a:cs typeface="Times New Roman" panose="02020603050405020304" pitchFamily="18" charset="0"/>
-              </a:rPr>
-              <a:t>No se dio importancia en la sujeción de los sensores, es importante declarar cómo se sujetaran. Después de los resultados se vio por la posibilidad de sujetarlos con adhesivos especiales que soporten cierta temperatura para que se mantengan rígidos pero que sean fácil de retirar posterior a su uso.</a:t>
-            </a:r>
-            <a:endParaRPr lang="es-419" dirty="0">
-              <a:latin typeface="Times New Roman" panose="02020603050405020304" pitchFamily="18" charset="0"/>
-              <a:cs typeface="Times New Roman" panose="02020603050405020304" pitchFamily="18" charset="0"/>
-            </a:endParaRPr>
           </a:p>
           <a:p>
             <a:pPr marL="514350" indent="-514350">
@@ -33137,49 +33328,34 @@
                 <a:latin typeface="Times New Roman" panose="02020603050405020304" pitchFamily="18" charset="0"/>
                 <a:cs typeface="Times New Roman" panose="02020603050405020304" pitchFamily="18" charset="0"/>
               </a:rPr>
-              <a:t>Los gases de combustión al hacer contacto con la zona de censado, quema el sensor. Para mitigar esto se utiliza una “grasa” o “sellador” de mediano a alta </a:t>
+              <a:t>No se dio importancia en la sujeción de los sensores, es importante declarar cómo se sujetaran. Después de los resultados se vio por la posibilidad de sujetarlos con adhesivos especiales que soporten cierta temperatura para que se mantengan rígidos pero que sean fácil de retirar posterior a su uso.</a:t>
             </a:r>
+          </a:p>
+          <a:p>
+            <a:pPr marL="514350" indent="-514350">
+              <a:buFont typeface="+mj-lt"/>
+              <a:buAutoNum type="arabicPeriod"/>
+            </a:pPr>
             <a:r>
-              <a:rPr lang="es-419" dirty="0" smtClean="0">
+              <a:rPr lang="es-419" dirty="0">
                 <a:latin typeface="Times New Roman" panose="02020603050405020304" pitchFamily="18" charset="0"/>
                 <a:cs typeface="Times New Roman" panose="02020603050405020304" pitchFamily="18" charset="0"/>
               </a:rPr>
-              <a:t>temp</a:t>
+              <a:t>Los gases de combustión al hacer contacto con la zona de censado, quema el sensor. Para mitigar esto se utiliza una “grasa” o “sellador” de mediano a alta temperatura, </a:t>
             </a:r>
             <a:r>
-              <a:rPr lang="es-419" dirty="0" smtClean="0">
+              <a:rPr lang="es-419" dirty="0" err="1">
                 <a:latin typeface="Times New Roman" panose="02020603050405020304" pitchFamily="18" charset="0"/>
                 <a:cs typeface="Times New Roman" panose="02020603050405020304" pitchFamily="18" charset="0"/>
               </a:rPr>
-              <a:t>eratura, </a:t>
-            </a:r>
-            <a:r>
-              <a:rPr lang="es-419" dirty="0" err="1" smtClean="0">
-                <a:latin typeface="Times New Roman" panose="02020603050405020304" pitchFamily="18" charset="0"/>
-                <a:cs typeface="Times New Roman" panose="02020603050405020304" pitchFamily="18" charset="0"/>
-              </a:rPr>
-              <a:t>al</a:t>
-            </a:r>
-            <a:r>
-              <a:rPr lang="es-419" dirty="0" err="1" smtClean="0">
-                <a:latin typeface="Times New Roman" panose="02020603050405020304" pitchFamily="18" charset="0"/>
-                <a:cs typeface="Times New Roman" panose="02020603050405020304" pitchFamily="18" charset="0"/>
-              </a:rPr>
-              <a:t>l</a:t>
-            </a:r>
-            <a:r>
-              <a:rPr lang="es-419" dirty="0" smtClean="0">
-                <a:latin typeface="Times New Roman" panose="02020603050405020304" pitchFamily="18" charset="0"/>
-                <a:cs typeface="Times New Roman" panose="02020603050405020304" pitchFamily="18" charset="0"/>
-              </a:rPr>
-              <a:t> </a:t>
+              <a:t>all</a:t>
             </a:r>
             <a:r>
               <a:rPr lang="es-419" dirty="0">
                 <a:latin typeface="Times New Roman" panose="02020603050405020304" pitchFamily="18" charset="0"/>
                 <a:cs typeface="Times New Roman" panose="02020603050405020304" pitchFamily="18" charset="0"/>
               </a:rPr>
-              <a:t>hacer esto, la grasa pasa de fase pero aun así transmite la presión. La transferencia de calor no es la suficiente para alterar lo medido en el sensor. El uso de este medio protector, puede “retardar” las mediciones.</a:t>
+              <a:t> hacer esto, la grasa pasa de fase pero aun así transmite la presión. La transferencia de calor no es la suficiente para alterar lo medido en el sensor. El uso de este medio protector, puede “retardar” las mediciones.</a:t>
             </a:r>
           </a:p>
           <a:p>
@@ -33229,7 +33405,7 @@
           <p:cNvPr id="4" name="Group 3">
             <a:extLst>
               <a:ext uri="{FF2B5EF4-FFF2-40B4-BE49-F238E27FC236}">
-                <a16:creationId xmlns:a16="http://schemas.microsoft.com/office/drawing/2014/main" xmlns="" id="{5F9D13D1-1C38-A72A-8529-669A1C270BB5}"/>
+                <a16:creationId xmlns:a16="http://schemas.microsoft.com/office/drawing/2014/main" id="{5F9D13D1-1C38-A72A-8529-669A1C270BB5}"/>
               </a:ext>
             </a:extLst>
           </p:cNvPr>
@@ -33249,7 +33425,7 @@
             <p:cNvPr id="5" name="Imagen 7">
               <a:extLst>
                 <a:ext uri="{FF2B5EF4-FFF2-40B4-BE49-F238E27FC236}">
-                  <a16:creationId xmlns:a16="http://schemas.microsoft.com/office/drawing/2014/main" xmlns="" id="{99B318A0-B87A-7179-42A5-AF2814918F77}"/>
+                  <a16:creationId xmlns:a16="http://schemas.microsoft.com/office/drawing/2014/main" id="{99B318A0-B87A-7179-42A5-AF2814918F77}"/>
                 </a:ext>
               </a:extLst>
             </p:cNvPr>
@@ -33259,7 +33435,7 @@
             <p:nvPr/>
           </p:nvPicPr>
           <p:blipFill>
-            <a:blip r:embed="rId2">
+            <a:blip r:embed="rId3">
               <a:extLst>
                 <a:ext uri="{28A0092B-C50C-407E-A947-70E740481C1C}">
                   <a14:useLocalDpi xmlns:a14="http://schemas.microsoft.com/office/drawing/2010/main" val="0"/>
@@ -33285,7 +33461,7 @@
             <p:cNvPr id="6" name="Imagen 11">
               <a:extLst>
                 <a:ext uri="{FF2B5EF4-FFF2-40B4-BE49-F238E27FC236}">
-                  <a16:creationId xmlns:a16="http://schemas.microsoft.com/office/drawing/2014/main" xmlns="" id="{21767101-A64F-7AEC-C268-8BA9DE052938}"/>
+                  <a16:creationId xmlns:a16="http://schemas.microsoft.com/office/drawing/2014/main" id="{21767101-A64F-7AEC-C268-8BA9DE052938}"/>
                 </a:ext>
               </a:extLst>
             </p:cNvPr>
@@ -33295,7 +33471,7 @@
             <p:nvPr/>
           </p:nvPicPr>
           <p:blipFill>
-            <a:blip r:embed="rId3" cstate="print">
+            <a:blip r:embed="rId4" cstate="print">
               <a:extLst>
                 <a:ext uri="{28A0092B-C50C-407E-A947-70E740481C1C}">
                   <a14:useLocalDpi xmlns:a14="http://schemas.microsoft.com/office/drawing/2010/main" val="0"/>
@@ -33321,7 +33497,7 @@
             <p:cNvPr id="7" name="Imagen 13">
               <a:extLst>
                 <a:ext uri="{FF2B5EF4-FFF2-40B4-BE49-F238E27FC236}">
-                  <a16:creationId xmlns:a16="http://schemas.microsoft.com/office/drawing/2014/main" xmlns="" id="{6B1B3E6B-2614-529D-6A7A-E5F0C28A3CB8}"/>
+                  <a16:creationId xmlns:a16="http://schemas.microsoft.com/office/drawing/2014/main" id="{6B1B3E6B-2614-529D-6A7A-E5F0C28A3CB8}"/>
                 </a:ext>
               </a:extLst>
             </p:cNvPr>
@@ -33331,7 +33507,7 @@
             <p:nvPr/>
           </p:nvPicPr>
           <p:blipFill>
-            <a:blip r:embed="rId4" cstate="print">
+            <a:blip r:embed="rId5" cstate="print">
               <a:extLst>
                 <a:ext uri="{28A0092B-C50C-407E-A947-70E740481C1C}">
                   <a14:useLocalDpi xmlns:a14="http://schemas.microsoft.com/office/drawing/2010/main" val="0"/>
@@ -33388,7 +33564,7 @@
           <p:cNvPr id="2" name="Título 1">
             <a:extLst>
               <a:ext uri="{FF2B5EF4-FFF2-40B4-BE49-F238E27FC236}">
-                <a16:creationId xmlns:a16="http://schemas.microsoft.com/office/drawing/2014/main" xmlns="" id="{7C97405F-E812-8ECA-0FBF-DE395633D086}"/>
+                <a16:creationId xmlns:a16="http://schemas.microsoft.com/office/drawing/2014/main" id="{7C97405F-E812-8ECA-0FBF-DE395633D086}"/>
               </a:ext>
             </a:extLst>
           </p:cNvPr>
@@ -33421,7 +33597,7 @@
           <p:cNvPr id="3" name="Marcador de contenido 2">
             <a:extLst>
               <a:ext uri="{FF2B5EF4-FFF2-40B4-BE49-F238E27FC236}">
-                <a16:creationId xmlns:a16="http://schemas.microsoft.com/office/drawing/2014/main" xmlns="" id="{4895F9A4-5583-A4D7-2C26-2C99E36AFD03}"/>
+                <a16:creationId xmlns:a16="http://schemas.microsoft.com/office/drawing/2014/main" id="{4895F9A4-5583-A4D7-2C26-2C99E36AFD03}"/>
               </a:ext>
             </a:extLst>
           </p:cNvPr>
@@ -33569,7 +33745,7 @@
           <p:cNvPr id="11" name="Imagen 10">
             <a:extLst>
               <a:ext uri="{FF2B5EF4-FFF2-40B4-BE49-F238E27FC236}">
-                <a16:creationId xmlns:a16="http://schemas.microsoft.com/office/drawing/2014/main" xmlns="" id="{0D66D670-FACF-9D43-855E-DD4781E3E832}"/>
+                <a16:creationId xmlns:a16="http://schemas.microsoft.com/office/drawing/2014/main" id="{0D66D670-FACF-9D43-855E-DD4781E3E832}"/>
               </a:ext>
             </a:extLst>
           </p:cNvPr>
@@ -33598,7 +33774,7 @@
           <p:cNvPr id="7" name="Group 6">
             <a:extLst>
               <a:ext uri="{FF2B5EF4-FFF2-40B4-BE49-F238E27FC236}">
-                <a16:creationId xmlns:a16="http://schemas.microsoft.com/office/drawing/2014/main" xmlns="" id="{91E0EF01-5EF7-F741-67B7-7E7FC20A87D7}"/>
+                <a16:creationId xmlns:a16="http://schemas.microsoft.com/office/drawing/2014/main" id="{91E0EF01-5EF7-F741-67B7-7E7FC20A87D7}"/>
               </a:ext>
             </a:extLst>
           </p:cNvPr>
@@ -33618,7 +33794,7 @@
             <p:cNvPr id="4" name="Imagen 7">
               <a:extLst>
                 <a:ext uri="{FF2B5EF4-FFF2-40B4-BE49-F238E27FC236}">
-                  <a16:creationId xmlns:a16="http://schemas.microsoft.com/office/drawing/2014/main" xmlns="" id="{B2C155BD-CC25-5EBE-0829-626E659EB487}"/>
+                  <a16:creationId xmlns:a16="http://schemas.microsoft.com/office/drawing/2014/main" id="{B2C155BD-CC25-5EBE-0829-626E659EB487}"/>
                 </a:ext>
               </a:extLst>
             </p:cNvPr>
@@ -33654,7 +33830,7 @@
             <p:cNvPr id="5" name="Imagen 11">
               <a:extLst>
                 <a:ext uri="{FF2B5EF4-FFF2-40B4-BE49-F238E27FC236}">
-                  <a16:creationId xmlns:a16="http://schemas.microsoft.com/office/drawing/2014/main" xmlns="" id="{5AB81FBA-70BE-D89F-5C53-9662921A1E38}"/>
+                  <a16:creationId xmlns:a16="http://schemas.microsoft.com/office/drawing/2014/main" id="{5AB81FBA-70BE-D89F-5C53-9662921A1E38}"/>
                 </a:ext>
               </a:extLst>
             </p:cNvPr>
@@ -33690,7 +33866,7 @@
             <p:cNvPr id="6" name="Imagen 13">
               <a:extLst>
                 <a:ext uri="{FF2B5EF4-FFF2-40B4-BE49-F238E27FC236}">
-                  <a16:creationId xmlns:a16="http://schemas.microsoft.com/office/drawing/2014/main" xmlns="" id="{25118A5E-ED08-D694-86C6-1BF7CEB30C8C}"/>
+                  <a16:creationId xmlns:a16="http://schemas.microsoft.com/office/drawing/2014/main" id="{25118A5E-ED08-D694-86C6-1BF7CEB30C8C}"/>
                 </a:ext>
               </a:extLst>
             </p:cNvPr>
@@ -33757,7 +33933,7 @@
           <p:cNvPr id="2" name="Title 1">
             <a:extLst>
               <a:ext uri="{FF2B5EF4-FFF2-40B4-BE49-F238E27FC236}">
-                <a16:creationId xmlns:a16="http://schemas.microsoft.com/office/drawing/2014/main" xmlns="" id="{49DB693F-3E7B-9FD4-A980-32DF66D806B1}"/>
+                <a16:creationId xmlns:a16="http://schemas.microsoft.com/office/drawing/2014/main" id="{49DB693F-3E7B-9FD4-A980-32DF66D806B1}"/>
               </a:ext>
             </a:extLst>
           </p:cNvPr>
@@ -33792,7 +33968,7 @@
           <p:cNvPr id="3" name="Content Placeholder 2">
             <a:extLst>
               <a:ext uri="{FF2B5EF4-FFF2-40B4-BE49-F238E27FC236}">
-                <a16:creationId xmlns:a16="http://schemas.microsoft.com/office/drawing/2014/main" xmlns="" id="{ED910B20-70C3-EE55-0612-C91E5B9F71A0}"/>
+                <a16:creationId xmlns:a16="http://schemas.microsoft.com/office/drawing/2014/main" id="{ED910B20-70C3-EE55-0612-C91E5B9F71A0}"/>
               </a:ext>
             </a:extLst>
           </p:cNvPr>
@@ -33841,7 +34017,7 @@
           <p:cNvPr id="4" name="Group 3">
             <a:extLst>
               <a:ext uri="{FF2B5EF4-FFF2-40B4-BE49-F238E27FC236}">
-                <a16:creationId xmlns:a16="http://schemas.microsoft.com/office/drawing/2014/main" xmlns="" id="{08B302FD-C244-CC3A-1CC9-738A0CDA888E}"/>
+                <a16:creationId xmlns:a16="http://schemas.microsoft.com/office/drawing/2014/main" id="{08B302FD-C244-CC3A-1CC9-738A0CDA888E}"/>
               </a:ext>
             </a:extLst>
           </p:cNvPr>
@@ -33861,7 +34037,7 @@
             <p:cNvPr id="5" name="Imagen 7">
               <a:extLst>
                 <a:ext uri="{FF2B5EF4-FFF2-40B4-BE49-F238E27FC236}">
-                  <a16:creationId xmlns:a16="http://schemas.microsoft.com/office/drawing/2014/main" xmlns="" id="{463C658A-BD83-9BE3-D1F3-71076DC69062}"/>
+                  <a16:creationId xmlns:a16="http://schemas.microsoft.com/office/drawing/2014/main" id="{463C658A-BD83-9BE3-D1F3-71076DC69062}"/>
                 </a:ext>
               </a:extLst>
             </p:cNvPr>
@@ -33897,7 +34073,7 @@
             <p:cNvPr id="6" name="Imagen 11">
               <a:extLst>
                 <a:ext uri="{FF2B5EF4-FFF2-40B4-BE49-F238E27FC236}">
-                  <a16:creationId xmlns:a16="http://schemas.microsoft.com/office/drawing/2014/main" xmlns="" id="{70AF1C6F-1A36-D571-C187-25E3EBA1C516}"/>
+                  <a16:creationId xmlns:a16="http://schemas.microsoft.com/office/drawing/2014/main" id="{70AF1C6F-1A36-D571-C187-25E3EBA1C516}"/>
                 </a:ext>
               </a:extLst>
             </p:cNvPr>
@@ -33933,7 +34109,7 @@
             <p:cNvPr id="7" name="Imagen 13">
               <a:extLst>
                 <a:ext uri="{FF2B5EF4-FFF2-40B4-BE49-F238E27FC236}">
-                  <a16:creationId xmlns:a16="http://schemas.microsoft.com/office/drawing/2014/main" xmlns="" id="{1AEBA4F5-4648-9E71-ECF3-8BF95B801D50}"/>
+                  <a16:creationId xmlns:a16="http://schemas.microsoft.com/office/drawing/2014/main" id="{1AEBA4F5-4648-9E71-ECF3-8BF95B801D50}"/>
                 </a:ext>
               </a:extLst>
             </p:cNvPr>
@@ -33972,7 +34148,7 @@
               <p:cNvPr id="9" name="TextBox 8">
                 <a:extLst>
                   <a:ext uri="{FF2B5EF4-FFF2-40B4-BE49-F238E27FC236}">
-                    <a16:creationId xmlns:a16="http://schemas.microsoft.com/office/drawing/2014/main" xmlns="" id="{E6490F59-B497-671C-21CE-8607BE322CAB}"/>
+                    <a16:creationId xmlns:a16="http://schemas.microsoft.com/office/drawing/2014/main" id="{E6490F59-B497-671C-21CE-8607BE322CAB}"/>
                   </a:ext>
                 </a:extLst>
               </p:cNvPr>
@@ -34768,7 +34944,7 @@
           <p:cNvPr id="10" name="Imagen 10">
             <a:extLst>
               <a:ext uri="{FF2B5EF4-FFF2-40B4-BE49-F238E27FC236}">
-                <a16:creationId xmlns:a16="http://schemas.microsoft.com/office/drawing/2014/main" xmlns="" id="{06CD6875-AC60-6048-2FB4-12292553919A}"/>
+                <a16:creationId xmlns:a16="http://schemas.microsoft.com/office/drawing/2014/main" id="{06CD6875-AC60-6048-2FB4-12292553919A}"/>
               </a:ext>
             </a:extLst>
           </p:cNvPr>
@@ -34798,7 +34974,7 @@
           <p:cNvPr id="11" name="CuadroTexto 18">
             <a:extLst>
               <a:ext uri="{FF2B5EF4-FFF2-40B4-BE49-F238E27FC236}">
-                <a16:creationId xmlns:a16="http://schemas.microsoft.com/office/drawing/2014/main" xmlns="" id="{C3416965-6BAC-EF75-A0D8-44E244C820C1}"/>
+                <a16:creationId xmlns:a16="http://schemas.microsoft.com/office/drawing/2014/main" id="{C3416965-6BAC-EF75-A0D8-44E244C820C1}"/>
               </a:ext>
             </a:extLst>
           </p:cNvPr>
@@ -34851,7 +35027,7 @@
           <p:cNvPr id="12" name="Rectangle 11">
             <a:extLst>
               <a:ext uri="{FF2B5EF4-FFF2-40B4-BE49-F238E27FC236}">
-                <a16:creationId xmlns:a16="http://schemas.microsoft.com/office/drawing/2014/main" xmlns="" id="{F13DB901-9CD5-2CCD-4FCA-49F048534096}"/>
+                <a16:creationId xmlns:a16="http://schemas.microsoft.com/office/drawing/2014/main" id="{F13DB901-9CD5-2CCD-4FCA-49F048534096}"/>
               </a:ext>
             </a:extLst>
           </p:cNvPr>
@@ -34903,7 +35079,7 @@
           <p:cNvPr id="13" name="Rectangle 12">
             <a:extLst>
               <a:ext uri="{FF2B5EF4-FFF2-40B4-BE49-F238E27FC236}">
-                <a16:creationId xmlns:a16="http://schemas.microsoft.com/office/drawing/2014/main" xmlns="" id="{E29DA15F-4305-938B-F69A-CD80040B91CB}"/>
+                <a16:creationId xmlns:a16="http://schemas.microsoft.com/office/drawing/2014/main" id="{E29DA15F-4305-938B-F69A-CD80040B91CB}"/>
               </a:ext>
             </a:extLst>
           </p:cNvPr>
@@ -34955,7 +35131,7 @@
           <p:cNvPr id="14" name="Rectangle 13">
             <a:extLst>
               <a:ext uri="{FF2B5EF4-FFF2-40B4-BE49-F238E27FC236}">
-                <a16:creationId xmlns:a16="http://schemas.microsoft.com/office/drawing/2014/main" xmlns="" id="{ED1D1358-50A8-3A7E-EAAC-7E0D69D835DF}"/>
+                <a16:creationId xmlns:a16="http://schemas.microsoft.com/office/drawing/2014/main" id="{ED1D1358-50A8-3A7E-EAAC-7E0D69D835DF}"/>
               </a:ext>
             </a:extLst>
           </p:cNvPr>
@@ -35007,7 +35183,7 @@
           <p:cNvPr id="15" name="Rectangle 14">
             <a:extLst>
               <a:ext uri="{FF2B5EF4-FFF2-40B4-BE49-F238E27FC236}">
-                <a16:creationId xmlns:a16="http://schemas.microsoft.com/office/drawing/2014/main" xmlns="" id="{C950D674-314E-B935-7B8F-15B589465341}"/>
+                <a16:creationId xmlns:a16="http://schemas.microsoft.com/office/drawing/2014/main" id="{C950D674-314E-B935-7B8F-15B589465341}"/>
               </a:ext>
             </a:extLst>
           </p:cNvPr>
@@ -35059,7 +35235,7 @@
           <p:cNvPr id="16" name="TextBox 15">
             <a:extLst>
               <a:ext uri="{FF2B5EF4-FFF2-40B4-BE49-F238E27FC236}">
-                <a16:creationId xmlns:a16="http://schemas.microsoft.com/office/drawing/2014/main" xmlns="" id="{056E56E6-F9E1-2500-292B-F6D79B4682F2}"/>
+                <a16:creationId xmlns:a16="http://schemas.microsoft.com/office/drawing/2014/main" id="{056E56E6-F9E1-2500-292B-F6D79B4682F2}"/>
               </a:ext>
             </a:extLst>
           </p:cNvPr>
@@ -35097,7 +35273,7 @@
           <p:cNvPr id="18" name="Straight Arrow Connector 17">
             <a:extLst>
               <a:ext uri="{FF2B5EF4-FFF2-40B4-BE49-F238E27FC236}">
-                <a16:creationId xmlns:a16="http://schemas.microsoft.com/office/drawing/2014/main" xmlns="" id="{9D0F36FE-4B7D-646F-BAF4-A194CE2CABBD}"/>
+                <a16:creationId xmlns:a16="http://schemas.microsoft.com/office/drawing/2014/main" id="{9D0F36FE-4B7D-646F-BAF4-A194CE2CABBD}"/>
               </a:ext>
             </a:extLst>
           </p:cNvPr>
@@ -35142,7 +35318,7 @@
           <p:cNvPr id="20" name="Straight Arrow Connector 19">
             <a:extLst>
               <a:ext uri="{FF2B5EF4-FFF2-40B4-BE49-F238E27FC236}">
-                <a16:creationId xmlns:a16="http://schemas.microsoft.com/office/drawing/2014/main" xmlns="" id="{99D3EFEC-0C2F-EA15-E129-DF44C5A24B73}"/>
+                <a16:creationId xmlns:a16="http://schemas.microsoft.com/office/drawing/2014/main" id="{99D3EFEC-0C2F-EA15-E129-DF44C5A24B73}"/>
               </a:ext>
             </a:extLst>
           </p:cNvPr>
@@ -35187,7 +35363,7 @@
           <p:cNvPr id="22" name="Straight Arrow Connector 21">
             <a:extLst>
               <a:ext uri="{FF2B5EF4-FFF2-40B4-BE49-F238E27FC236}">
-                <a16:creationId xmlns:a16="http://schemas.microsoft.com/office/drawing/2014/main" xmlns="" id="{6F348B4E-E3C0-ED92-A5BC-AB7CD463B260}"/>
+                <a16:creationId xmlns:a16="http://schemas.microsoft.com/office/drawing/2014/main" id="{6F348B4E-E3C0-ED92-A5BC-AB7CD463B260}"/>
               </a:ext>
             </a:extLst>
           </p:cNvPr>
@@ -35262,7 +35438,7 @@
           <p:cNvPr id="2" name="Title 1">
             <a:extLst>
               <a:ext uri="{FF2B5EF4-FFF2-40B4-BE49-F238E27FC236}">
-                <a16:creationId xmlns:a16="http://schemas.microsoft.com/office/drawing/2014/main" xmlns="" id="{9AADE1A5-CCAC-1889-B55F-39C8C03560DA}"/>
+                <a16:creationId xmlns:a16="http://schemas.microsoft.com/office/drawing/2014/main" id="{9AADE1A5-CCAC-1889-B55F-39C8C03560DA}"/>
               </a:ext>
             </a:extLst>
           </p:cNvPr>
@@ -35293,7 +35469,7 @@
           <p:cNvPr id="4" name="Content Placeholder 2">
             <a:extLst>
               <a:ext uri="{FF2B5EF4-FFF2-40B4-BE49-F238E27FC236}">
-                <a16:creationId xmlns:a16="http://schemas.microsoft.com/office/drawing/2014/main" xmlns="" id="{B79D1C2C-20AB-488B-22DA-C3FC060A49A7}"/>
+                <a16:creationId xmlns:a16="http://schemas.microsoft.com/office/drawing/2014/main" id="{B79D1C2C-20AB-488B-22DA-C3FC060A49A7}"/>
               </a:ext>
             </a:extLst>
           </p:cNvPr>
@@ -35499,7 +35675,7 @@
           <p:cNvPr id="9" name="Picture 8">
             <a:extLst>
               <a:ext uri="{FF2B5EF4-FFF2-40B4-BE49-F238E27FC236}">
-                <a16:creationId xmlns:a16="http://schemas.microsoft.com/office/drawing/2014/main" xmlns="" id="{13709654-5ACE-63E1-0D1D-970FBE294D67}"/>
+                <a16:creationId xmlns:a16="http://schemas.microsoft.com/office/drawing/2014/main" id="{13709654-5ACE-63E1-0D1D-970FBE294D67}"/>
               </a:ext>
             </a:extLst>
           </p:cNvPr>
@@ -35529,7 +35705,7 @@
           <p:cNvPr id="3" name="Group 2">
             <a:extLst>
               <a:ext uri="{FF2B5EF4-FFF2-40B4-BE49-F238E27FC236}">
-                <a16:creationId xmlns:a16="http://schemas.microsoft.com/office/drawing/2014/main" xmlns="" id="{44C831A7-8B55-BDDF-DF30-A1D6E4F496DD}"/>
+                <a16:creationId xmlns:a16="http://schemas.microsoft.com/office/drawing/2014/main" id="{44C831A7-8B55-BDDF-DF30-A1D6E4F496DD}"/>
               </a:ext>
             </a:extLst>
           </p:cNvPr>
@@ -35549,7 +35725,7 @@
             <p:cNvPr id="12" name="Group 11">
               <a:extLst>
                 <a:ext uri="{FF2B5EF4-FFF2-40B4-BE49-F238E27FC236}">
-                  <a16:creationId xmlns:a16="http://schemas.microsoft.com/office/drawing/2014/main" xmlns="" id="{3C4561C3-4895-885C-5D3F-1AD1C8FD5D87}"/>
+                  <a16:creationId xmlns:a16="http://schemas.microsoft.com/office/drawing/2014/main" id="{3C4561C3-4895-885C-5D3F-1AD1C8FD5D87}"/>
                 </a:ext>
               </a:extLst>
             </p:cNvPr>
@@ -35569,7 +35745,7 @@
               <p:cNvPr id="11" name="Isosceles Triangle 10">
                 <a:extLst>
                   <a:ext uri="{FF2B5EF4-FFF2-40B4-BE49-F238E27FC236}">
-                    <a16:creationId xmlns:a16="http://schemas.microsoft.com/office/drawing/2014/main" xmlns="" id="{BD3211EC-E8F6-35E1-B966-B260D69B7662}"/>
+                    <a16:creationId xmlns:a16="http://schemas.microsoft.com/office/drawing/2014/main" id="{BD3211EC-E8F6-35E1-B966-B260D69B7662}"/>
                   </a:ext>
                 </a:extLst>
               </p:cNvPr>
@@ -35626,7 +35802,7 @@
               <p:cNvPr id="10" name="Rectangle 9">
                 <a:extLst>
                   <a:ext uri="{FF2B5EF4-FFF2-40B4-BE49-F238E27FC236}">
-                    <a16:creationId xmlns:a16="http://schemas.microsoft.com/office/drawing/2014/main" xmlns="" id="{56D78A64-B132-9E5E-35BA-4F9105808455}"/>
+                    <a16:creationId xmlns:a16="http://schemas.microsoft.com/office/drawing/2014/main" id="{56D78A64-B132-9E5E-35BA-4F9105808455}"/>
                   </a:ext>
                 </a:extLst>
               </p:cNvPr>
@@ -35686,7 +35862,7 @@
                 <p:cNvPr id="17" name="TextBox 16">
                   <a:extLst>
                     <a:ext uri="{FF2B5EF4-FFF2-40B4-BE49-F238E27FC236}">
-                      <a16:creationId xmlns:a16="http://schemas.microsoft.com/office/drawing/2014/main" xmlns="" id="{30E75655-C86B-17C4-00D1-B2E30931A5F3}"/>
+                      <a16:creationId xmlns:a16="http://schemas.microsoft.com/office/drawing/2014/main" id="{30E75655-C86B-17C4-00D1-B2E30931A5F3}"/>
                     </a:ext>
                   </a:extLst>
                 </p:cNvPr>
@@ -35800,7 +35976,7 @@
                 <p:cNvPr id="19" name="TextBox 18">
                   <a:extLst>
                     <a:ext uri="{FF2B5EF4-FFF2-40B4-BE49-F238E27FC236}">
-                      <a16:creationId xmlns:a16="http://schemas.microsoft.com/office/drawing/2014/main" xmlns="" id="{146E18D6-91E9-B427-5774-5AE9A4C2A4CD}"/>
+                      <a16:creationId xmlns:a16="http://schemas.microsoft.com/office/drawing/2014/main" id="{146E18D6-91E9-B427-5774-5AE9A4C2A4CD}"/>
                     </a:ext>
                   </a:extLst>
                 </p:cNvPr>
@@ -35914,7 +36090,7 @@
           <p:cNvPr id="5" name="Group 4">
             <a:extLst>
               <a:ext uri="{FF2B5EF4-FFF2-40B4-BE49-F238E27FC236}">
-                <a16:creationId xmlns:a16="http://schemas.microsoft.com/office/drawing/2014/main" xmlns="" id="{D7E7E744-3E3E-26D1-23A2-AE537B8C174A}"/>
+                <a16:creationId xmlns:a16="http://schemas.microsoft.com/office/drawing/2014/main" id="{D7E7E744-3E3E-26D1-23A2-AE537B8C174A}"/>
               </a:ext>
             </a:extLst>
           </p:cNvPr>
@@ -35934,7 +36110,7 @@
             <p:cNvPr id="13" name="Group 12">
               <a:extLst>
                 <a:ext uri="{FF2B5EF4-FFF2-40B4-BE49-F238E27FC236}">
-                  <a16:creationId xmlns:a16="http://schemas.microsoft.com/office/drawing/2014/main" xmlns="" id="{6072978C-BFD8-3690-827F-7703F392C4F8}"/>
+                  <a16:creationId xmlns:a16="http://schemas.microsoft.com/office/drawing/2014/main" id="{6072978C-BFD8-3690-827F-7703F392C4F8}"/>
                 </a:ext>
               </a:extLst>
             </p:cNvPr>
@@ -35954,7 +36130,7 @@
               <p:cNvPr id="14" name="Isosceles Triangle 13">
                 <a:extLst>
                   <a:ext uri="{FF2B5EF4-FFF2-40B4-BE49-F238E27FC236}">
-                    <a16:creationId xmlns:a16="http://schemas.microsoft.com/office/drawing/2014/main" xmlns="" id="{C05116A4-8318-B460-3BF6-D9C1209BC116}"/>
+                    <a16:creationId xmlns:a16="http://schemas.microsoft.com/office/drawing/2014/main" id="{C05116A4-8318-B460-3BF6-D9C1209BC116}"/>
                   </a:ext>
                 </a:extLst>
               </p:cNvPr>
@@ -36011,7 +36187,7 @@
               <p:cNvPr id="15" name="Rectangle 14">
                 <a:extLst>
                   <a:ext uri="{FF2B5EF4-FFF2-40B4-BE49-F238E27FC236}">
-                    <a16:creationId xmlns:a16="http://schemas.microsoft.com/office/drawing/2014/main" xmlns="" id="{4C4084B4-9EEE-37EA-F2E7-47C43FE45F98}"/>
+                    <a16:creationId xmlns:a16="http://schemas.microsoft.com/office/drawing/2014/main" id="{4C4084B4-9EEE-37EA-F2E7-47C43FE45F98}"/>
                   </a:ext>
                 </a:extLst>
               </p:cNvPr>
@@ -36071,7 +36247,7 @@
                 <p:cNvPr id="18" name="TextBox 17">
                   <a:extLst>
                     <a:ext uri="{FF2B5EF4-FFF2-40B4-BE49-F238E27FC236}">
-                      <a16:creationId xmlns:a16="http://schemas.microsoft.com/office/drawing/2014/main" xmlns="" id="{24A543EA-E6F8-1E0F-4E74-2502BA9A6B8C}"/>
+                      <a16:creationId xmlns:a16="http://schemas.microsoft.com/office/drawing/2014/main" id="{24A543EA-E6F8-1E0F-4E74-2502BA9A6B8C}"/>
                     </a:ext>
                   </a:extLst>
                 </p:cNvPr>
@@ -36193,7 +36369,7 @@
                 <p:cNvPr id="20" name="TextBox 19">
                   <a:extLst>
                     <a:ext uri="{FF2B5EF4-FFF2-40B4-BE49-F238E27FC236}">
-                      <a16:creationId xmlns:a16="http://schemas.microsoft.com/office/drawing/2014/main" xmlns="" id="{529127DD-860C-7770-BCA4-82DD807FFCD8}"/>
+                      <a16:creationId xmlns:a16="http://schemas.microsoft.com/office/drawing/2014/main" id="{529127DD-860C-7770-BCA4-82DD807FFCD8}"/>
                     </a:ext>
                   </a:extLst>
                 </p:cNvPr>
@@ -36313,7 +36489,7 @@
             <p:cNvPr id="22" name="Straight Arrow Connector 21">
               <a:extLst>
                 <a:ext uri="{FF2B5EF4-FFF2-40B4-BE49-F238E27FC236}">
-                  <a16:creationId xmlns:a16="http://schemas.microsoft.com/office/drawing/2014/main" xmlns="" id="{5C6E93B4-2171-D8DC-1359-0C40672405DF}"/>
+                  <a16:creationId xmlns:a16="http://schemas.microsoft.com/office/drawing/2014/main" id="{5C6E93B4-2171-D8DC-1359-0C40672405DF}"/>
                 </a:ext>
               </a:extLst>
             </p:cNvPr>
@@ -36357,7 +36533,7 @@
             <p:cNvPr id="24" name="Connector: Curved 23">
               <a:extLst>
                 <a:ext uri="{FF2B5EF4-FFF2-40B4-BE49-F238E27FC236}">
-                  <a16:creationId xmlns:a16="http://schemas.microsoft.com/office/drawing/2014/main" xmlns="" id="{E6C853A7-CF8E-BFFC-BF6F-6913FADDA371}"/>
+                  <a16:creationId xmlns:a16="http://schemas.microsoft.com/office/drawing/2014/main" id="{E6C853A7-CF8E-BFFC-BF6F-6913FADDA371}"/>
                 </a:ext>
               </a:extLst>
             </p:cNvPr>
@@ -36405,7 +36581,7 @@
           <p:cNvPr id="28" name="CuadroTexto 18">
             <a:extLst>
               <a:ext uri="{FF2B5EF4-FFF2-40B4-BE49-F238E27FC236}">
-                <a16:creationId xmlns:a16="http://schemas.microsoft.com/office/drawing/2014/main" xmlns="" id="{0E43CF0E-5556-E695-89C5-87900A390E37}"/>
+                <a16:creationId xmlns:a16="http://schemas.microsoft.com/office/drawing/2014/main" id="{0E43CF0E-5556-E695-89C5-87900A390E37}"/>
               </a:ext>
             </a:extLst>
           </p:cNvPr>
@@ -36458,7 +36634,7 @@
           <p:cNvPr id="29" name="Table 28">
             <a:extLst>
               <a:ext uri="{FF2B5EF4-FFF2-40B4-BE49-F238E27FC236}">
-                <a16:creationId xmlns:a16="http://schemas.microsoft.com/office/drawing/2014/main" xmlns="" id="{D4639491-FC5C-40CA-F9F3-9ACC69C5486C}"/>
+                <a16:creationId xmlns:a16="http://schemas.microsoft.com/office/drawing/2014/main" id="{D4639491-FC5C-40CA-F9F3-9ACC69C5486C}"/>
               </a:ext>
             </a:extLst>
           </p:cNvPr>
@@ -36487,21 +36663,21 @@
                 <a:gridCol w="1378982">
                   <a:extLst>
                     <a:ext uri="{9D8B030D-6E8A-4147-A177-3AD203B41FA5}">
-                      <a16:colId xmlns:a16="http://schemas.microsoft.com/office/drawing/2014/main" xmlns="" val="3086435517"/>
+                      <a16:colId xmlns:a16="http://schemas.microsoft.com/office/drawing/2014/main" val="3086435517"/>
                     </a:ext>
                   </a:extLst>
                 </a:gridCol>
                 <a:gridCol w="1378982">
                   <a:extLst>
                     <a:ext uri="{9D8B030D-6E8A-4147-A177-3AD203B41FA5}">
-                      <a16:colId xmlns:a16="http://schemas.microsoft.com/office/drawing/2014/main" xmlns="" val="3910736875"/>
+                      <a16:colId xmlns:a16="http://schemas.microsoft.com/office/drawing/2014/main" val="3910736875"/>
                     </a:ext>
                   </a:extLst>
                 </a:gridCol>
                 <a:gridCol w="1378982">
                   <a:extLst>
                     <a:ext uri="{9D8B030D-6E8A-4147-A177-3AD203B41FA5}">
-                      <a16:colId xmlns:a16="http://schemas.microsoft.com/office/drawing/2014/main" xmlns="" val="914235034"/>
+                      <a16:colId xmlns:a16="http://schemas.microsoft.com/office/drawing/2014/main" val="914235034"/>
                     </a:ext>
                   </a:extLst>
                 </a:gridCol>
@@ -36560,7 +36736,7 @@
                 </a:tc>
                 <a:extLst>
                   <a:ext uri="{0D108BD9-81ED-4DB2-BD59-A6C34878D82A}">
-                    <a16:rowId xmlns:a16="http://schemas.microsoft.com/office/drawing/2014/main" xmlns="" val="3638040687"/>
+                    <a16:rowId xmlns:a16="http://schemas.microsoft.com/office/drawing/2014/main" val="3638040687"/>
                   </a:ext>
                 </a:extLst>
               </a:tr>
@@ -36618,7 +36794,7 @@
                 </a:tc>
                 <a:extLst>
                   <a:ext uri="{0D108BD9-81ED-4DB2-BD59-A6C34878D82A}">
-                    <a16:rowId xmlns:a16="http://schemas.microsoft.com/office/drawing/2014/main" xmlns="" val="181376308"/>
+                    <a16:rowId xmlns:a16="http://schemas.microsoft.com/office/drawing/2014/main" val="181376308"/>
                   </a:ext>
                 </a:extLst>
               </a:tr>
@@ -36676,7 +36852,7 @@
                 </a:tc>
                 <a:extLst>
                   <a:ext uri="{0D108BD9-81ED-4DB2-BD59-A6C34878D82A}">
-                    <a16:rowId xmlns:a16="http://schemas.microsoft.com/office/drawing/2014/main" xmlns="" val="950152723"/>
+                    <a16:rowId xmlns:a16="http://schemas.microsoft.com/office/drawing/2014/main" val="950152723"/>
                   </a:ext>
                 </a:extLst>
               </a:tr>
@@ -36734,7 +36910,7 @@
                 </a:tc>
                 <a:extLst>
                   <a:ext uri="{0D108BD9-81ED-4DB2-BD59-A6C34878D82A}">
-                    <a16:rowId xmlns:a16="http://schemas.microsoft.com/office/drawing/2014/main" xmlns="" val="4281954304"/>
+                    <a16:rowId xmlns:a16="http://schemas.microsoft.com/office/drawing/2014/main" val="4281954304"/>
                   </a:ext>
                 </a:extLst>
               </a:tr>
@@ -36747,7 +36923,7 @@
           <p:cNvPr id="30" name="Content Placeholder 2">
             <a:extLst>
               <a:ext uri="{FF2B5EF4-FFF2-40B4-BE49-F238E27FC236}">
-                <a16:creationId xmlns:a16="http://schemas.microsoft.com/office/drawing/2014/main" xmlns="" id="{451FD492-0018-D7B2-CA7F-630627968CCE}"/>
+                <a16:creationId xmlns:a16="http://schemas.microsoft.com/office/drawing/2014/main" id="{451FD492-0018-D7B2-CA7F-630627968CCE}"/>
               </a:ext>
             </a:extLst>
           </p:cNvPr>
@@ -36956,7 +37132,7 @@
           <p:cNvPr id="33" name="Group 32">
             <a:extLst>
               <a:ext uri="{FF2B5EF4-FFF2-40B4-BE49-F238E27FC236}">
-                <a16:creationId xmlns:a16="http://schemas.microsoft.com/office/drawing/2014/main" xmlns="" id="{D7890EE4-B884-4D03-43ED-DB4605AB0DD1}"/>
+                <a16:creationId xmlns:a16="http://schemas.microsoft.com/office/drawing/2014/main" id="{D7890EE4-B884-4D03-43ED-DB4605AB0DD1}"/>
               </a:ext>
             </a:extLst>
           </p:cNvPr>
@@ -36976,7 +37152,7 @@
             <p:cNvPr id="34" name="Imagen 7">
               <a:extLst>
                 <a:ext uri="{FF2B5EF4-FFF2-40B4-BE49-F238E27FC236}">
-                  <a16:creationId xmlns:a16="http://schemas.microsoft.com/office/drawing/2014/main" xmlns="" id="{AEB0B488-037E-7A80-5E40-D5CAEA25D8F6}"/>
+                  <a16:creationId xmlns:a16="http://schemas.microsoft.com/office/drawing/2014/main" id="{AEB0B488-037E-7A80-5E40-D5CAEA25D8F6}"/>
                 </a:ext>
               </a:extLst>
             </p:cNvPr>
@@ -37012,7 +37188,7 @@
             <p:cNvPr id="35" name="Imagen 11">
               <a:extLst>
                 <a:ext uri="{FF2B5EF4-FFF2-40B4-BE49-F238E27FC236}">
-                  <a16:creationId xmlns:a16="http://schemas.microsoft.com/office/drawing/2014/main" xmlns="" id="{1451A40C-27A8-3FBF-990B-EFC417A7F098}"/>
+                  <a16:creationId xmlns:a16="http://schemas.microsoft.com/office/drawing/2014/main" id="{1451A40C-27A8-3FBF-990B-EFC417A7F098}"/>
                 </a:ext>
               </a:extLst>
             </p:cNvPr>
@@ -37048,7 +37224,7 @@
             <p:cNvPr id="36" name="Imagen 13">
               <a:extLst>
                 <a:ext uri="{FF2B5EF4-FFF2-40B4-BE49-F238E27FC236}">
-                  <a16:creationId xmlns:a16="http://schemas.microsoft.com/office/drawing/2014/main" xmlns="" id="{C0ED2446-4492-0808-2E2F-05300DC6F41B}"/>
+                  <a16:creationId xmlns:a16="http://schemas.microsoft.com/office/drawing/2014/main" id="{C0ED2446-4492-0808-2E2F-05300DC6F41B}"/>
                 </a:ext>
               </a:extLst>
             </p:cNvPr>
@@ -37115,7 +37291,7 @@
           <p:cNvPr id="2" name="Title 1">
             <a:extLst>
               <a:ext uri="{FF2B5EF4-FFF2-40B4-BE49-F238E27FC236}">
-                <a16:creationId xmlns:a16="http://schemas.microsoft.com/office/drawing/2014/main" xmlns="" id="{207EEC96-4058-9E35-DC4A-F9ACEEE72D62}"/>
+                <a16:creationId xmlns:a16="http://schemas.microsoft.com/office/drawing/2014/main" id="{207EEC96-4058-9E35-DC4A-F9ACEEE72D62}"/>
               </a:ext>
             </a:extLst>
           </p:cNvPr>
@@ -37146,7 +37322,7 @@
           <p:cNvPr id="3" name="Content Placeholder 2">
             <a:extLst>
               <a:ext uri="{FF2B5EF4-FFF2-40B4-BE49-F238E27FC236}">
-                <a16:creationId xmlns:a16="http://schemas.microsoft.com/office/drawing/2014/main" xmlns="" id="{D31401BC-DA16-D8A5-B385-B6265F65DD43}"/>
+                <a16:creationId xmlns:a16="http://schemas.microsoft.com/office/drawing/2014/main" id="{D31401BC-DA16-D8A5-B385-B6265F65DD43}"/>
               </a:ext>
             </a:extLst>
           </p:cNvPr>
@@ -37278,7 +37454,7 @@
           <p:cNvPr id="4" name="Chart 3">
             <a:extLst>
               <a:ext uri="{FF2B5EF4-FFF2-40B4-BE49-F238E27FC236}">
-                <a16:creationId xmlns:a16="http://schemas.microsoft.com/office/drawing/2014/main" xmlns="" id="{00000000-0008-0000-0800-000077B97000}"/>
+                <a16:creationId xmlns:a16="http://schemas.microsoft.com/office/drawing/2014/main" id="{00000000-0008-0000-0800-000077B97000}"/>
               </a:ext>
             </a:extLst>
           </p:cNvPr>
@@ -37308,7 +37484,7 @@
           <p:cNvPr id="5" name="TextBox 4">
             <a:extLst>
               <a:ext uri="{FF2B5EF4-FFF2-40B4-BE49-F238E27FC236}">
-                <a16:creationId xmlns:a16="http://schemas.microsoft.com/office/drawing/2014/main" xmlns="" id="{91CD0AD6-F36B-6965-88ED-1AA7B9450210}"/>
+                <a16:creationId xmlns:a16="http://schemas.microsoft.com/office/drawing/2014/main" id="{91CD0AD6-F36B-6965-88ED-1AA7B9450210}"/>
               </a:ext>
             </a:extLst>
           </p:cNvPr>
@@ -37344,7 +37520,7 @@
                 <a:latin typeface="Times New Roman" panose="02020603050405020304" pitchFamily="18" charset="0"/>
                 <a:cs typeface="Times New Roman" panose="02020603050405020304" pitchFamily="18" charset="0"/>
               </a:rPr>
-              <a:t> #. Curva de empuje en el tiempo, la sumatorio de los puntos define el impulso y eficiencia del motor en N-</a:t>
+              <a:t> 1. Curva de empuje en el tiempo, la sumatorio de los puntos define el impulso y eficiencia del motor en N-</a:t>
             </a:r>
             <a:r>
               <a:rPr lang="es-419" dirty="0" err="1">
@@ -37382,7 +37558,7 @@
           <p:cNvPr id="6" name="Group 5">
             <a:extLst>
               <a:ext uri="{FF2B5EF4-FFF2-40B4-BE49-F238E27FC236}">
-                <a16:creationId xmlns:a16="http://schemas.microsoft.com/office/drawing/2014/main" xmlns="" id="{CCC0A7EA-2F84-9D48-1730-87EF316B7022}"/>
+                <a16:creationId xmlns:a16="http://schemas.microsoft.com/office/drawing/2014/main" id="{CCC0A7EA-2F84-9D48-1730-87EF316B7022}"/>
               </a:ext>
             </a:extLst>
           </p:cNvPr>
@@ -37402,7 +37578,7 @@
             <p:cNvPr id="7" name="Imagen 7">
               <a:extLst>
                 <a:ext uri="{FF2B5EF4-FFF2-40B4-BE49-F238E27FC236}">
-                  <a16:creationId xmlns:a16="http://schemas.microsoft.com/office/drawing/2014/main" xmlns="" id="{3B75A6AE-3365-FFF9-5BF5-62B61F1DBA68}"/>
+                  <a16:creationId xmlns:a16="http://schemas.microsoft.com/office/drawing/2014/main" id="{3B75A6AE-3365-FFF9-5BF5-62B61F1DBA68}"/>
                 </a:ext>
               </a:extLst>
             </p:cNvPr>
@@ -37438,7 +37614,7 @@
             <p:cNvPr id="8" name="Imagen 11">
               <a:extLst>
                 <a:ext uri="{FF2B5EF4-FFF2-40B4-BE49-F238E27FC236}">
-                  <a16:creationId xmlns:a16="http://schemas.microsoft.com/office/drawing/2014/main" xmlns="" id="{B6D1A21C-CDC6-B42C-C081-7EF8ECEDD2F4}"/>
+                  <a16:creationId xmlns:a16="http://schemas.microsoft.com/office/drawing/2014/main" id="{B6D1A21C-CDC6-B42C-C081-7EF8ECEDD2F4}"/>
                 </a:ext>
               </a:extLst>
             </p:cNvPr>
@@ -37474,7 +37650,7 @@
             <p:cNvPr id="9" name="Imagen 13">
               <a:extLst>
                 <a:ext uri="{FF2B5EF4-FFF2-40B4-BE49-F238E27FC236}">
-                  <a16:creationId xmlns:a16="http://schemas.microsoft.com/office/drawing/2014/main" xmlns="" id="{000081EF-0524-82B9-8325-619A99A5CB3A}"/>
+                  <a16:creationId xmlns:a16="http://schemas.microsoft.com/office/drawing/2014/main" id="{000081EF-0524-82B9-8325-619A99A5CB3A}"/>
                 </a:ext>
               </a:extLst>
             </p:cNvPr>
@@ -37541,7 +37717,7 @@
           <p:cNvPr id="2" name="Title 1">
             <a:extLst>
               <a:ext uri="{FF2B5EF4-FFF2-40B4-BE49-F238E27FC236}">
-                <a16:creationId xmlns:a16="http://schemas.microsoft.com/office/drawing/2014/main" xmlns="" id="{6428637B-D9FD-C011-0B5C-5148F711F602}"/>
+                <a16:creationId xmlns:a16="http://schemas.microsoft.com/office/drawing/2014/main" id="{6428637B-D9FD-C011-0B5C-5148F711F602}"/>
               </a:ext>
             </a:extLst>
           </p:cNvPr>
@@ -37585,7 +37761,7 @@
               <p:cNvPr id="3" name="Content Placeholder 2">
                 <a:extLst>
                   <a:ext uri="{FF2B5EF4-FFF2-40B4-BE49-F238E27FC236}">
-                    <a16:creationId xmlns:a16="http://schemas.microsoft.com/office/drawing/2014/main" xmlns="" id="{AB073959-2245-5A24-9C94-FB0FF250D7CA}"/>
+                    <a16:creationId xmlns:a16="http://schemas.microsoft.com/office/drawing/2014/main" id="{AB073959-2245-5A24-9C94-FB0FF250D7CA}"/>
                   </a:ext>
                 </a:extLst>
               </p:cNvPr>
@@ -37849,7 +38025,7 @@
           <p:cNvPr id="5" name="Group 4">
             <a:extLst>
               <a:ext uri="{FF2B5EF4-FFF2-40B4-BE49-F238E27FC236}">
-                <a16:creationId xmlns:a16="http://schemas.microsoft.com/office/drawing/2014/main" xmlns="" id="{456702EC-B038-7337-7400-306497CE0888}"/>
+                <a16:creationId xmlns:a16="http://schemas.microsoft.com/office/drawing/2014/main" id="{456702EC-B038-7337-7400-306497CE0888}"/>
               </a:ext>
             </a:extLst>
           </p:cNvPr>
@@ -37869,7 +38045,7 @@
             <p:cNvPr id="6" name="Imagen 7">
               <a:extLst>
                 <a:ext uri="{FF2B5EF4-FFF2-40B4-BE49-F238E27FC236}">
-                  <a16:creationId xmlns:a16="http://schemas.microsoft.com/office/drawing/2014/main" xmlns="" id="{A883BE8C-B8C3-0FFB-6771-C28029895122}"/>
+                  <a16:creationId xmlns:a16="http://schemas.microsoft.com/office/drawing/2014/main" id="{A883BE8C-B8C3-0FFB-6771-C28029895122}"/>
                 </a:ext>
               </a:extLst>
             </p:cNvPr>
@@ -37905,7 +38081,7 @@
             <p:cNvPr id="7" name="Imagen 11">
               <a:extLst>
                 <a:ext uri="{FF2B5EF4-FFF2-40B4-BE49-F238E27FC236}">
-                  <a16:creationId xmlns:a16="http://schemas.microsoft.com/office/drawing/2014/main" xmlns="" id="{A3F6DBD8-B75A-C3EF-6E20-B99FFAFF87EA}"/>
+                  <a16:creationId xmlns:a16="http://schemas.microsoft.com/office/drawing/2014/main" id="{A3F6DBD8-B75A-C3EF-6E20-B99FFAFF87EA}"/>
                 </a:ext>
               </a:extLst>
             </p:cNvPr>
@@ -37941,7 +38117,7 @@
             <p:cNvPr id="8" name="Imagen 13">
               <a:extLst>
                 <a:ext uri="{FF2B5EF4-FFF2-40B4-BE49-F238E27FC236}">
-                  <a16:creationId xmlns:a16="http://schemas.microsoft.com/office/drawing/2014/main" xmlns="" id="{5E0D62F0-ECC0-CF60-3130-9D214B5A898D}"/>
+                  <a16:creationId xmlns:a16="http://schemas.microsoft.com/office/drawing/2014/main" id="{5E0D62F0-ECC0-CF60-3130-9D214B5A898D}"/>
                 </a:ext>
               </a:extLst>
             </p:cNvPr>
@@ -38019,7 +38195,7 @@
           <p:cNvPr id="12" name="TextBox 11">
             <a:extLst>
               <a:ext uri="{FF2B5EF4-FFF2-40B4-BE49-F238E27FC236}">
-                <a16:creationId xmlns:a16="http://schemas.microsoft.com/office/drawing/2014/main" xmlns="" id="{91CD0AD6-F36B-6965-88ED-1AA7B9450210}"/>
+                <a16:creationId xmlns:a16="http://schemas.microsoft.com/office/drawing/2014/main" id="{91CD0AD6-F36B-6965-88ED-1AA7B9450210}"/>
               </a:ext>
             </a:extLst>
           </p:cNvPr>
@@ -38055,19 +38231,8 @@
                 <a:latin typeface="Times New Roman" panose="02020603050405020304" pitchFamily="18" charset="0"/>
                 <a:cs typeface="Times New Roman" panose="02020603050405020304" pitchFamily="18" charset="0"/>
               </a:rPr>
-              <a:t> #. </a:t>
+              <a:t> 2. Este factor de seguridad se ve implicado más en la selección de la celda de carga, pero aplica para cualquier otro sensor.</a:t>
             </a:r>
-            <a:r>
-              <a:rPr lang="es-419" dirty="0" smtClean="0">
-                <a:latin typeface="Times New Roman" panose="02020603050405020304" pitchFamily="18" charset="0"/>
-                <a:cs typeface="Times New Roman" panose="02020603050405020304" pitchFamily="18" charset="0"/>
-              </a:rPr>
-              <a:t>Este factor de seguridad se ve implicado más en la selección de la celda de carga, pero aplica para cualquier otro sensor.</a:t>
-            </a:r>
-            <a:endParaRPr lang="es-419" dirty="0">
-              <a:latin typeface="Times New Roman" panose="02020603050405020304" pitchFamily="18" charset="0"/>
-              <a:cs typeface="Times New Roman" panose="02020603050405020304" pitchFamily="18" charset="0"/>
-            </a:endParaRPr>
           </a:p>
         </p:txBody>
       </p:sp>
@@ -38106,7 +38271,7 @@
           <p:cNvPr id="2" name="Title 1">
             <a:extLst>
               <a:ext uri="{FF2B5EF4-FFF2-40B4-BE49-F238E27FC236}">
-                <a16:creationId xmlns:a16="http://schemas.microsoft.com/office/drawing/2014/main" xmlns="" id="{6428637B-D9FD-C011-0B5C-5148F711F602}"/>
+                <a16:creationId xmlns:a16="http://schemas.microsoft.com/office/drawing/2014/main" id="{6428637B-D9FD-C011-0B5C-5148F711F602}"/>
               </a:ext>
             </a:extLst>
           </p:cNvPr>
@@ -38143,14 +38308,14 @@
           </a:p>
         </p:txBody>
       </p:sp>
-      <mc:AlternateContent xmlns:mc="http://schemas.openxmlformats.org/markup-compatibility/2006">
-        <mc:Choice xmlns:a14="http://schemas.microsoft.com/office/drawing/2010/main" Requires="a14">
+      <mc:AlternateContent xmlns:mc="http://schemas.openxmlformats.org/markup-compatibility/2006" xmlns:a14="http://schemas.microsoft.com/office/drawing/2010/main">
+        <mc:Choice Requires="a14">
           <p:sp>
             <p:nvSpPr>
               <p:cNvPr id="4" name="Content Placeholder 2">
                 <a:extLst>
                   <a:ext uri="{FF2B5EF4-FFF2-40B4-BE49-F238E27FC236}">
-                    <a16:creationId xmlns:a16="http://schemas.microsoft.com/office/drawing/2014/main" xmlns="" id="{DB0CBA15-C345-8680-21BE-797F433AA71B}"/>
+                    <a16:creationId xmlns:a16="http://schemas.microsoft.com/office/drawing/2014/main" id="{DB0CBA15-C345-8680-21BE-797F433AA71B}"/>
                   </a:ext>
                 </a:extLst>
               </p:cNvPr>
@@ -38538,7 +38703,7 @@
             </p:txBody>
           </p:sp>
         </mc:Choice>
-        <mc:Fallback>
+        <mc:Fallback xmlns="">
           <p:sp>
             <p:nvSpPr>
               <p:cNvPr id="4" name="Content Placeholder 2">
@@ -38588,7 +38753,7 @@
           <p:cNvPr id="5" name="Group 4">
             <a:extLst>
               <a:ext uri="{FF2B5EF4-FFF2-40B4-BE49-F238E27FC236}">
-                <a16:creationId xmlns:a16="http://schemas.microsoft.com/office/drawing/2014/main" xmlns="" id="{456702EC-B038-7337-7400-306497CE0888}"/>
+                <a16:creationId xmlns:a16="http://schemas.microsoft.com/office/drawing/2014/main" id="{456702EC-B038-7337-7400-306497CE0888}"/>
               </a:ext>
             </a:extLst>
           </p:cNvPr>
@@ -38608,7 +38773,7 @@
             <p:cNvPr id="6" name="Imagen 7">
               <a:extLst>
                 <a:ext uri="{FF2B5EF4-FFF2-40B4-BE49-F238E27FC236}">
-                  <a16:creationId xmlns:a16="http://schemas.microsoft.com/office/drawing/2014/main" xmlns="" id="{A883BE8C-B8C3-0FFB-6771-C28029895122}"/>
+                  <a16:creationId xmlns:a16="http://schemas.microsoft.com/office/drawing/2014/main" id="{A883BE8C-B8C3-0FFB-6771-C28029895122}"/>
                 </a:ext>
               </a:extLst>
             </p:cNvPr>
@@ -38644,7 +38809,7 @@
             <p:cNvPr id="7" name="Imagen 11">
               <a:extLst>
                 <a:ext uri="{FF2B5EF4-FFF2-40B4-BE49-F238E27FC236}">
-                  <a16:creationId xmlns:a16="http://schemas.microsoft.com/office/drawing/2014/main" xmlns="" id="{A3F6DBD8-B75A-C3EF-6E20-B99FFAFF87EA}"/>
+                  <a16:creationId xmlns:a16="http://schemas.microsoft.com/office/drawing/2014/main" id="{A3F6DBD8-B75A-C3EF-6E20-B99FFAFF87EA}"/>
                 </a:ext>
               </a:extLst>
             </p:cNvPr>
@@ -38680,7 +38845,7 @@
             <p:cNvPr id="8" name="Imagen 13">
               <a:extLst>
                 <a:ext uri="{FF2B5EF4-FFF2-40B4-BE49-F238E27FC236}">
-                  <a16:creationId xmlns:a16="http://schemas.microsoft.com/office/drawing/2014/main" xmlns="" id="{5E0D62F0-ECC0-CF60-3130-9D214B5A898D}"/>
+                  <a16:creationId xmlns:a16="http://schemas.microsoft.com/office/drawing/2014/main" id="{5E0D62F0-ECC0-CF60-3130-9D214B5A898D}"/>
                 </a:ext>
               </a:extLst>
             </p:cNvPr>
@@ -38717,7 +38882,7 @@
           <p:cNvPr id="10" name="Chart 9">
             <a:extLst>
               <a:ext uri="{FF2B5EF4-FFF2-40B4-BE49-F238E27FC236}">
-                <a16:creationId xmlns:a16="http://schemas.microsoft.com/office/drawing/2014/main" xmlns="" id="{00000000-0008-0000-0800-000077B97000}"/>
+                <a16:creationId xmlns:a16="http://schemas.microsoft.com/office/drawing/2014/main" id="{00000000-0008-0000-0800-000077B97000}"/>
               </a:ext>
             </a:extLst>
           </p:cNvPr>
@@ -38747,7 +38912,7 @@
           <p:cNvPr id="11" name="TextBox 10">
             <a:extLst>
               <a:ext uri="{FF2B5EF4-FFF2-40B4-BE49-F238E27FC236}">
-                <a16:creationId xmlns:a16="http://schemas.microsoft.com/office/drawing/2014/main" xmlns="" id="{91CD0AD6-F36B-6965-88ED-1AA7B9450210}"/>
+                <a16:creationId xmlns:a16="http://schemas.microsoft.com/office/drawing/2014/main" id="{91CD0AD6-F36B-6965-88ED-1AA7B9450210}"/>
               </a:ext>
             </a:extLst>
           </p:cNvPr>
@@ -38783,7 +38948,7 @@
                 <a:latin typeface="Times New Roman" panose="02020603050405020304" pitchFamily="18" charset="0"/>
                 <a:cs typeface="Times New Roman" panose="02020603050405020304" pitchFamily="18" charset="0"/>
               </a:rPr>
-              <a:t> #. Curva de empuje en el tiempo, la sumatorio de los puntos define el impulso y eficiencia del motor en N-</a:t>
+              <a:t> 3. Curva de empuje en el tiempo, la sumatorio de los puntos define el impulso y eficiencia del motor en N-</a:t>
             </a:r>
             <a:r>
               <a:rPr lang="es-419" dirty="0" err="1">
@@ -38837,7 +39002,7 @@
         <p:cNvPr id="1" name="">
           <a:extLst>
             <a:ext uri="{FF2B5EF4-FFF2-40B4-BE49-F238E27FC236}">
-              <a16:creationId xmlns:a16="http://schemas.microsoft.com/office/drawing/2014/main" xmlns="" id="{5141A958-D6BA-E085-B2BC-9DB0D8E227CD}"/>
+              <a16:creationId xmlns:a16="http://schemas.microsoft.com/office/drawing/2014/main" id="{5141A958-D6BA-E085-B2BC-9DB0D8E227CD}"/>
             </a:ext>
           </a:extLst>
         </p:cNvPr>
@@ -38857,7 +39022,7 @@
           <p:cNvPr id="2" name="Title 1">
             <a:extLst>
               <a:ext uri="{FF2B5EF4-FFF2-40B4-BE49-F238E27FC236}">
-                <a16:creationId xmlns:a16="http://schemas.microsoft.com/office/drawing/2014/main" xmlns="" id="{9DC3FC39-DA89-78EA-38B0-B40B2CDC217E}"/>
+                <a16:creationId xmlns:a16="http://schemas.microsoft.com/office/drawing/2014/main" id="{9DC3FC39-DA89-78EA-38B0-B40B2CDC217E}"/>
               </a:ext>
             </a:extLst>
           </p:cNvPr>
@@ -38874,18 +39039,11 @@
           <a:lstStyle/>
           <a:p>
             <a:r>
-              <a:rPr lang="es-419" dirty="0" smtClean="0">
-                <a:latin typeface="Times New Roman" panose="02020603050405020304" pitchFamily="18" charset="0"/>
-                <a:cs typeface="Times New Roman" panose="02020603050405020304" pitchFamily="18" charset="0"/>
-              </a:rPr>
-              <a:t>Metodología </a:t>
-            </a:r>
-            <a:r>
               <a:rPr lang="es-419" dirty="0">
                 <a:latin typeface="Times New Roman" panose="02020603050405020304" pitchFamily="18" charset="0"/>
                 <a:cs typeface="Times New Roman" panose="02020603050405020304" pitchFamily="18" charset="0"/>
               </a:rPr>
-              <a:t>– Enfoque </a:t>
+              <a:t>Metodología – Enfoque </a:t>
             </a:r>
           </a:p>
         </p:txBody>
@@ -38895,7 +39053,7 @@
           <p:cNvPr id="4" name="Content Placeholder 2">
             <a:extLst>
               <a:ext uri="{FF2B5EF4-FFF2-40B4-BE49-F238E27FC236}">
-                <a16:creationId xmlns:a16="http://schemas.microsoft.com/office/drawing/2014/main" xmlns="" id="{E292828F-3C56-EF9E-06C3-57D2E5F316A1}"/>
+                <a16:creationId xmlns:a16="http://schemas.microsoft.com/office/drawing/2014/main" id="{E292828F-3C56-EF9E-06C3-57D2E5F316A1}"/>
               </a:ext>
             </a:extLst>
           </p:cNvPr>
@@ -39121,7 +39279,7 @@
           <p:cNvPr id="5" name="Group 4">
             <a:extLst>
               <a:ext uri="{FF2B5EF4-FFF2-40B4-BE49-F238E27FC236}">
-                <a16:creationId xmlns:a16="http://schemas.microsoft.com/office/drawing/2014/main" xmlns="" id="{424E729D-3A2D-840F-A022-CD16D84C6691}"/>
+                <a16:creationId xmlns:a16="http://schemas.microsoft.com/office/drawing/2014/main" id="{424E729D-3A2D-840F-A022-CD16D84C6691}"/>
               </a:ext>
             </a:extLst>
           </p:cNvPr>
@@ -39141,7 +39299,7 @@
             <p:cNvPr id="6" name="Imagen 7">
               <a:extLst>
                 <a:ext uri="{FF2B5EF4-FFF2-40B4-BE49-F238E27FC236}">
-                  <a16:creationId xmlns:a16="http://schemas.microsoft.com/office/drawing/2014/main" xmlns="" id="{8FF50577-7AF3-238D-81B7-9A007F428010}"/>
+                  <a16:creationId xmlns:a16="http://schemas.microsoft.com/office/drawing/2014/main" id="{8FF50577-7AF3-238D-81B7-9A007F428010}"/>
                 </a:ext>
               </a:extLst>
             </p:cNvPr>
@@ -39177,7 +39335,7 @@
             <p:cNvPr id="7" name="Imagen 11">
               <a:extLst>
                 <a:ext uri="{FF2B5EF4-FFF2-40B4-BE49-F238E27FC236}">
-                  <a16:creationId xmlns:a16="http://schemas.microsoft.com/office/drawing/2014/main" xmlns="" id="{C4DF7D64-0225-F62A-B37F-93672CB17F5E}"/>
+                  <a16:creationId xmlns:a16="http://schemas.microsoft.com/office/drawing/2014/main" id="{C4DF7D64-0225-F62A-B37F-93672CB17F5E}"/>
                 </a:ext>
               </a:extLst>
             </p:cNvPr>
@@ -39213,7 +39371,7 @@
             <p:cNvPr id="8" name="Imagen 13">
               <a:extLst>
                 <a:ext uri="{FF2B5EF4-FFF2-40B4-BE49-F238E27FC236}">
-                  <a16:creationId xmlns:a16="http://schemas.microsoft.com/office/drawing/2014/main" xmlns="" id="{03B9FD00-466B-26C1-7381-4E0DFA96A708}"/>
+                  <a16:creationId xmlns:a16="http://schemas.microsoft.com/office/drawing/2014/main" id="{03B9FD00-466B-26C1-7381-4E0DFA96A708}"/>
                 </a:ext>
               </a:extLst>
             </p:cNvPr>
@@ -39266,7 +39424,7 @@
         <p:cNvPr id="1" name="">
           <a:extLst>
             <a:ext uri="{FF2B5EF4-FFF2-40B4-BE49-F238E27FC236}">
-              <a16:creationId xmlns:a16="http://schemas.microsoft.com/office/drawing/2014/main" xmlns="" id="{C01BC309-78D1-8419-CFC6-50795D7189EE}"/>
+              <a16:creationId xmlns:a16="http://schemas.microsoft.com/office/drawing/2014/main" id="{C01BC309-78D1-8419-CFC6-50795D7189EE}"/>
             </a:ext>
           </a:extLst>
         </p:cNvPr>
@@ -39286,7 +39444,7 @@
           <p:cNvPr id="2" name="Title 1">
             <a:extLst>
               <a:ext uri="{FF2B5EF4-FFF2-40B4-BE49-F238E27FC236}">
-                <a16:creationId xmlns:a16="http://schemas.microsoft.com/office/drawing/2014/main" xmlns="" id="{42055AFD-42DC-B5B3-5D5A-83ED0CBFB5D0}"/>
+                <a16:creationId xmlns:a16="http://schemas.microsoft.com/office/drawing/2014/main" id="{42055AFD-42DC-B5B3-5D5A-83ED0CBFB5D0}"/>
               </a:ext>
             </a:extLst>
           </p:cNvPr>
@@ -39317,7 +39475,7 @@
           <p:cNvPr id="5" name="Rectangle: Rounded Corners 4">
             <a:extLst>
               <a:ext uri="{FF2B5EF4-FFF2-40B4-BE49-F238E27FC236}">
-                <a16:creationId xmlns:a16="http://schemas.microsoft.com/office/drawing/2014/main" xmlns="" id="{B738D648-EBB1-5079-7E81-CFD7B5389771}"/>
+                <a16:creationId xmlns:a16="http://schemas.microsoft.com/office/drawing/2014/main" id="{B738D648-EBB1-5079-7E81-CFD7B5389771}"/>
               </a:ext>
             </a:extLst>
           </p:cNvPr>
@@ -39409,7 +39567,7 @@
           <p:cNvPr id="6" name="Rectangle: Rounded Corners 5">
             <a:extLst>
               <a:ext uri="{FF2B5EF4-FFF2-40B4-BE49-F238E27FC236}">
-                <a16:creationId xmlns:a16="http://schemas.microsoft.com/office/drawing/2014/main" xmlns="" id="{80333EBA-2A91-405D-B322-AA136B4F7F88}"/>
+                <a16:creationId xmlns:a16="http://schemas.microsoft.com/office/drawing/2014/main" id="{80333EBA-2A91-405D-B322-AA136B4F7F88}"/>
               </a:ext>
             </a:extLst>
           </p:cNvPr>
@@ -39544,7 +39702,7 @@
           <p:cNvPr id="9" name="Rectangle 8">
             <a:extLst>
               <a:ext uri="{FF2B5EF4-FFF2-40B4-BE49-F238E27FC236}">
-                <a16:creationId xmlns:a16="http://schemas.microsoft.com/office/drawing/2014/main" xmlns="" id="{1A821767-952C-002D-24D2-C73AD700EE10}"/>
+                <a16:creationId xmlns:a16="http://schemas.microsoft.com/office/drawing/2014/main" id="{1A821767-952C-002D-24D2-C73AD700EE10}"/>
               </a:ext>
             </a:extLst>
           </p:cNvPr>
@@ -39637,7 +39795,7 @@
           <p:cNvPr id="10" name="Group 9">
             <a:extLst>
               <a:ext uri="{FF2B5EF4-FFF2-40B4-BE49-F238E27FC236}">
-                <a16:creationId xmlns:a16="http://schemas.microsoft.com/office/drawing/2014/main" xmlns="" id="{8563204A-DF45-EB29-4681-B3CFEDEBFC35}"/>
+                <a16:creationId xmlns:a16="http://schemas.microsoft.com/office/drawing/2014/main" id="{8563204A-DF45-EB29-4681-B3CFEDEBFC35}"/>
               </a:ext>
             </a:extLst>
           </p:cNvPr>
@@ -39657,7 +39815,7 @@
             <p:cNvPr id="11" name="Imagen 7">
               <a:extLst>
                 <a:ext uri="{FF2B5EF4-FFF2-40B4-BE49-F238E27FC236}">
-                  <a16:creationId xmlns:a16="http://schemas.microsoft.com/office/drawing/2014/main" xmlns="" id="{3AB3D370-4B51-EB66-743B-FF02E67D4754}"/>
+                  <a16:creationId xmlns:a16="http://schemas.microsoft.com/office/drawing/2014/main" id="{3AB3D370-4B51-EB66-743B-FF02E67D4754}"/>
                 </a:ext>
               </a:extLst>
             </p:cNvPr>
@@ -39693,7 +39851,7 @@
             <p:cNvPr id="12" name="Imagen 11">
               <a:extLst>
                 <a:ext uri="{FF2B5EF4-FFF2-40B4-BE49-F238E27FC236}">
-                  <a16:creationId xmlns:a16="http://schemas.microsoft.com/office/drawing/2014/main" xmlns="" id="{8D1D7F90-8334-2C16-56B9-C4317B780143}"/>
+                  <a16:creationId xmlns:a16="http://schemas.microsoft.com/office/drawing/2014/main" id="{8D1D7F90-8334-2C16-56B9-C4317B780143}"/>
                 </a:ext>
               </a:extLst>
             </p:cNvPr>
@@ -39729,7 +39887,7 @@
             <p:cNvPr id="13" name="Imagen 13">
               <a:extLst>
                 <a:ext uri="{FF2B5EF4-FFF2-40B4-BE49-F238E27FC236}">
-                  <a16:creationId xmlns:a16="http://schemas.microsoft.com/office/drawing/2014/main" xmlns="" id="{CF962F7F-39A6-B947-17F3-F801E3B8C087}"/>
+                  <a16:creationId xmlns:a16="http://schemas.microsoft.com/office/drawing/2014/main" id="{CF962F7F-39A6-B947-17F3-F801E3B8C087}"/>
                 </a:ext>
               </a:extLst>
             </p:cNvPr>
